--- a/frontend/public/presentation-templates/dark-tech-v2.pptx
+++ b/frontend/public/presentation-templates/dark-tech-v2.pptx
@@ -2,30 +2,30 @@
 <file path=ppt/presentation.xml><?xml version="1.0" encoding="utf-8"?>
 <p:presentation xmlns:p="http://schemas.openxmlformats.org/presentationml/2006/main">
   <p:sldMasterIdLst>
-    <p:sldMasterId xmlns:r="http://schemas.openxmlformats.org/officeDocument/2006/relationships" id="2147483648" r:id="R69cc253db3f14450"/>
+    <p:sldMasterId xmlns:r="http://schemas.openxmlformats.org/officeDocument/2006/relationships" id="2147483648" r:id="R3ca2ed03fa444b99"/>
   </p:sldMasterIdLst>
   <p:notesMasterIdLst>
-    <p:notesMasterId xmlns:r="http://schemas.openxmlformats.org/officeDocument/2006/relationships" r:id="R2d8e4b1d42b044e2"/>
+    <p:notesMasterId xmlns:r="http://schemas.openxmlformats.org/officeDocument/2006/relationships" r:id="Rf598e1a69f9b4d88"/>
   </p:notesMasterIdLst>
   <p:sldIdLst>
-    <p:sldId xmlns:r="http://schemas.openxmlformats.org/officeDocument/2006/relationships" id="256" r:id="R6ec864e9d0094359"/>
-    <p:sldId xmlns:r="http://schemas.openxmlformats.org/officeDocument/2006/relationships" id="257" r:id="R2e3f1dec8e854aa1"/>
-    <p:sldId xmlns:r="http://schemas.openxmlformats.org/officeDocument/2006/relationships" id="258" r:id="R3c50257ffb35498b"/>
-    <p:sldId xmlns:r="http://schemas.openxmlformats.org/officeDocument/2006/relationships" id="259" r:id="R3b5340a6848746f1"/>
-    <p:sldId xmlns:r="http://schemas.openxmlformats.org/officeDocument/2006/relationships" id="260" r:id="R942caa828b174406"/>
-    <p:sldId xmlns:r="http://schemas.openxmlformats.org/officeDocument/2006/relationships" id="261" r:id="Rc1d58e115b1b49d9"/>
-    <p:sldId xmlns:r="http://schemas.openxmlformats.org/officeDocument/2006/relationships" id="262" r:id="Rf51604f365674905"/>
-    <p:sldId xmlns:r="http://schemas.openxmlformats.org/officeDocument/2006/relationships" id="263" r:id="R721618682d524de6"/>
-    <p:sldId xmlns:r="http://schemas.openxmlformats.org/officeDocument/2006/relationships" id="264" r:id="Rab4359a675f84fa8"/>
-    <p:sldId xmlns:r="http://schemas.openxmlformats.org/officeDocument/2006/relationships" id="265" r:id="R08967039f7d649cf"/>
-    <p:sldId xmlns:r="http://schemas.openxmlformats.org/officeDocument/2006/relationships" id="266" r:id="Ra891232c9b9b4c9e"/>
-    <p:sldId xmlns:r="http://schemas.openxmlformats.org/officeDocument/2006/relationships" id="267" r:id="Rb1ac7c36c1654ce3"/>
-    <p:sldId xmlns:r="http://schemas.openxmlformats.org/officeDocument/2006/relationships" id="268" r:id="Re7fc76454baf4575"/>
-    <p:sldId xmlns:r="http://schemas.openxmlformats.org/officeDocument/2006/relationships" id="269" r:id="R62bdea1686a049b6"/>
-    <p:sldId xmlns:r="http://schemas.openxmlformats.org/officeDocument/2006/relationships" id="270" r:id="Refd5d303744e415c"/>
-    <p:sldId xmlns:r="http://schemas.openxmlformats.org/officeDocument/2006/relationships" id="271" r:id="R58e68f3ac1a246c0"/>
-    <p:sldId xmlns:r="http://schemas.openxmlformats.org/officeDocument/2006/relationships" id="272" r:id="Ra655843ce79b4769"/>
-    <p:sldId xmlns:r="http://schemas.openxmlformats.org/officeDocument/2006/relationships" id="273" r:id="Rd704f676c360412d"/>
+    <p:sldId xmlns:r="http://schemas.openxmlformats.org/officeDocument/2006/relationships" id="256" r:id="Rdb88e4e6373548e4"/>
+    <p:sldId xmlns:r="http://schemas.openxmlformats.org/officeDocument/2006/relationships" id="257" r:id="Rc6e24632dbdd4e91"/>
+    <p:sldId xmlns:r="http://schemas.openxmlformats.org/officeDocument/2006/relationships" id="258" r:id="R2bf66234a0a44a77"/>
+    <p:sldId xmlns:r="http://schemas.openxmlformats.org/officeDocument/2006/relationships" id="259" r:id="R139b1b503c7d4741"/>
+    <p:sldId xmlns:r="http://schemas.openxmlformats.org/officeDocument/2006/relationships" id="260" r:id="R68ca51a98c594cd9"/>
+    <p:sldId xmlns:r="http://schemas.openxmlformats.org/officeDocument/2006/relationships" id="261" r:id="R3e29c6753a0e4c62"/>
+    <p:sldId xmlns:r="http://schemas.openxmlformats.org/officeDocument/2006/relationships" id="262" r:id="Rfa4f63c0d92a4fed"/>
+    <p:sldId xmlns:r="http://schemas.openxmlformats.org/officeDocument/2006/relationships" id="263" r:id="R68deacf007b54ba3"/>
+    <p:sldId xmlns:r="http://schemas.openxmlformats.org/officeDocument/2006/relationships" id="264" r:id="R7a51e6a962464451"/>
+    <p:sldId xmlns:r="http://schemas.openxmlformats.org/officeDocument/2006/relationships" id="265" r:id="R203b318954e44ada"/>
+    <p:sldId xmlns:r="http://schemas.openxmlformats.org/officeDocument/2006/relationships" id="266" r:id="R2191b225b11a4606"/>
+    <p:sldId xmlns:r="http://schemas.openxmlformats.org/officeDocument/2006/relationships" id="267" r:id="R98b6115bf19348a9"/>
+    <p:sldId xmlns:r="http://schemas.openxmlformats.org/officeDocument/2006/relationships" id="268" r:id="Rce5cc4bd6f274af0"/>
+    <p:sldId xmlns:r="http://schemas.openxmlformats.org/officeDocument/2006/relationships" id="269" r:id="Rca3d0c97d5884a7c"/>
+    <p:sldId xmlns:r="http://schemas.openxmlformats.org/officeDocument/2006/relationships" id="270" r:id="R8ceeb01fb91b48f1"/>
+    <p:sldId xmlns:r="http://schemas.openxmlformats.org/officeDocument/2006/relationships" id="271" r:id="R29f3c5f830bc4973"/>
+    <p:sldId xmlns:r="http://schemas.openxmlformats.org/officeDocument/2006/relationships" id="272" r:id="R8164d2fda6d148bc"/>
+    <p:sldId xmlns:r="http://schemas.openxmlformats.org/officeDocument/2006/relationships" id="273" r:id="R7cf0488820154a34"/>
   </p:sldIdLst>
   <p:sldSz cx="12192000" cy="6858000"/>
   <p:notesSz cx="6858000" cy="9144000"/>
@@ -1897,7 +1897,7 @@
   </p:cSld>
   <p:clrMap bg1="lt1" tx1="dk1" bg2="lt2" tx2="dk2" accent1="accent1" accent2="accent2" accent3="accent3" accent4="accent4" accent5="accent5" accent6="accent6" hlink="hlink" folHlink="folHlink"/>
   <p:sldLayoutIdLst>
-    <p:sldLayoutId xmlns:r="http://schemas.openxmlformats.org/officeDocument/2006/relationships" id="2147483649" r:id="Re2865218c9f44dd3"/>
+    <p:sldLayoutId xmlns:r="http://schemas.openxmlformats.org/officeDocument/2006/relationships" id="2147483649" r:id="R52be53b0f0184063"/>
   </p:sldLayoutIdLst>
   <p:txStyles>
     <p:titleStyle>
@@ -2445,7 +2445,7 @@
           <p:nvPr/>
         </p:nvPicPr>
         <p:blipFill>
-          <a:blip xmlns:r="http://schemas.openxmlformats.org/officeDocument/2006/relationships" xmlns:a="http://schemas.openxmlformats.org/drawingml/2006/main" r:embed="R14ec8573e76b4c8a"/>
+          <a:blip xmlns:r="http://schemas.openxmlformats.org/officeDocument/2006/relationships" xmlns:a="http://schemas.openxmlformats.org/drawingml/2006/main" r:embed="R3842b48be81a41a5"/>
           <a:srcRect xmlns:a="http://schemas.openxmlformats.org/drawingml/2006/main" l="0" t="0" r="0" b="0"/>
           <a:stretch xmlns:a="http://schemas.openxmlformats.org/drawingml/2006/main">
             <a:fillRect l="0" t="0" r="0" b="0"/>
@@ -2466,7 +2466,7 @@
           <p:cNvPr id="2" name="">
             <a:extLst xmlns:a="http://schemas.openxmlformats.org/drawingml/2006/main">
               <a:ext uri="{FF2B5EF4-FFF2-40B4-BE49-F238E27FC236}">
-                <a16:creationId xmlns:a16="http://schemas.microsoft.com/office/drawing/2014/main" id="{7AC608CC-2F58-4083-8DA3-A95FC88D81FE}"/>
+                <a16:creationId xmlns:a16="http://schemas.microsoft.com/office/drawing/2014/main" id="{71A2FE12-68D4-4C26-8490-E922E0A8DF64}"/>
               </a:ext>
             </a:extLst>
           </p:cNvPr>
@@ -2528,7 +2528,7 @@
           <p:cNvPr id="3" name="">
             <a:extLst xmlns:a="http://schemas.openxmlformats.org/drawingml/2006/main">
               <a:ext uri="{FF2B5EF4-FFF2-40B4-BE49-F238E27FC236}">
-                <a16:creationId xmlns:a16="http://schemas.microsoft.com/office/drawing/2014/main" id="{6A4A8E44-17E1-47FF-B6DC-0859AAF91940}"/>
+                <a16:creationId xmlns:a16="http://schemas.microsoft.com/office/drawing/2014/main" id="{BD36C2FC-490A-42EE-AD1E-9109042A4815}"/>
               </a:ext>
             </a:extLst>
           </p:cNvPr>
@@ -2540,7 +2540,7 @@
         <p:spPr>
           <a:xfrm xmlns:a="http://schemas.openxmlformats.org/drawingml/2006/main">
             <a:off x="876300" y="1885950"/>
-            <a:ext cx="6572250" cy="1524000"/>
+            <a:ext cx="7620000" cy="1524000"/>
           </a:xfrm>
           <a:prstGeom xmlns:a="http://schemas.openxmlformats.org/drawingml/2006/main" prst="rect">
             <a:avLst/>
@@ -2590,7 +2590,7 @@
           <p:cNvPr id="4" name="">
             <a:extLst xmlns:a="http://schemas.openxmlformats.org/drawingml/2006/main">
               <a:ext uri="{FF2B5EF4-FFF2-40B4-BE49-F238E27FC236}">
-                <a16:creationId xmlns:a16="http://schemas.microsoft.com/office/drawing/2014/main" id="{8E452B53-4146-4304-8C5F-E17FE203A69C}"/>
+                <a16:creationId xmlns:a16="http://schemas.microsoft.com/office/drawing/2014/main" id="{BC6594F1-66D9-4A53-854A-E3BC1ACB9E27}"/>
               </a:ext>
             </a:extLst>
           </p:cNvPr>
@@ -2652,7 +2652,7 @@
           <p:cNvPr id="5" name="">
             <a:extLst xmlns:a="http://schemas.openxmlformats.org/drawingml/2006/main">
               <a:ext uri="{FF2B5EF4-FFF2-40B4-BE49-F238E27FC236}">
-                <a16:creationId xmlns:a16="http://schemas.microsoft.com/office/drawing/2014/main" id="{0D854C7B-535F-4042-AA23-918C90699EF5}"/>
+                <a16:creationId xmlns:a16="http://schemas.microsoft.com/office/drawing/2014/main" id="{8CB41B4E-6D3C-41E5-9FC6-4B05189376A3}"/>
               </a:ext>
             </a:extLst>
           </p:cNvPr>
@@ -2714,7 +2714,7 @@
           <p:cNvPr id="6" name="">
             <a:extLst xmlns:a="http://schemas.openxmlformats.org/drawingml/2006/main">
               <a:ext uri="{FF2B5EF4-FFF2-40B4-BE49-F238E27FC236}">
-                <a16:creationId xmlns:a16="http://schemas.microsoft.com/office/drawing/2014/main" id="{E505B16C-8950-48DC-9985-C048A49786A2}"/>
+                <a16:creationId xmlns:a16="http://schemas.microsoft.com/office/drawing/2014/main" id="{2ABC9F9D-BA84-458B-A8E7-982B2F7C2E71}"/>
               </a:ext>
             </a:extLst>
           </p:cNvPr>
@@ -2774,7 +2774,7 @@
     </p:spTree>
     <p:extLst>
       <p:ext uri="{BB962C8B-B14F-4D97-AF65-F5344CB8AC3E}">
-        <p14:creationId xmlns:p14="http://schemas.microsoft.com/office/powerpoint/2010/main" val="1786013029"/>
+        <p14:creationId xmlns:p14="http://schemas.microsoft.com/office/powerpoint/2010/main" val="1896316370"/>
       </p:ext>
     </p:extLst>
   </p:cSld>
@@ -2802,7 +2802,7 @@
           <p:nvPr/>
         </p:nvPicPr>
         <p:blipFill>
-          <a:blip xmlns:r="http://schemas.openxmlformats.org/officeDocument/2006/relationships" xmlns:a="http://schemas.openxmlformats.org/drawingml/2006/main" r:embed="R548b2134cb024bd2"/>
+          <a:blip xmlns:r="http://schemas.openxmlformats.org/officeDocument/2006/relationships" xmlns:a="http://schemas.openxmlformats.org/drawingml/2006/main" r:embed="R98eeb44f7c8a4992"/>
           <a:srcRect xmlns:a="http://schemas.openxmlformats.org/drawingml/2006/main" l="0" t="0" r="0" b="0"/>
           <a:stretch xmlns:a="http://schemas.openxmlformats.org/drawingml/2006/main">
             <a:fillRect l="0" t="0" r="0" b="0"/>
@@ -2823,7 +2823,7 @@
           <p:cNvPr id="2" name="">
             <a:extLst xmlns:a="http://schemas.openxmlformats.org/drawingml/2006/main">
               <a:ext uri="{FF2B5EF4-FFF2-40B4-BE49-F238E27FC236}">
-                <a16:creationId xmlns:a16="http://schemas.microsoft.com/office/drawing/2014/main" id="{9D6BD098-6A7C-4B81-B846-3710CCF9C2FB}"/>
+                <a16:creationId xmlns:a16="http://schemas.microsoft.com/office/drawing/2014/main" id="{AD625A4D-4F79-4211-B67A-90AC236781C7}"/>
               </a:ext>
             </a:extLst>
           </p:cNvPr>
@@ -2885,7 +2885,7 @@
           <p:cNvPr id="3" name="">
             <a:extLst xmlns:a="http://schemas.openxmlformats.org/drawingml/2006/main">
               <a:ext uri="{FF2B5EF4-FFF2-40B4-BE49-F238E27FC236}">
-                <a16:creationId xmlns:a16="http://schemas.microsoft.com/office/drawing/2014/main" id="{7F31C5F7-9C04-49A4-9D92-7C0AFE31E3E1}"/>
+                <a16:creationId xmlns:a16="http://schemas.microsoft.com/office/drawing/2014/main" id="{DEB0D78B-E22E-49F1-8DD7-14E1B8695661}"/>
               </a:ext>
             </a:extLst>
           </p:cNvPr>
@@ -2947,7 +2947,7 @@
           <p:cNvPr id="4" name="">
             <a:extLst xmlns:a="http://schemas.openxmlformats.org/drawingml/2006/main">
               <a:ext uri="{FF2B5EF4-FFF2-40B4-BE49-F238E27FC236}">
-                <a16:creationId xmlns:a16="http://schemas.microsoft.com/office/drawing/2014/main" id="{DC7C8E6A-F5CD-43AB-A0DC-F5F2837A4912}"/>
+                <a16:creationId xmlns:a16="http://schemas.microsoft.com/office/drawing/2014/main" id="{4C2C8A31-15E3-4033-8E7B-B7796269A480}"/>
               </a:ext>
             </a:extLst>
           </p:cNvPr>
@@ -3009,7 +3009,7 @@
           <p:cNvPr id="5" name="">
             <a:extLst xmlns:a="http://schemas.openxmlformats.org/drawingml/2006/main">
               <a:ext uri="{FF2B5EF4-FFF2-40B4-BE49-F238E27FC236}">
-                <a16:creationId xmlns:a16="http://schemas.microsoft.com/office/drawing/2014/main" id="{02BB5ACD-F805-4824-BE5D-330632FB37DB}"/>
+                <a16:creationId xmlns:a16="http://schemas.microsoft.com/office/drawing/2014/main" id="{343EF4A2-4503-49D2-8667-2E61AC563D59}"/>
               </a:ext>
             </a:extLst>
           </p:cNvPr>
@@ -3040,7 +3040,7 @@
           <p:cNvPr id="6" name="">
             <a:extLst xmlns:a="http://schemas.openxmlformats.org/drawingml/2006/main">
               <a:ext uri="{FF2B5EF4-FFF2-40B4-BE49-F238E27FC236}">
-                <a16:creationId xmlns:a16="http://schemas.microsoft.com/office/drawing/2014/main" id="{B4BD57A8-17AF-4E11-97DF-B541AF4D42FA}"/>
+                <a16:creationId xmlns:a16="http://schemas.microsoft.com/office/drawing/2014/main" id="{3999F3BC-51B1-4E85-948F-4FF2C4E0A470}"/>
               </a:ext>
             </a:extLst>
           </p:cNvPr>
@@ -3102,7 +3102,7 @@
           <p:cNvPr id="7" name="">
             <a:extLst xmlns:a="http://schemas.openxmlformats.org/drawingml/2006/main">
               <a:ext uri="{FF2B5EF4-FFF2-40B4-BE49-F238E27FC236}">
-                <a16:creationId xmlns:a16="http://schemas.microsoft.com/office/drawing/2014/main" id="{6B266E71-AE9F-4F11-9344-A4EA8B8D34A5}"/>
+                <a16:creationId xmlns:a16="http://schemas.microsoft.com/office/drawing/2014/main" id="{1A9E98D0-8278-4ACC-9AAD-9EEF610200DD}"/>
               </a:ext>
             </a:extLst>
           </p:cNvPr>
@@ -3135,7 +3135,7 @@
           <p:cNvPr id="8" name="">
             <a:extLst xmlns:a="http://schemas.openxmlformats.org/drawingml/2006/main">
               <a:ext uri="{FF2B5EF4-FFF2-40B4-BE49-F238E27FC236}">
-                <a16:creationId xmlns:a16="http://schemas.microsoft.com/office/drawing/2014/main" id="{3F0EE18A-5475-49FC-93A2-6EEEEF92581A}"/>
+                <a16:creationId xmlns:a16="http://schemas.microsoft.com/office/drawing/2014/main" id="{642FB662-018C-4903-B72E-0EB58540347D}"/>
               </a:ext>
             </a:extLst>
           </p:cNvPr>
@@ -3170,7 +3170,7 @@
           <p:cNvPr id="9" name="">
             <a:extLst xmlns:a="http://schemas.openxmlformats.org/drawingml/2006/main">
               <a:ext uri="{FF2B5EF4-FFF2-40B4-BE49-F238E27FC236}">
-                <a16:creationId xmlns:a16="http://schemas.microsoft.com/office/drawing/2014/main" id="{3025137B-D945-431D-9D2C-377EE3E9CB1C}"/>
+                <a16:creationId xmlns:a16="http://schemas.microsoft.com/office/drawing/2014/main" id="{0E28E411-2BBE-4B04-90BA-E82746ADDA65}"/>
               </a:ext>
             </a:extLst>
           </p:cNvPr>
@@ -3201,7 +3201,7 @@
           <p:cNvPr id="10" name="">
             <a:extLst xmlns:a="http://schemas.openxmlformats.org/drawingml/2006/main">
               <a:ext uri="{FF2B5EF4-FFF2-40B4-BE49-F238E27FC236}">
-                <a16:creationId xmlns:a16="http://schemas.microsoft.com/office/drawing/2014/main" id="{65327044-20A5-4371-9F16-E5C733A7B692}"/>
+                <a16:creationId xmlns:a16="http://schemas.microsoft.com/office/drawing/2014/main" id="{651B65E4-E632-4716-9082-CB6E40090A57}"/>
               </a:ext>
             </a:extLst>
           </p:cNvPr>
@@ -3263,7 +3263,7 @@
           <p:cNvPr id="11" name="">
             <a:extLst xmlns:a="http://schemas.openxmlformats.org/drawingml/2006/main">
               <a:ext uri="{FF2B5EF4-FFF2-40B4-BE49-F238E27FC236}">
-                <a16:creationId xmlns:a16="http://schemas.microsoft.com/office/drawing/2014/main" id="{DB4663F5-914C-4CF7-A456-347609AA9A49}"/>
+                <a16:creationId xmlns:a16="http://schemas.microsoft.com/office/drawing/2014/main" id="{DE824182-24A8-4158-BF8C-ABB5402AC415}"/>
               </a:ext>
             </a:extLst>
           </p:cNvPr>
@@ -3325,7 +3325,7 @@
           <p:cNvPr id="12" name="">
             <a:extLst xmlns:a="http://schemas.openxmlformats.org/drawingml/2006/main">
               <a:ext uri="{FF2B5EF4-FFF2-40B4-BE49-F238E27FC236}">
-                <a16:creationId xmlns:a16="http://schemas.microsoft.com/office/drawing/2014/main" id="{589EF464-7C44-4168-8113-5D31B55C39EF}"/>
+                <a16:creationId xmlns:a16="http://schemas.microsoft.com/office/drawing/2014/main" id="{92534646-16ED-46DF-AF6F-BA5CCC3B69B5}"/>
               </a:ext>
             </a:extLst>
           </p:cNvPr>
@@ -3358,7 +3358,7 @@
           <p:cNvPr id="13" name="">
             <a:extLst xmlns:a="http://schemas.openxmlformats.org/drawingml/2006/main">
               <a:ext uri="{FF2B5EF4-FFF2-40B4-BE49-F238E27FC236}">
-                <a16:creationId xmlns:a16="http://schemas.microsoft.com/office/drawing/2014/main" id="{C0E2C2BC-E647-4554-966B-0F773A07E323}"/>
+                <a16:creationId xmlns:a16="http://schemas.microsoft.com/office/drawing/2014/main" id="{167FB242-7F90-48DF-A883-314B98567395}"/>
               </a:ext>
             </a:extLst>
           </p:cNvPr>
@@ -3393,7 +3393,7 @@
           <p:cNvPr id="14" name="">
             <a:extLst xmlns:a="http://schemas.openxmlformats.org/drawingml/2006/main">
               <a:ext uri="{FF2B5EF4-FFF2-40B4-BE49-F238E27FC236}">
-                <a16:creationId xmlns:a16="http://schemas.microsoft.com/office/drawing/2014/main" id="{49BC1711-F013-4BF3-9A84-B9E7B5F6B9E7}"/>
+                <a16:creationId xmlns:a16="http://schemas.microsoft.com/office/drawing/2014/main" id="{F786A161-7506-491D-BC67-D491F074A41F}"/>
               </a:ext>
             </a:extLst>
           </p:cNvPr>
@@ -3424,7 +3424,7 @@
           <p:cNvPr id="15" name="">
             <a:extLst xmlns:a="http://schemas.openxmlformats.org/drawingml/2006/main">
               <a:ext uri="{FF2B5EF4-FFF2-40B4-BE49-F238E27FC236}">
-                <a16:creationId xmlns:a16="http://schemas.microsoft.com/office/drawing/2014/main" id="{1DF767D5-3B65-4730-821C-1EC134A9103D}"/>
+                <a16:creationId xmlns:a16="http://schemas.microsoft.com/office/drawing/2014/main" id="{E8264395-5FB4-4354-B925-935A4C4303D2}"/>
               </a:ext>
             </a:extLst>
           </p:cNvPr>
@@ -3486,7 +3486,7 @@
           <p:cNvPr id="16" name="">
             <a:extLst xmlns:a="http://schemas.openxmlformats.org/drawingml/2006/main">
               <a:ext uri="{FF2B5EF4-FFF2-40B4-BE49-F238E27FC236}">
-                <a16:creationId xmlns:a16="http://schemas.microsoft.com/office/drawing/2014/main" id="{81D2650B-321E-4505-9F42-3DD050E4304A}"/>
+                <a16:creationId xmlns:a16="http://schemas.microsoft.com/office/drawing/2014/main" id="{E776B561-79B6-476F-9CD5-DCB1A6486B7B}"/>
               </a:ext>
             </a:extLst>
           </p:cNvPr>
@@ -3548,7 +3548,7 @@
           <p:cNvPr id="17" name="">
             <a:extLst xmlns:a="http://schemas.openxmlformats.org/drawingml/2006/main">
               <a:ext uri="{FF2B5EF4-FFF2-40B4-BE49-F238E27FC236}">
-                <a16:creationId xmlns:a16="http://schemas.microsoft.com/office/drawing/2014/main" id="{DB070335-217B-418F-BB4A-E731161605DA}"/>
+                <a16:creationId xmlns:a16="http://schemas.microsoft.com/office/drawing/2014/main" id="{CE292F02-E7C0-48A5-8EEC-70F1788CBFDD}"/>
               </a:ext>
             </a:extLst>
           </p:cNvPr>
@@ -3610,7 +3610,7 @@
           <p:cNvPr id="18" name="">
             <a:extLst xmlns:a="http://schemas.openxmlformats.org/drawingml/2006/main">
               <a:ext uri="{FF2B5EF4-FFF2-40B4-BE49-F238E27FC236}">
-                <a16:creationId xmlns:a16="http://schemas.microsoft.com/office/drawing/2014/main" id="{93DAB805-F6CE-4E87-A84C-62F02325D4DC}"/>
+                <a16:creationId xmlns:a16="http://schemas.microsoft.com/office/drawing/2014/main" id="{773CF58C-3B5F-4F3D-AAD1-5752743D858D}"/>
               </a:ext>
             </a:extLst>
           </p:cNvPr>
@@ -3670,7 +3670,7 @@
     </p:spTree>
     <p:extLst>
       <p:ext uri="{BB962C8B-B14F-4D97-AF65-F5344CB8AC3E}">
-        <p14:creationId xmlns:p14="http://schemas.microsoft.com/office/powerpoint/2010/main" val="455017229"/>
+        <p14:creationId xmlns:p14="http://schemas.microsoft.com/office/powerpoint/2010/main" val="1737613772"/>
       </p:ext>
     </p:extLst>
   </p:cSld>
@@ -3698,7 +3698,7 @@
           <p:nvPr/>
         </p:nvPicPr>
         <p:blipFill>
-          <a:blip xmlns:r="http://schemas.openxmlformats.org/officeDocument/2006/relationships" xmlns:a="http://schemas.openxmlformats.org/drawingml/2006/main" r:embed="R86cc691847a54cd5"/>
+          <a:blip xmlns:r="http://schemas.openxmlformats.org/officeDocument/2006/relationships" xmlns:a="http://schemas.openxmlformats.org/drawingml/2006/main" r:embed="Rb37a36f745ac4ee0"/>
           <a:srcRect xmlns:a="http://schemas.openxmlformats.org/drawingml/2006/main" l="0" t="0" r="0" b="0"/>
           <a:stretch xmlns:a="http://schemas.openxmlformats.org/drawingml/2006/main">
             <a:fillRect l="0" t="0" r="0" b="0"/>
@@ -3719,7 +3719,7 @@
           <p:cNvPr id="2" name="">
             <a:extLst xmlns:a="http://schemas.openxmlformats.org/drawingml/2006/main">
               <a:ext uri="{FF2B5EF4-FFF2-40B4-BE49-F238E27FC236}">
-                <a16:creationId xmlns:a16="http://schemas.microsoft.com/office/drawing/2014/main" id="{2F0BD931-24BA-4CE9-B125-DCB356D506FB}"/>
+                <a16:creationId xmlns:a16="http://schemas.microsoft.com/office/drawing/2014/main" id="{C5CEB1E5-765C-4749-AC36-92FE29B5291D}"/>
               </a:ext>
             </a:extLst>
           </p:cNvPr>
@@ -3781,7 +3781,7 @@
           <p:cNvPr id="3" name="">
             <a:extLst xmlns:a="http://schemas.openxmlformats.org/drawingml/2006/main">
               <a:ext uri="{FF2B5EF4-FFF2-40B4-BE49-F238E27FC236}">
-                <a16:creationId xmlns:a16="http://schemas.microsoft.com/office/drawing/2014/main" id="{C074931D-8315-4DF3-AF13-63AB790E0614}"/>
+                <a16:creationId xmlns:a16="http://schemas.microsoft.com/office/drawing/2014/main" id="{1118C530-C697-4F25-90CC-A4A79EAA8F4F}"/>
               </a:ext>
             </a:extLst>
           </p:cNvPr>
@@ -3843,7 +3843,7 @@
           <p:cNvPr id="4" name="">
             <a:extLst xmlns:a="http://schemas.openxmlformats.org/drawingml/2006/main">
               <a:ext uri="{FF2B5EF4-FFF2-40B4-BE49-F238E27FC236}">
-                <a16:creationId xmlns:a16="http://schemas.microsoft.com/office/drawing/2014/main" id="{6541BD8C-187B-4FB1-9803-F81B1347EF8A}"/>
+                <a16:creationId xmlns:a16="http://schemas.microsoft.com/office/drawing/2014/main" id="{51761AE7-7B62-432F-947D-993FF4EE4253}"/>
               </a:ext>
             </a:extLst>
           </p:cNvPr>
@@ -3905,7 +3905,7 @@
           <p:cNvPr id="5" name="">
             <a:extLst xmlns:a="http://schemas.openxmlformats.org/drawingml/2006/main">
               <a:ext uri="{FF2B5EF4-FFF2-40B4-BE49-F238E27FC236}">
-                <a16:creationId xmlns:a16="http://schemas.microsoft.com/office/drawing/2014/main" id="{AD9149D5-7303-4FC2-80BD-9AB0F1718D37}"/>
+                <a16:creationId xmlns:a16="http://schemas.microsoft.com/office/drawing/2014/main" id="{B29E48A2-3D7A-4A05-9C2A-D825D5805712}"/>
               </a:ext>
             </a:extLst>
           </p:cNvPr>
@@ -3936,7 +3936,7 @@
           <p:cNvPr id="6" name="">
             <a:extLst xmlns:a="http://schemas.openxmlformats.org/drawingml/2006/main">
               <a:ext uri="{FF2B5EF4-FFF2-40B4-BE49-F238E27FC236}">
-                <a16:creationId xmlns:a16="http://schemas.microsoft.com/office/drawing/2014/main" id="{D41DD9C4-2CED-4E99-9B97-4EC4C0AE4901}"/>
+                <a16:creationId xmlns:a16="http://schemas.microsoft.com/office/drawing/2014/main" id="{A1941825-FBF2-4AC0-90CC-1691D4577EC2}"/>
               </a:ext>
             </a:extLst>
           </p:cNvPr>
@@ -3998,7 +3998,7 @@
           <p:cNvPr id="7" name="">
             <a:extLst xmlns:a="http://schemas.openxmlformats.org/drawingml/2006/main">
               <a:ext uri="{FF2B5EF4-FFF2-40B4-BE49-F238E27FC236}">
-                <a16:creationId xmlns:a16="http://schemas.microsoft.com/office/drawing/2014/main" id="{2D52B420-5040-4B48-B2DB-8E3A2DBB6860}"/>
+                <a16:creationId xmlns:a16="http://schemas.microsoft.com/office/drawing/2014/main" id="{68028955-D299-4149-A56A-9E584225BAB8}"/>
               </a:ext>
             </a:extLst>
           </p:cNvPr>
@@ -4031,7 +4031,7 @@
           <p:cNvPr id="8" name="">
             <a:extLst xmlns:a="http://schemas.openxmlformats.org/drawingml/2006/main">
               <a:ext uri="{FF2B5EF4-FFF2-40B4-BE49-F238E27FC236}">
-                <a16:creationId xmlns:a16="http://schemas.microsoft.com/office/drawing/2014/main" id="{A97FBDFA-652F-4E2F-AD3B-89CA430BD74E}"/>
+                <a16:creationId xmlns:a16="http://schemas.microsoft.com/office/drawing/2014/main" id="{A4C48433-1807-498A-8CF1-2B4AACDA04B6}"/>
               </a:ext>
             </a:extLst>
           </p:cNvPr>
@@ -4066,7 +4066,7 @@
           <p:cNvPr id="9" name="">
             <a:extLst xmlns:a="http://schemas.openxmlformats.org/drawingml/2006/main">
               <a:ext uri="{FF2B5EF4-FFF2-40B4-BE49-F238E27FC236}">
-                <a16:creationId xmlns:a16="http://schemas.microsoft.com/office/drawing/2014/main" id="{30B6CF13-2341-4F82-B344-7882D73321EC}"/>
+                <a16:creationId xmlns:a16="http://schemas.microsoft.com/office/drawing/2014/main" id="{7A1FDCAB-25AB-4121-8A81-0B4E7FFC114C}"/>
               </a:ext>
             </a:extLst>
           </p:cNvPr>
@@ -4097,7 +4097,7 @@
           <p:cNvPr id="10" name="">
             <a:extLst xmlns:a="http://schemas.openxmlformats.org/drawingml/2006/main">
               <a:ext uri="{FF2B5EF4-FFF2-40B4-BE49-F238E27FC236}">
-                <a16:creationId xmlns:a16="http://schemas.microsoft.com/office/drawing/2014/main" id="{0081DC01-9F52-4397-A323-2DD279E82E4B}"/>
+                <a16:creationId xmlns:a16="http://schemas.microsoft.com/office/drawing/2014/main" id="{BA4AEDD9-AAC2-4EE4-9DEF-426EC01EDBC4}"/>
               </a:ext>
             </a:extLst>
           </p:cNvPr>
@@ -4159,7 +4159,7 @@
           <p:cNvPr id="11" name="">
             <a:extLst xmlns:a="http://schemas.openxmlformats.org/drawingml/2006/main">
               <a:ext uri="{FF2B5EF4-FFF2-40B4-BE49-F238E27FC236}">
-                <a16:creationId xmlns:a16="http://schemas.microsoft.com/office/drawing/2014/main" id="{27FAC1F0-58DF-4151-B8D6-A07BD05C9AE9}"/>
+                <a16:creationId xmlns:a16="http://schemas.microsoft.com/office/drawing/2014/main" id="{66FB461A-EA6C-43E1-9EF6-AFAD16F19299}"/>
               </a:ext>
             </a:extLst>
           </p:cNvPr>
@@ -4302,7 +4302,7 @@
           <p:cNvPr id="12" name="">
             <a:extLst xmlns:a="http://schemas.openxmlformats.org/drawingml/2006/main">
               <a:ext uri="{FF2B5EF4-FFF2-40B4-BE49-F238E27FC236}">
-                <a16:creationId xmlns:a16="http://schemas.microsoft.com/office/drawing/2014/main" id="{1A4D5050-54B9-4427-9167-6EC1BBD6E3E6}"/>
+                <a16:creationId xmlns:a16="http://schemas.microsoft.com/office/drawing/2014/main" id="{71A52076-6CB5-4BE0-B501-7B023E8F54D5}"/>
               </a:ext>
             </a:extLst>
           </p:cNvPr>
@@ -4364,7 +4364,7 @@
           <p:cNvPr id="13" name="">
             <a:extLst xmlns:a="http://schemas.openxmlformats.org/drawingml/2006/main">
               <a:ext uri="{FF2B5EF4-FFF2-40B4-BE49-F238E27FC236}">
-                <a16:creationId xmlns:a16="http://schemas.microsoft.com/office/drawing/2014/main" id="{D00F6752-C755-45E4-A5F6-8D5DB049B728}"/>
+                <a16:creationId xmlns:a16="http://schemas.microsoft.com/office/drawing/2014/main" id="{5A25AFBD-1F9C-48E4-B689-7AF12D5A5D15}"/>
               </a:ext>
             </a:extLst>
           </p:cNvPr>
@@ -4424,7 +4424,7 @@
     </p:spTree>
     <p:extLst>
       <p:ext uri="{BB962C8B-B14F-4D97-AF65-F5344CB8AC3E}">
-        <p14:creationId xmlns:p14="http://schemas.microsoft.com/office/powerpoint/2010/main" val="721915598"/>
+        <p14:creationId xmlns:p14="http://schemas.microsoft.com/office/powerpoint/2010/main" val="1696338126"/>
       </p:ext>
     </p:extLst>
   </p:cSld>
@@ -4452,7 +4452,7 @@
           <p:nvPr/>
         </p:nvPicPr>
         <p:blipFill>
-          <a:blip xmlns:r="http://schemas.openxmlformats.org/officeDocument/2006/relationships" xmlns:a="http://schemas.openxmlformats.org/drawingml/2006/main" r:embed="R2ad97f0c60334e1e"/>
+          <a:blip xmlns:r="http://schemas.openxmlformats.org/officeDocument/2006/relationships" xmlns:a="http://schemas.openxmlformats.org/drawingml/2006/main" r:embed="R0e567a226d0144ea"/>
           <a:srcRect xmlns:a="http://schemas.openxmlformats.org/drawingml/2006/main" l="0" t="0" r="0" b="0"/>
           <a:stretch xmlns:a="http://schemas.openxmlformats.org/drawingml/2006/main">
             <a:fillRect l="0" t="0" r="0" b="0"/>
@@ -4473,7 +4473,7 @@
           <p:cNvPr id="2" name="">
             <a:extLst xmlns:a="http://schemas.openxmlformats.org/drawingml/2006/main">
               <a:ext uri="{FF2B5EF4-FFF2-40B4-BE49-F238E27FC236}">
-                <a16:creationId xmlns:a16="http://schemas.microsoft.com/office/drawing/2014/main" id="{D2C8A530-7CA9-49CA-B6E4-87A135CBA2DE}"/>
+                <a16:creationId xmlns:a16="http://schemas.microsoft.com/office/drawing/2014/main" id="{AB906780-2AD0-44DC-ABBC-15770561C9D0}"/>
               </a:ext>
             </a:extLst>
           </p:cNvPr>
@@ -4535,7 +4535,7 @@
           <p:cNvPr id="3" name="">
             <a:extLst xmlns:a="http://schemas.openxmlformats.org/drawingml/2006/main">
               <a:ext uri="{FF2B5EF4-FFF2-40B4-BE49-F238E27FC236}">
-                <a16:creationId xmlns:a16="http://schemas.microsoft.com/office/drawing/2014/main" id="{E1391C4A-8BD6-4D20-9086-1A58ABF60061}"/>
+                <a16:creationId xmlns:a16="http://schemas.microsoft.com/office/drawing/2014/main" id="{EF6F6984-B992-4C7B-B37B-66DBCF3DA7F2}"/>
               </a:ext>
             </a:extLst>
           </p:cNvPr>
@@ -4597,7 +4597,7 @@
           <p:cNvPr id="4" name="">
             <a:extLst xmlns:a="http://schemas.openxmlformats.org/drawingml/2006/main">
               <a:ext uri="{FF2B5EF4-FFF2-40B4-BE49-F238E27FC236}">
-                <a16:creationId xmlns:a16="http://schemas.microsoft.com/office/drawing/2014/main" id="{71B76F8B-34BE-4357-B0DE-2B49F646C125}"/>
+                <a16:creationId xmlns:a16="http://schemas.microsoft.com/office/drawing/2014/main" id="{5BEDD491-7D43-4491-975B-4B96338A4AAA}"/>
               </a:ext>
             </a:extLst>
           </p:cNvPr>
@@ -4659,7 +4659,7 @@
           <p:cNvPr id="5" name="">
             <a:extLst xmlns:a="http://schemas.openxmlformats.org/drawingml/2006/main">
               <a:ext uri="{FF2B5EF4-FFF2-40B4-BE49-F238E27FC236}">
-                <a16:creationId xmlns:a16="http://schemas.microsoft.com/office/drawing/2014/main" id="{EE8D8A6F-F1AD-48EA-AC43-50A19F0F558F}"/>
+                <a16:creationId xmlns:a16="http://schemas.microsoft.com/office/drawing/2014/main" id="{862F281D-F6A7-42F5-B0F7-DAA4893299B2}"/>
               </a:ext>
             </a:extLst>
           </p:cNvPr>
@@ -4690,7 +4690,7 @@
           <p:cNvPr id="6" name="">
             <a:extLst xmlns:a="http://schemas.openxmlformats.org/drawingml/2006/main">
               <a:ext uri="{FF2B5EF4-FFF2-40B4-BE49-F238E27FC236}">
-                <a16:creationId xmlns:a16="http://schemas.microsoft.com/office/drawing/2014/main" id="{4413D0AB-624F-4A52-AC0A-4EC5F054F9E2}"/>
+                <a16:creationId xmlns:a16="http://schemas.microsoft.com/office/drawing/2014/main" id="{767C0AAC-E293-4E9E-8969-A58F0E6D6448}"/>
               </a:ext>
             </a:extLst>
           </p:cNvPr>
@@ -4752,7 +4752,7 @@
           <p:cNvPr id="7" name="">
             <a:extLst xmlns:a="http://schemas.openxmlformats.org/drawingml/2006/main">
               <a:ext uri="{FF2B5EF4-FFF2-40B4-BE49-F238E27FC236}">
-                <a16:creationId xmlns:a16="http://schemas.microsoft.com/office/drawing/2014/main" id="{BE9C679E-F6D4-49A8-940D-F4D727DEFDCD}"/>
+                <a16:creationId xmlns:a16="http://schemas.microsoft.com/office/drawing/2014/main" id="{606C61E0-8D45-4CDD-9877-0AA37B72F33F}"/>
               </a:ext>
             </a:extLst>
           </p:cNvPr>
@@ -4785,7 +4785,7 @@
           <p:cNvPr id="8" name="">
             <a:extLst xmlns:a="http://schemas.openxmlformats.org/drawingml/2006/main">
               <a:ext uri="{FF2B5EF4-FFF2-40B4-BE49-F238E27FC236}">
-                <a16:creationId xmlns:a16="http://schemas.microsoft.com/office/drawing/2014/main" id="{B38288F0-577E-4DA6-BC9C-FBD773582C5B}"/>
+                <a16:creationId xmlns:a16="http://schemas.microsoft.com/office/drawing/2014/main" id="{C320DC74-AE4B-4DCA-B085-17B4F92B18A1}"/>
               </a:ext>
             </a:extLst>
           </p:cNvPr>
@@ -4820,7 +4820,7 @@
           <p:cNvPr id="9" name="">
             <a:extLst xmlns:a="http://schemas.openxmlformats.org/drawingml/2006/main">
               <a:ext uri="{FF2B5EF4-FFF2-40B4-BE49-F238E27FC236}">
-                <a16:creationId xmlns:a16="http://schemas.microsoft.com/office/drawing/2014/main" id="{8999D5A6-8C9E-4DA0-ABCB-7112F2A9869A}"/>
+                <a16:creationId xmlns:a16="http://schemas.microsoft.com/office/drawing/2014/main" id="{0A489D21-7EF6-4ED5-AD22-DB2B1D59A793}"/>
               </a:ext>
             </a:extLst>
           </p:cNvPr>
@@ -4851,7 +4851,7 @@
           <p:cNvPr id="10" name="">
             <a:extLst xmlns:a="http://schemas.openxmlformats.org/drawingml/2006/main">
               <a:ext uri="{FF2B5EF4-FFF2-40B4-BE49-F238E27FC236}">
-                <a16:creationId xmlns:a16="http://schemas.microsoft.com/office/drawing/2014/main" id="{FAF8B0FD-056D-4413-B7B7-F103AB95562D}"/>
+                <a16:creationId xmlns:a16="http://schemas.microsoft.com/office/drawing/2014/main" id="{E72C12B4-8805-4B10-A1B8-974FD19E91C9}"/>
               </a:ext>
             </a:extLst>
           </p:cNvPr>
@@ -4913,7 +4913,7 @@
           <p:cNvPr id="11" name="">
             <a:extLst xmlns:a="http://schemas.openxmlformats.org/drawingml/2006/main">
               <a:ext uri="{FF2B5EF4-FFF2-40B4-BE49-F238E27FC236}">
-                <a16:creationId xmlns:a16="http://schemas.microsoft.com/office/drawing/2014/main" id="{FB04738B-5A36-40C4-A983-378C288BD8FE}"/>
+                <a16:creationId xmlns:a16="http://schemas.microsoft.com/office/drawing/2014/main" id="{95DB92A7-E439-4E70-923E-AF0E961B5736}"/>
               </a:ext>
             </a:extLst>
           </p:cNvPr>
@@ -4975,7 +4975,7 @@
           <p:cNvPr id="12" name="">
             <a:extLst xmlns:a="http://schemas.openxmlformats.org/drawingml/2006/main">
               <a:ext uri="{FF2B5EF4-FFF2-40B4-BE49-F238E27FC236}">
-                <a16:creationId xmlns:a16="http://schemas.microsoft.com/office/drawing/2014/main" id="{6AA744C1-8BE6-4D21-B5D8-0F8768F42B79}"/>
+                <a16:creationId xmlns:a16="http://schemas.microsoft.com/office/drawing/2014/main" id="{2EFA65D0-906E-4E5D-9B4A-363D9072D319}"/>
               </a:ext>
             </a:extLst>
           </p:cNvPr>
@@ -5008,7 +5008,7 @@
           <p:cNvPr id="13" name="">
             <a:extLst xmlns:a="http://schemas.openxmlformats.org/drawingml/2006/main">
               <a:ext uri="{FF2B5EF4-FFF2-40B4-BE49-F238E27FC236}">
-                <a16:creationId xmlns:a16="http://schemas.microsoft.com/office/drawing/2014/main" id="{DF55B232-1E32-4796-897E-CA5D9DB409A3}"/>
+                <a16:creationId xmlns:a16="http://schemas.microsoft.com/office/drawing/2014/main" id="{353B10B0-0833-4A92-BE9E-FDC0FB45B93B}"/>
               </a:ext>
             </a:extLst>
           </p:cNvPr>
@@ -5043,7 +5043,7 @@
           <p:cNvPr id="14" name="">
             <a:extLst xmlns:a="http://schemas.openxmlformats.org/drawingml/2006/main">
               <a:ext uri="{FF2B5EF4-FFF2-40B4-BE49-F238E27FC236}">
-                <a16:creationId xmlns:a16="http://schemas.microsoft.com/office/drawing/2014/main" id="{B4B94C45-C659-424D-8102-90BB1B69E0E2}"/>
+                <a16:creationId xmlns:a16="http://schemas.microsoft.com/office/drawing/2014/main" id="{7842D868-7B0D-42AC-8023-0BA813D8CE93}"/>
               </a:ext>
             </a:extLst>
           </p:cNvPr>
@@ -5074,7 +5074,7 @@
           <p:cNvPr id="15" name="">
             <a:extLst xmlns:a="http://schemas.openxmlformats.org/drawingml/2006/main">
               <a:ext uri="{FF2B5EF4-FFF2-40B4-BE49-F238E27FC236}">
-                <a16:creationId xmlns:a16="http://schemas.microsoft.com/office/drawing/2014/main" id="{8F62AD9D-B8AA-4173-93DC-B069BB31B58A}"/>
+                <a16:creationId xmlns:a16="http://schemas.microsoft.com/office/drawing/2014/main" id="{B3081F87-C461-4957-81B5-8E11A27A102D}"/>
               </a:ext>
             </a:extLst>
           </p:cNvPr>
@@ -5136,7 +5136,7 @@
           <p:cNvPr id="16" name="">
             <a:extLst xmlns:a="http://schemas.openxmlformats.org/drawingml/2006/main">
               <a:ext uri="{FF2B5EF4-FFF2-40B4-BE49-F238E27FC236}">
-                <a16:creationId xmlns:a16="http://schemas.microsoft.com/office/drawing/2014/main" id="{38D56B94-DD41-45CD-B981-045BF0822DE2}"/>
+                <a16:creationId xmlns:a16="http://schemas.microsoft.com/office/drawing/2014/main" id="{E1A1F3FF-4E67-4E4E-AAB4-50FDB75E6564}"/>
               </a:ext>
             </a:extLst>
           </p:cNvPr>
@@ -5198,7 +5198,7 @@
           <p:cNvPr id="17" name="">
             <a:extLst xmlns:a="http://schemas.openxmlformats.org/drawingml/2006/main">
               <a:ext uri="{FF2B5EF4-FFF2-40B4-BE49-F238E27FC236}">
-                <a16:creationId xmlns:a16="http://schemas.microsoft.com/office/drawing/2014/main" id="{13136DEB-04BA-471E-9E01-331802AC1140}"/>
+                <a16:creationId xmlns:a16="http://schemas.microsoft.com/office/drawing/2014/main" id="{009370C9-9BD2-4113-B915-21BA5D33AF55}"/>
               </a:ext>
             </a:extLst>
           </p:cNvPr>
@@ -5231,7 +5231,7 @@
           <p:cNvPr id="18" name="">
             <a:extLst xmlns:a="http://schemas.openxmlformats.org/drawingml/2006/main">
               <a:ext uri="{FF2B5EF4-FFF2-40B4-BE49-F238E27FC236}">
-                <a16:creationId xmlns:a16="http://schemas.microsoft.com/office/drawing/2014/main" id="{91BDD9AB-B79F-481F-8A69-7A3B7AB31801}"/>
+                <a16:creationId xmlns:a16="http://schemas.microsoft.com/office/drawing/2014/main" id="{D2A7B9CE-B71E-420D-BB37-3E71652E0A46}"/>
               </a:ext>
             </a:extLst>
           </p:cNvPr>
@@ -5266,7 +5266,7 @@
           <p:cNvPr id="19" name="">
             <a:extLst xmlns:a="http://schemas.openxmlformats.org/drawingml/2006/main">
               <a:ext uri="{FF2B5EF4-FFF2-40B4-BE49-F238E27FC236}">
-                <a16:creationId xmlns:a16="http://schemas.microsoft.com/office/drawing/2014/main" id="{228334F4-B8A4-4D9E-A76B-57C6BACD5BAE}"/>
+                <a16:creationId xmlns:a16="http://schemas.microsoft.com/office/drawing/2014/main" id="{86912D64-7345-4D22-8AB2-958B58F38CFE}"/>
               </a:ext>
             </a:extLst>
           </p:cNvPr>
@@ -5297,7 +5297,7 @@
           <p:cNvPr id="20" name="">
             <a:extLst xmlns:a="http://schemas.openxmlformats.org/drawingml/2006/main">
               <a:ext uri="{FF2B5EF4-FFF2-40B4-BE49-F238E27FC236}">
-                <a16:creationId xmlns:a16="http://schemas.microsoft.com/office/drawing/2014/main" id="{82B79CF4-C991-4BA2-A0C4-7545472E563A}"/>
+                <a16:creationId xmlns:a16="http://schemas.microsoft.com/office/drawing/2014/main" id="{EC33DF1D-1AC9-4907-B0E8-2661561594E8}"/>
               </a:ext>
             </a:extLst>
           </p:cNvPr>
@@ -5359,7 +5359,7 @@
           <p:cNvPr id="21" name="">
             <a:extLst xmlns:a="http://schemas.openxmlformats.org/drawingml/2006/main">
               <a:ext uri="{FF2B5EF4-FFF2-40B4-BE49-F238E27FC236}">
-                <a16:creationId xmlns:a16="http://schemas.microsoft.com/office/drawing/2014/main" id="{0B154520-2B83-44C8-9337-CBE7FA9DE4FD}"/>
+                <a16:creationId xmlns:a16="http://schemas.microsoft.com/office/drawing/2014/main" id="{ED3B0207-D9E4-497A-84D3-1C91BDFED863}"/>
               </a:ext>
             </a:extLst>
           </p:cNvPr>
@@ -5421,7 +5421,7 @@
           <p:cNvPr id="22" name="">
             <a:extLst xmlns:a="http://schemas.openxmlformats.org/drawingml/2006/main">
               <a:ext uri="{FF2B5EF4-FFF2-40B4-BE49-F238E27FC236}">
-                <a16:creationId xmlns:a16="http://schemas.microsoft.com/office/drawing/2014/main" id="{C03EEC91-0D0A-4985-A46C-C3A749F6EBAA}"/>
+                <a16:creationId xmlns:a16="http://schemas.microsoft.com/office/drawing/2014/main" id="{BC3B2ED0-2F62-4003-867A-1D6DF089ECDF}"/>
               </a:ext>
             </a:extLst>
           </p:cNvPr>
@@ -5483,7 +5483,7 @@
           <p:cNvPr id="23" name="">
             <a:extLst xmlns:a="http://schemas.openxmlformats.org/drawingml/2006/main">
               <a:ext uri="{FF2B5EF4-FFF2-40B4-BE49-F238E27FC236}">
-                <a16:creationId xmlns:a16="http://schemas.microsoft.com/office/drawing/2014/main" id="{65DD49D7-49DB-464A-ABFE-C0509DE412E7}"/>
+                <a16:creationId xmlns:a16="http://schemas.microsoft.com/office/drawing/2014/main" id="{6425FA90-1303-40ED-B3AD-9987F67DA4F4}"/>
               </a:ext>
             </a:extLst>
           </p:cNvPr>
@@ -5543,7 +5543,7 @@
     </p:spTree>
     <p:extLst>
       <p:ext uri="{BB962C8B-B14F-4D97-AF65-F5344CB8AC3E}">
-        <p14:creationId xmlns:p14="http://schemas.microsoft.com/office/powerpoint/2010/main" val="1377382851"/>
+        <p14:creationId xmlns:p14="http://schemas.microsoft.com/office/powerpoint/2010/main" val="194051346"/>
       </p:ext>
     </p:extLst>
   </p:cSld>
@@ -5571,7 +5571,7 @@
           <p:nvPr/>
         </p:nvPicPr>
         <p:blipFill>
-          <a:blip xmlns:r="http://schemas.openxmlformats.org/officeDocument/2006/relationships" xmlns:a="http://schemas.openxmlformats.org/drawingml/2006/main" r:embed="R48cb2edeb805463c"/>
+          <a:blip xmlns:r="http://schemas.openxmlformats.org/officeDocument/2006/relationships" xmlns:a="http://schemas.openxmlformats.org/drawingml/2006/main" r:embed="R0e79f1d83e7b40d8"/>
           <a:srcRect xmlns:a="http://schemas.openxmlformats.org/drawingml/2006/main" l="0" t="0" r="0" b="0"/>
           <a:stretch xmlns:a="http://schemas.openxmlformats.org/drawingml/2006/main">
             <a:fillRect l="0" t="0" r="0" b="0"/>
@@ -5592,7 +5592,7 @@
           <p:cNvPr id="2" name="">
             <a:extLst xmlns:a="http://schemas.openxmlformats.org/drawingml/2006/main">
               <a:ext uri="{FF2B5EF4-FFF2-40B4-BE49-F238E27FC236}">
-                <a16:creationId xmlns:a16="http://schemas.microsoft.com/office/drawing/2014/main" id="{A2C41080-3E92-492E-AD4E-049C14D0E590}"/>
+                <a16:creationId xmlns:a16="http://schemas.microsoft.com/office/drawing/2014/main" id="{A9E6FFA5-6E6E-44E6-8FF6-9D7B8E6CF221}"/>
               </a:ext>
             </a:extLst>
           </p:cNvPr>
@@ -5654,7 +5654,7 @@
           <p:cNvPr id="3" name="">
             <a:extLst xmlns:a="http://schemas.openxmlformats.org/drawingml/2006/main">
               <a:ext uri="{FF2B5EF4-FFF2-40B4-BE49-F238E27FC236}">
-                <a16:creationId xmlns:a16="http://schemas.microsoft.com/office/drawing/2014/main" id="{4541E5E4-F65C-4123-AAFC-9A3BFB8770A4}"/>
+                <a16:creationId xmlns:a16="http://schemas.microsoft.com/office/drawing/2014/main" id="{6FF8D5D3-72F1-4006-8827-9B6818451811}"/>
               </a:ext>
             </a:extLst>
           </p:cNvPr>
@@ -5716,7 +5716,7 @@
           <p:cNvPr id="4" name="">
             <a:extLst xmlns:a="http://schemas.openxmlformats.org/drawingml/2006/main">
               <a:ext uri="{FF2B5EF4-FFF2-40B4-BE49-F238E27FC236}">
-                <a16:creationId xmlns:a16="http://schemas.microsoft.com/office/drawing/2014/main" id="{0AF09352-569F-4766-8C11-BA41F260CF39}"/>
+                <a16:creationId xmlns:a16="http://schemas.microsoft.com/office/drawing/2014/main" id="{513E5390-0A44-42F3-904D-2A88D00ACC69}"/>
               </a:ext>
             </a:extLst>
           </p:cNvPr>
@@ -5778,7 +5778,7 @@
           <p:cNvPr id="5" name="">
             <a:extLst xmlns:a="http://schemas.openxmlformats.org/drawingml/2006/main">
               <a:ext uri="{FF2B5EF4-FFF2-40B4-BE49-F238E27FC236}">
-                <a16:creationId xmlns:a16="http://schemas.microsoft.com/office/drawing/2014/main" id="{51EE55CC-0B2C-4CD2-A0EE-EECB0A1EDF6A}"/>
+                <a16:creationId xmlns:a16="http://schemas.microsoft.com/office/drawing/2014/main" id="{3DD574F4-CBE3-4C06-882D-E8D095D843B1}"/>
               </a:ext>
             </a:extLst>
           </p:cNvPr>
@@ -5809,7 +5809,7 @@
           <p:cNvPr id="6" name="">
             <a:extLst xmlns:a="http://schemas.openxmlformats.org/drawingml/2006/main">
               <a:ext uri="{FF2B5EF4-FFF2-40B4-BE49-F238E27FC236}">
-                <a16:creationId xmlns:a16="http://schemas.microsoft.com/office/drawing/2014/main" id="{0A50B491-0A87-4CE2-95ED-3CECD3B5EE19}"/>
+                <a16:creationId xmlns:a16="http://schemas.microsoft.com/office/drawing/2014/main" id="{509878D7-4636-4323-B53A-063A8EF6BC32}"/>
               </a:ext>
             </a:extLst>
           </p:cNvPr>
@@ -5871,7 +5871,7 @@
           <p:cNvPr id="7" name="">
             <a:extLst xmlns:a="http://schemas.openxmlformats.org/drawingml/2006/main">
               <a:ext uri="{FF2B5EF4-FFF2-40B4-BE49-F238E27FC236}">
-                <a16:creationId xmlns:a16="http://schemas.microsoft.com/office/drawing/2014/main" id="{FDC9E1B1-8ADD-4F13-ACB8-4D4D4CD0642C}"/>
+                <a16:creationId xmlns:a16="http://schemas.microsoft.com/office/drawing/2014/main" id="{489BADF5-7DF2-40BB-98DB-2760D711CF48}"/>
               </a:ext>
             </a:extLst>
           </p:cNvPr>
@@ -5904,7 +5904,7 @@
           <p:cNvPr id="8" name="">
             <a:extLst xmlns:a="http://schemas.openxmlformats.org/drawingml/2006/main">
               <a:ext uri="{FF2B5EF4-FFF2-40B4-BE49-F238E27FC236}">
-                <a16:creationId xmlns:a16="http://schemas.microsoft.com/office/drawing/2014/main" id="{961E383A-1792-4A70-807D-6D603268AC01}"/>
+                <a16:creationId xmlns:a16="http://schemas.microsoft.com/office/drawing/2014/main" id="{76F8CBF5-696A-465D-873E-1EBAC810BCA3}"/>
               </a:ext>
             </a:extLst>
           </p:cNvPr>
@@ -5939,7 +5939,7 @@
           <p:cNvPr id="9" name="">
             <a:extLst xmlns:a="http://schemas.openxmlformats.org/drawingml/2006/main">
               <a:ext uri="{FF2B5EF4-FFF2-40B4-BE49-F238E27FC236}">
-                <a16:creationId xmlns:a16="http://schemas.microsoft.com/office/drawing/2014/main" id="{AB8B04F9-1CC4-4396-9E8C-AFA9AC276289}"/>
+                <a16:creationId xmlns:a16="http://schemas.microsoft.com/office/drawing/2014/main" id="{805E572C-C9BA-4F79-9673-21FE7FDC2AB1}"/>
               </a:ext>
             </a:extLst>
           </p:cNvPr>
@@ -5970,7 +5970,7 @@
           <p:cNvPr id="10" name="">
             <a:extLst xmlns:a="http://schemas.openxmlformats.org/drawingml/2006/main">
               <a:ext uri="{FF2B5EF4-FFF2-40B4-BE49-F238E27FC236}">
-                <a16:creationId xmlns:a16="http://schemas.microsoft.com/office/drawing/2014/main" id="{639C7E38-B8C4-49BD-8D32-3AF961BF8026}"/>
+                <a16:creationId xmlns:a16="http://schemas.microsoft.com/office/drawing/2014/main" id="{4AD7C2E4-24F5-444B-AF3F-AE1A402BF8B0}"/>
               </a:ext>
             </a:extLst>
           </p:cNvPr>
@@ -6032,7 +6032,7 @@
           <p:cNvPr id="11" name="">
             <a:extLst xmlns:a="http://schemas.openxmlformats.org/drawingml/2006/main">
               <a:ext uri="{FF2B5EF4-FFF2-40B4-BE49-F238E27FC236}">
-                <a16:creationId xmlns:a16="http://schemas.microsoft.com/office/drawing/2014/main" id="{8E4724E0-8AA0-404F-927E-48B081F3378F}"/>
+                <a16:creationId xmlns:a16="http://schemas.microsoft.com/office/drawing/2014/main" id="{B935BF3F-334F-40DC-8778-8AE045D06ADE}"/>
               </a:ext>
             </a:extLst>
           </p:cNvPr>
@@ -6094,7 +6094,7 @@
           <p:cNvPr id="12" name="">
             <a:extLst xmlns:a="http://schemas.openxmlformats.org/drawingml/2006/main">
               <a:ext uri="{FF2B5EF4-FFF2-40B4-BE49-F238E27FC236}">
-                <a16:creationId xmlns:a16="http://schemas.microsoft.com/office/drawing/2014/main" id="{BC09DF93-0C68-4991-A580-08B58B87DA3A}"/>
+                <a16:creationId xmlns:a16="http://schemas.microsoft.com/office/drawing/2014/main" id="{447A101C-DB73-40E8-91D9-A10EDFE85D4F}"/>
               </a:ext>
             </a:extLst>
           </p:cNvPr>
@@ -6156,7 +6156,7 @@
           <p:cNvPr id="13" name="">
             <a:extLst xmlns:a="http://schemas.openxmlformats.org/drawingml/2006/main">
               <a:ext uri="{FF2B5EF4-FFF2-40B4-BE49-F238E27FC236}">
-                <a16:creationId xmlns:a16="http://schemas.microsoft.com/office/drawing/2014/main" id="{88E62365-AA75-4BFB-AC7B-8A9B6459F5B5}"/>
+                <a16:creationId xmlns:a16="http://schemas.microsoft.com/office/drawing/2014/main" id="{F008BACF-79F6-4CCA-9A51-7EC48960AA94}"/>
               </a:ext>
             </a:extLst>
           </p:cNvPr>
@@ -6216,7 +6216,7 @@
     </p:spTree>
     <p:extLst>
       <p:ext uri="{BB962C8B-B14F-4D97-AF65-F5344CB8AC3E}">
-        <p14:creationId xmlns:p14="http://schemas.microsoft.com/office/powerpoint/2010/main" val="584903351"/>
+        <p14:creationId xmlns:p14="http://schemas.microsoft.com/office/powerpoint/2010/main" val="35692761"/>
       </p:ext>
     </p:extLst>
   </p:cSld>
@@ -6244,7 +6244,7 @@
           <p:nvPr/>
         </p:nvPicPr>
         <p:blipFill>
-          <a:blip xmlns:r="http://schemas.openxmlformats.org/officeDocument/2006/relationships" xmlns:a="http://schemas.openxmlformats.org/drawingml/2006/main" r:embed="R87db9a634b2e46c2"/>
+          <a:blip xmlns:r="http://schemas.openxmlformats.org/officeDocument/2006/relationships" xmlns:a="http://schemas.openxmlformats.org/drawingml/2006/main" r:embed="Rbb8cd9c7fe64470a"/>
           <a:srcRect xmlns:a="http://schemas.openxmlformats.org/drawingml/2006/main" l="0" t="0" r="0" b="0"/>
           <a:stretch xmlns:a="http://schemas.openxmlformats.org/drawingml/2006/main">
             <a:fillRect l="0" t="0" r="0" b="0"/>
@@ -6265,7 +6265,7 @@
           <p:cNvPr id="2" name="">
             <a:extLst xmlns:a="http://schemas.openxmlformats.org/drawingml/2006/main">
               <a:ext uri="{FF2B5EF4-FFF2-40B4-BE49-F238E27FC236}">
-                <a16:creationId xmlns:a16="http://schemas.microsoft.com/office/drawing/2014/main" id="{7087096C-26E0-4D09-8DB7-F2927E1368C2}"/>
+                <a16:creationId xmlns:a16="http://schemas.microsoft.com/office/drawing/2014/main" id="{0A649180-3191-420D-A3DD-8807EBD0F6CA}"/>
               </a:ext>
             </a:extLst>
           </p:cNvPr>
@@ -6327,7 +6327,7 @@
           <p:cNvPr id="3" name="">
             <a:extLst xmlns:a="http://schemas.openxmlformats.org/drawingml/2006/main">
               <a:ext uri="{FF2B5EF4-FFF2-40B4-BE49-F238E27FC236}">
-                <a16:creationId xmlns:a16="http://schemas.microsoft.com/office/drawing/2014/main" id="{261BCFA3-3D69-4283-AAD5-789C7A7C36FD}"/>
+                <a16:creationId xmlns:a16="http://schemas.microsoft.com/office/drawing/2014/main" id="{6B9821C9-2017-4D6D-AF40-E3966AD15DE2}"/>
               </a:ext>
             </a:extLst>
           </p:cNvPr>
@@ -6389,7 +6389,7 @@
           <p:cNvPr id="4" name="">
             <a:extLst xmlns:a="http://schemas.openxmlformats.org/drawingml/2006/main">
               <a:ext uri="{FF2B5EF4-FFF2-40B4-BE49-F238E27FC236}">
-                <a16:creationId xmlns:a16="http://schemas.microsoft.com/office/drawing/2014/main" id="{091B3EBC-53E4-4AD7-B2A5-37FB6FCB896A}"/>
+                <a16:creationId xmlns:a16="http://schemas.microsoft.com/office/drawing/2014/main" id="{BB11714B-A9B9-4D8A-A5C1-F8CCA26D5685}"/>
               </a:ext>
             </a:extLst>
           </p:cNvPr>
@@ -6451,7 +6451,7 @@
           <p:cNvPr id="5" name="">
             <a:extLst xmlns:a="http://schemas.openxmlformats.org/drawingml/2006/main">
               <a:ext uri="{FF2B5EF4-FFF2-40B4-BE49-F238E27FC236}">
-                <a16:creationId xmlns:a16="http://schemas.microsoft.com/office/drawing/2014/main" id="{AD491699-B346-4528-8CD0-52E547A98775}"/>
+                <a16:creationId xmlns:a16="http://schemas.microsoft.com/office/drawing/2014/main" id="{E57DB522-32A9-4156-9806-37F7CEC37210}"/>
               </a:ext>
             </a:extLst>
           </p:cNvPr>
@@ -6482,7 +6482,7 @@
           <p:cNvPr id="6" name="">
             <a:extLst xmlns:a="http://schemas.openxmlformats.org/drawingml/2006/main">
               <a:ext uri="{FF2B5EF4-FFF2-40B4-BE49-F238E27FC236}">
-                <a16:creationId xmlns:a16="http://schemas.microsoft.com/office/drawing/2014/main" id="{0337B24A-F4BB-4125-B03D-29DC81A1566C}"/>
+                <a16:creationId xmlns:a16="http://schemas.microsoft.com/office/drawing/2014/main" id="{6B7FE2F7-409F-48C5-869D-BD8ACA7C8335}"/>
               </a:ext>
             </a:extLst>
           </p:cNvPr>
@@ -6544,7 +6544,7 @@
           <p:cNvPr id="7" name="">
             <a:extLst xmlns:a="http://schemas.openxmlformats.org/drawingml/2006/main">
               <a:ext uri="{FF2B5EF4-FFF2-40B4-BE49-F238E27FC236}">
-                <a16:creationId xmlns:a16="http://schemas.microsoft.com/office/drawing/2014/main" id="{3E908627-CD7E-458B-B580-EB1CF51A50FA}"/>
+                <a16:creationId xmlns:a16="http://schemas.microsoft.com/office/drawing/2014/main" id="{BF02DB5E-DB23-4A15-93A8-AF0236CFF9A3}"/>
               </a:ext>
             </a:extLst>
           </p:cNvPr>
@@ -6577,7 +6577,7 @@
           <p:cNvPr id="8" name="">
             <a:extLst xmlns:a="http://schemas.openxmlformats.org/drawingml/2006/main">
               <a:ext uri="{FF2B5EF4-FFF2-40B4-BE49-F238E27FC236}">
-                <a16:creationId xmlns:a16="http://schemas.microsoft.com/office/drawing/2014/main" id="{9EA22877-B900-437B-A14A-2B5D647E1DB9}"/>
+                <a16:creationId xmlns:a16="http://schemas.microsoft.com/office/drawing/2014/main" id="{99827B96-1527-47C4-9B2B-D16C4CBAA914}"/>
               </a:ext>
             </a:extLst>
           </p:cNvPr>
@@ -6612,7 +6612,7 @@
           <p:cNvPr id="9" name="">
             <a:extLst xmlns:a="http://schemas.openxmlformats.org/drawingml/2006/main">
               <a:ext uri="{FF2B5EF4-FFF2-40B4-BE49-F238E27FC236}">
-                <a16:creationId xmlns:a16="http://schemas.microsoft.com/office/drawing/2014/main" id="{F30835AE-462D-4E47-A0B8-5F322150D915}"/>
+                <a16:creationId xmlns:a16="http://schemas.microsoft.com/office/drawing/2014/main" id="{5885D594-4CEE-4C20-B09F-56D45893845B}"/>
               </a:ext>
             </a:extLst>
           </p:cNvPr>
@@ -6643,7 +6643,7 @@
           <p:cNvPr id="10" name="">
             <a:extLst xmlns:a="http://schemas.openxmlformats.org/drawingml/2006/main">
               <a:ext uri="{FF2B5EF4-FFF2-40B4-BE49-F238E27FC236}">
-                <a16:creationId xmlns:a16="http://schemas.microsoft.com/office/drawing/2014/main" id="{07B65DCB-788F-46B1-A499-1D7F51256940}"/>
+                <a16:creationId xmlns:a16="http://schemas.microsoft.com/office/drawing/2014/main" id="{90CAC97A-CE52-47AD-8C20-F320EA0F6BC8}"/>
               </a:ext>
             </a:extLst>
           </p:cNvPr>
@@ -6705,7 +6705,7 @@
           <p:cNvPr id="11" name="">
             <a:extLst xmlns:a="http://schemas.openxmlformats.org/drawingml/2006/main">
               <a:ext uri="{FF2B5EF4-FFF2-40B4-BE49-F238E27FC236}">
-                <a16:creationId xmlns:a16="http://schemas.microsoft.com/office/drawing/2014/main" id="{3B26228A-3C56-459A-8332-E8CB229471E7}"/>
+                <a16:creationId xmlns:a16="http://schemas.microsoft.com/office/drawing/2014/main" id="{BD2F0AE8-E857-438A-87D5-067DD271900D}"/>
               </a:ext>
             </a:extLst>
           </p:cNvPr>
@@ -6767,7 +6767,7 @@
           <p:cNvPr id="12" name="">
             <a:extLst xmlns:a="http://schemas.openxmlformats.org/drawingml/2006/main">
               <a:ext uri="{FF2B5EF4-FFF2-40B4-BE49-F238E27FC236}">
-                <a16:creationId xmlns:a16="http://schemas.microsoft.com/office/drawing/2014/main" id="{E42647F1-5C08-4FE8-939E-6924409C3C8B}"/>
+                <a16:creationId xmlns:a16="http://schemas.microsoft.com/office/drawing/2014/main" id="{0BCF3D1B-228A-4DF8-BF8F-05E2F7CB3B9F}"/>
               </a:ext>
             </a:extLst>
           </p:cNvPr>
@@ -6800,7 +6800,7 @@
           <p:cNvPr id="13" name="">
             <a:extLst xmlns:a="http://schemas.openxmlformats.org/drawingml/2006/main">
               <a:ext uri="{FF2B5EF4-FFF2-40B4-BE49-F238E27FC236}">
-                <a16:creationId xmlns:a16="http://schemas.microsoft.com/office/drawing/2014/main" id="{D5F38D32-7CC0-4DFA-B363-5BDA845C09E7}"/>
+                <a16:creationId xmlns:a16="http://schemas.microsoft.com/office/drawing/2014/main" id="{FFAFAA7B-50D4-4E36-BB42-2BB94C82CD41}"/>
               </a:ext>
             </a:extLst>
           </p:cNvPr>
@@ -6835,7 +6835,7 @@
           <p:cNvPr id="14" name="">
             <a:extLst xmlns:a="http://schemas.openxmlformats.org/drawingml/2006/main">
               <a:ext uri="{FF2B5EF4-FFF2-40B4-BE49-F238E27FC236}">
-                <a16:creationId xmlns:a16="http://schemas.microsoft.com/office/drawing/2014/main" id="{0A405CB3-7142-44DE-B790-6840F109E66C}"/>
+                <a16:creationId xmlns:a16="http://schemas.microsoft.com/office/drawing/2014/main" id="{4AB1E764-A7C4-44E0-8F23-9989CA54E2E2}"/>
               </a:ext>
             </a:extLst>
           </p:cNvPr>
@@ -6866,7 +6866,7 @@
           <p:cNvPr id="15" name="">
             <a:extLst xmlns:a="http://schemas.openxmlformats.org/drawingml/2006/main">
               <a:ext uri="{FF2B5EF4-FFF2-40B4-BE49-F238E27FC236}">
-                <a16:creationId xmlns:a16="http://schemas.microsoft.com/office/drawing/2014/main" id="{151D622D-D7E3-4085-B73C-BBE2FAD83DDC}"/>
+                <a16:creationId xmlns:a16="http://schemas.microsoft.com/office/drawing/2014/main" id="{AA0C6CC5-406E-436E-A7E1-ECD0380378FA}"/>
               </a:ext>
             </a:extLst>
           </p:cNvPr>
@@ -6928,7 +6928,7 @@
           <p:cNvPr id="16" name="">
             <a:extLst xmlns:a="http://schemas.openxmlformats.org/drawingml/2006/main">
               <a:ext uri="{FF2B5EF4-FFF2-40B4-BE49-F238E27FC236}">
-                <a16:creationId xmlns:a16="http://schemas.microsoft.com/office/drawing/2014/main" id="{86FE1B18-50A7-4702-B3ED-F99DF4649E4C}"/>
+                <a16:creationId xmlns:a16="http://schemas.microsoft.com/office/drawing/2014/main" id="{1109BD67-54BB-43AB-BB9A-FBA160156F54}"/>
               </a:ext>
             </a:extLst>
           </p:cNvPr>
@@ -6990,7 +6990,7 @@
           <p:cNvPr id="17" name="">
             <a:extLst xmlns:a="http://schemas.openxmlformats.org/drawingml/2006/main">
               <a:ext uri="{FF2B5EF4-FFF2-40B4-BE49-F238E27FC236}">
-                <a16:creationId xmlns:a16="http://schemas.microsoft.com/office/drawing/2014/main" id="{87F3C908-8445-4568-B949-F3CCD04D2A84}"/>
+                <a16:creationId xmlns:a16="http://schemas.microsoft.com/office/drawing/2014/main" id="{45672C57-D576-465D-BA55-21E647325A8F}"/>
               </a:ext>
             </a:extLst>
           </p:cNvPr>
@@ -7052,7 +7052,7 @@
           <p:cNvPr id="18" name="">
             <a:extLst xmlns:a="http://schemas.openxmlformats.org/drawingml/2006/main">
               <a:ext uri="{FF2B5EF4-FFF2-40B4-BE49-F238E27FC236}">
-                <a16:creationId xmlns:a16="http://schemas.microsoft.com/office/drawing/2014/main" id="{CC28DEE6-61D6-4324-8A64-1C4CABC5BE66}"/>
+                <a16:creationId xmlns:a16="http://schemas.microsoft.com/office/drawing/2014/main" id="{DE6E19BA-E2C1-475C-B4C1-BDF05B75A867}"/>
               </a:ext>
             </a:extLst>
           </p:cNvPr>
@@ -7112,7 +7112,7 @@
     </p:spTree>
     <p:extLst>
       <p:ext uri="{BB962C8B-B14F-4D97-AF65-F5344CB8AC3E}">
-        <p14:creationId xmlns:p14="http://schemas.microsoft.com/office/powerpoint/2010/main" val="2090964247"/>
+        <p14:creationId xmlns:p14="http://schemas.microsoft.com/office/powerpoint/2010/main" val="1922203381"/>
       </p:ext>
     </p:extLst>
   </p:cSld>
@@ -7140,7 +7140,7 @@
           <p:nvPr/>
         </p:nvPicPr>
         <p:blipFill>
-          <a:blip xmlns:r="http://schemas.openxmlformats.org/officeDocument/2006/relationships" xmlns:a="http://schemas.openxmlformats.org/drawingml/2006/main" r:embed="R984ff5364ab0452c"/>
+          <a:blip xmlns:r="http://schemas.openxmlformats.org/officeDocument/2006/relationships" xmlns:a="http://schemas.openxmlformats.org/drawingml/2006/main" r:embed="R71fa037fdf6a4d65"/>
           <a:srcRect xmlns:a="http://schemas.openxmlformats.org/drawingml/2006/main" l="0" t="0" r="0" b="0"/>
           <a:stretch xmlns:a="http://schemas.openxmlformats.org/drawingml/2006/main">
             <a:fillRect l="0" t="0" r="0" b="0"/>
@@ -7161,7 +7161,7 @@
           <p:cNvPr id="2" name="">
             <a:extLst xmlns:a="http://schemas.openxmlformats.org/drawingml/2006/main">
               <a:ext uri="{FF2B5EF4-FFF2-40B4-BE49-F238E27FC236}">
-                <a16:creationId xmlns:a16="http://schemas.microsoft.com/office/drawing/2014/main" id="{90A63AFC-3544-4D4C-9D35-8FB8D896197A}"/>
+                <a16:creationId xmlns:a16="http://schemas.microsoft.com/office/drawing/2014/main" id="{640CC347-B860-4D40-AE98-58B6237ACEAD}"/>
               </a:ext>
             </a:extLst>
           </p:cNvPr>
@@ -7223,7 +7223,7 @@
           <p:cNvPr id="3" name="">
             <a:extLst xmlns:a="http://schemas.openxmlformats.org/drawingml/2006/main">
               <a:ext uri="{FF2B5EF4-FFF2-40B4-BE49-F238E27FC236}">
-                <a16:creationId xmlns:a16="http://schemas.microsoft.com/office/drawing/2014/main" id="{FAE19F94-74C3-44BE-BFD3-D6C0BC47BEA9}"/>
+                <a16:creationId xmlns:a16="http://schemas.microsoft.com/office/drawing/2014/main" id="{4E24F918-0CCF-4467-8752-3AE2FDB53838}"/>
               </a:ext>
             </a:extLst>
           </p:cNvPr>
@@ -7285,7 +7285,7 @@
           <p:cNvPr id="4" name="">
             <a:extLst xmlns:a="http://schemas.openxmlformats.org/drawingml/2006/main">
               <a:ext uri="{FF2B5EF4-FFF2-40B4-BE49-F238E27FC236}">
-                <a16:creationId xmlns:a16="http://schemas.microsoft.com/office/drawing/2014/main" id="{0993E292-5C15-4C19-A2E6-7C9BE2183792}"/>
+                <a16:creationId xmlns:a16="http://schemas.microsoft.com/office/drawing/2014/main" id="{523C9EBD-B564-45C6-B082-1A75EB80197D}"/>
               </a:ext>
             </a:extLst>
           </p:cNvPr>
@@ -7347,7 +7347,7 @@
           <p:cNvPr id="5" name="">
             <a:extLst xmlns:a="http://schemas.openxmlformats.org/drawingml/2006/main">
               <a:ext uri="{FF2B5EF4-FFF2-40B4-BE49-F238E27FC236}">
-                <a16:creationId xmlns:a16="http://schemas.microsoft.com/office/drawing/2014/main" id="{8646BEEB-E059-4ADF-A5AE-E13B23DE7B4E}"/>
+                <a16:creationId xmlns:a16="http://schemas.microsoft.com/office/drawing/2014/main" id="{7BE8D7AD-24E6-4586-A142-21D043BB719C}"/>
               </a:ext>
             </a:extLst>
           </p:cNvPr>
@@ -7378,7 +7378,7 @@
           <p:cNvPr id="6" name="">
             <a:extLst xmlns:a="http://schemas.openxmlformats.org/drawingml/2006/main">
               <a:ext uri="{FF2B5EF4-FFF2-40B4-BE49-F238E27FC236}">
-                <a16:creationId xmlns:a16="http://schemas.microsoft.com/office/drawing/2014/main" id="{4670C872-7C8C-4604-A98D-95866E9C2B90}"/>
+                <a16:creationId xmlns:a16="http://schemas.microsoft.com/office/drawing/2014/main" id="{DCE23CE7-CA28-4B15-B72C-489CE2EF57D5}"/>
               </a:ext>
             </a:extLst>
           </p:cNvPr>
@@ -7440,7 +7440,7 @@
           <p:cNvPr id="7" name="">
             <a:extLst xmlns:a="http://schemas.openxmlformats.org/drawingml/2006/main">
               <a:ext uri="{FF2B5EF4-FFF2-40B4-BE49-F238E27FC236}">
-                <a16:creationId xmlns:a16="http://schemas.microsoft.com/office/drawing/2014/main" id="{DD20E5A8-BD51-40C3-8915-65A66BADD2E0}"/>
+                <a16:creationId xmlns:a16="http://schemas.microsoft.com/office/drawing/2014/main" id="{29195A3A-C6CB-4BCF-B405-DB65825C09C6}"/>
               </a:ext>
             </a:extLst>
           </p:cNvPr>
@@ -7473,7 +7473,7 @@
           <p:cNvPr id="8" name="">
             <a:extLst xmlns:a="http://schemas.openxmlformats.org/drawingml/2006/main">
               <a:ext uri="{FF2B5EF4-FFF2-40B4-BE49-F238E27FC236}">
-                <a16:creationId xmlns:a16="http://schemas.microsoft.com/office/drawing/2014/main" id="{7DBB479F-59E3-4AD2-8F70-DFC2D7914CDC}"/>
+                <a16:creationId xmlns:a16="http://schemas.microsoft.com/office/drawing/2014/main" id="{27C1B042-6FA9-4583-9295-88FD84D01851}"/>
               </a:ext>
             </a:extLst>
           </p:cNvPr>
@@ -7508,7 +7508,7 @@
           <p:cNvPr id="9" name="">
             <a:extLst xmlns:a="http://schemas.openxmlformats.org/drawingml/2006/main">
               <a:ext uri="{FF2B5EF4-FFF2-40B4-BE49-F238E27FC236}">
-                <a16:creationId xmlns:a16="http://schemas.microsoft.com/office/drawing/2014/main" id="{D5E3FE61-414B-46E5-B5B9-BFA2A164A15D}"/>
+                <a16:creationId xmlns:a16="http://schemas.microsoft.com/office/drawing/2014/main" id="{48FC5357-6B71-4748-8583-62BB564FA35F}"/>
               </a:ext>
             </a:extLst>
           </p:cNvPr>
@@ -7539,7 +7539,7 @@
           <p:cNvPr id="10" name="">
             <a:extLst xmlns:a="http://schemas.openxmlformats.org/drawingml/2006/main">
               <a:ext uri="{FF2B5EF4-FFF2-40B4-BE49-F238E27FC236}">
-                <a16:creationId xmlns:a16="http://schemas.microsoft.com/office/drawing/2014/main" id="{2CEF296A-E97A-41BC-8624-9EED348C9316}"/>
+                <a16:creationId xmlns:a16="http://schemas.microsoft.com/office/drawing/2014/main" id="{CB539D53-5C12-456D-88FD-1D09382938C4}"/>
               </a:ext>
             </a:extLst>
           </p:cNvPr>
@@ -7601,7 +7601,7 @@
           <p:cNvPr id="11" name="">
             <a:extLst xmlns:a="http://schemas.openxmlformats.org/drawingml/2006/main">
               <a:ext uri="{FF2B5EF4-FFF2-40B4-BE49-F238E27FC236}">
-                <a16:creationId xmlns:a16="http://schemas.microsoft.com/office/drawing/2014/main" id="{FEBDBD80-02F8-4667-A4C0-1C6E2044621D}"/>
+                <a16:creationId xmlns:a16="http://schemas.microsoft.com/office/drawing/2014/main" id="{0CF46282-B361-4974-8B44-E491C6479317}"/>
               </a:ext>
             </a:extLst>
           </p:cNvPr>
@@ -7663,7 +7663,7 @@
           <p:cNvPr id="12" name="">
             <a:extLst xmlns:a="http://schemas.openxmlformats.org/drawingml/2006/main">
               <a:ext uri="{FF2B5EF4-FFF2-40B4-BE49-F238E27FC236}">
-                <a16:creationId xmlns:a16="http://schemas.microsoft.com/office/drawing/2014/main" id="{615C39F5-8846-4385-9F76-5E5F4CEEA3A1}"/>
+                <a16:creationId xmlns:a16="http://schemas.microsoft.com/office/drawing/2014/main" id="{715CFE78-8470-4E00-B960-40515639FEF4}"/>
               </a:ext>
             </a:extLst>
           </p:cNvPr>
@@ -7696,7 +7696,7 @@
           <p:cNvPr id="13" name="">
             <a:extLst xmlns:a="http://schemas.openxmlformats.org/drawingml/2006/main">
               <a:ext uri="{FF2B5EF4-FFF2-40B4-BE49-F238E27FC236}">
-                <a16:creationId xmlns:a16="http://schemas.microsoft.com/office/drawing/2014/main" id="{A9C25C74-1BF4-4FA3-A51C-A11AF8C63F05}"/>
+                <a16:creationId xmlns:a16="http://schemas.microsoft.com/office/drawing/2014/main" id="{DDD50BB7-5266-4769-840A-DED1BE7F47CD}"/>
               </a:ext>
             </a:extLst>
           </p:cNvPr>
@@ -7731,7 +7731,7 @@
           <p:cNvPr id="14" name="">
             <a:extLst xmlns:a="http://schemas.openxmlformats.org/drawingml/2006/main">
               <a:ext uri="{FF2B5EF4-FFF2-40B4-BE49-F238E27FC236}">
-                <a16:creationId xmlns:a16="http://schemas.microsoft.com/office/drawing/2014/main" id="{0775974A-CB5B-4E72-BCD9-AE808218B677}"/>
+                <a16:creationId xmlns:a16="http://schemas.microsoft.com/office/drawing/2014/main" id="{573D499E-F412-4AF8-9A10-3A88B14A4525}"/>
               </a:ext>
             </a:extLst>
           </p:cNvPr>
@@ -7762,7 +7762,7 @@
           <p:cNvPr id="15" name="">
             <a:extLst xmlns:a="http://schemas.openxmlformats.org/drawingml/2006/main">
               <a:ext uri="{FF2B5EF4-FFF2-40B4-BE49-F238E27FC236}">
-                <a16:creationId xmlns:a16="http://schemas.microsoft.com/office/drawing/2014/main" id="{5F4362F7-77FE-4285-925C-28E0419D2D2F}"/>
+                <a16:creationId xmlns:a16="http://schemas.microsoft.com/office/drawing/2014/main" id="{D95D15A1-AAC4-4C93-B41A-749409D585DA}"/>
               </a:ext>
             </a:extLst>
           </p:cNvPr>
@@ -7824,7 +7824,7 @@
           <p:cNvPr id="16" name="">
             <a:extLst xmlns:a="http://schemas.openxmlformats.org/drawingml/2006/main">
               <a:ext uri="{FF2B5EF4-FFF2-40B4-BE49-F238E27FC236}">
-                <a16:creationId xmlns:a16="http://schemas.microsoft.com/office/drawing/2014/main" id="{4D535FB7-573A-49AC-8C87-30C41AECC7F1}"/>
+                <a16:creationId xmlns:a16="http://schemas.microsoft.com/office/drawing/2014/main" id="{A8EDCBEC-BA58-438D-B22C-B7CC228104ED}"/>
               </a:ext>
             </a:extLst>
           </p:cNvPr>
@@ -7886,7 +7886,7 @@
           <p:cNvPr id="17" name="">
             <a:extLst xmlns:a="http://schemas.openxmlformats.org/drawingml/2006/main">
               <a:ext uri="{FF2B5EF4-FFF2-40B4-BE49-F238E27FC236}">
-                <a16:creationId xmlns:a16="http://schemas.microsoft.com/office/drawing/2014/main" id="{2A329848-C62B-4A14-9873-33120753C2D1}"/>
+                <a16:creationId xmlns:a16="http://schemas.microsoft.com/office/drawing/2014/main" id="{1ABAA9E8-52B6-4380-B97F-1004E514AD38}"/>
               </a:ext>
             </a:extLst>
           </p:cNvPr>
@@ -7948,7 +7948,7 @@
           <p:cNvPr id="18" name="">
             <a:extLst xmlns:a="http://schemas.openxmlformats.org/drawingml/2006/main">
               <a:ext uri="{FF2B5EF4-FFF2-40B4-BE49-F238E27FC236}">
-                <a16:creationId xmlns:a16="http://schemas.microsoft.com/office/drawing/2014/main" id="{F80BC990-B080-41C8-A399-4975E2DF4EE3}"/>
+                <a16:creationId xmlns:a16="http://schemas.microsoft.com/office/drawing/2014/main" id="{6C22295B-104B-46ED-B845-9D3A9964B7FE}"/>
               </a:ext>
             </a:extLst>
           </p:cNvPr>
@@ -8008,7 +8008,7 @@
     </p:spTree>
     <p:extLst>
       <p:ext uri="{BB962C8B-B14F-4D97-AF65-F5344CB8AC3E}">
-        <p14:creationId xmlns:p14="http://schemas.microsoft.com/office/powerpoint/2010/main" val="43769529"/>
+        <p14:creationId xmlns:p14="http://schemas.microsoft.com/office/powerpoint/2010/main" val="560008867"/>
       </p:ext>
     </p:extLst>
   </p:cSld>
@@ -8036,7 +8036,7 @@
           <p:nvPr/>
         </p:nvPicPr>
         <p:blipFill>
-          <a:blip xmlns:r="http://schemas.openxmlformats.org/officeDocument/2006/relationships" xmlns:a="http://schemas.openxmlformats.org/drawingml/2006/main" r:embed="R82defa0720dc4ed7"/>
+          <a:blip xmlns:r="http://schemas.openxmlformats.org/officeDocument/2006/relationships" xmlns:a="http://schemas.openxmlformats.org/drawingml/2006/main" r:embed="Raffd9639894c4fea"/>
           <a:srcRect xmlns:a="http://schemas.openxmlformats.org/drawingml/2006/main" l="0" t="0" r="0" b="0"/>
           <a:stretch xmlns:a="http://schemas.openxmlformats.org/drawingml/2006/main">
             <a:fillRect l="0" t="0" r="0" b="0"/>
@@ -8057,7 +8057,7 @@
           <p:cNvPr id="2" name="">
             <a:extLst xmlns:a="http://schemas.openxmlformats.org/drawingml/2006/main">
               <a:ext uri="{FF2B5EF4-FFF2-40B4-BE49-F238E27FC236}">
-                <a16:creationId xmlns:a16="http://schemas.microsoft.com/office/drawing/2014/main" id="{67F85657-D58A-49E1-AE08-03DDEFF69B0A}"/>
+                <a16:creationId xmlns:a16="http://schemas.microsoft.com/office/drawing/2014/main" id="{BE17B6CD-DF93-453E-BF96-F4ED2216A2AA}"/>
               </a:ext>
             </a:extLst>
           </p:cNvPr>
@@ -8119,7 +8119,7 @@
           <p:cNvPr id="3" name="">
             <a:extLst xmlns:a="http://schemas.openxmlformats.org/drawingml/2006/main">
               <a:ext uri="{FF2B5EF4-FFF2-40B4-BE49-F238E27FC236}">
-                <a16:creationId xmlns:a16="http://schemas.microsoft.com/office/drawing/2014/main" id="{C19CBDAD-9166-42FF-B657-8CC049416082}"/>
+                <a16:creationId xmlns:a16="http://schemas.microsoft.com/office/drawing/2014/main" id="{043356B1-2484-4D9A-9DA1-2F8E78773C0A}"/>
               </a:ext>
             </a:extLst>
           </p:cNvPr>
@@ -8181,7 +8181,7 @@
           <p:cNvPr id="4" name="">
             <a:extLst xmlns:a="http://schemas.openxmlformats.org/drawingml/2006/main">
               <a:ext uri="{FF2B5EF4-FFF2-40B4-BE49-F238E27FC236}">
-                <a16:creationId xmlns:a16="http://schemas.microsoft.com/office/drawing/2014/main" id="{64376C80-C723-4904-8BD6-47AF0983A46C}"/>
+                <a16:creationId xmlns:a16="http://schemas.microsoft.com/office/drawing/2014/main" id="{78CA7D99-520B-4C82-A44F-B645DF074F1B}"/>
               </a:ext>
             </a:extLst>
           </p:cNvPr>
@@ -8243,7 +8243,7 @@
           <p:cNvPr id="5" name="">
             <a:extLst xmlns:a="http://schemas.openxmlformats.org/drawingml/2006/main">
               <a:ext uri="{FF2B5EF4-FFF2-40B4-BE49-F238E27FC236}">
-                <a16:creationId xmlns:a16="http://schemas.microsoft.com/office/drawing/2014/main" id="{CF6C61A1-3DCD-4D1D-839B-C3DBADADB5CC}"/>
+                <a16:creationId xmlns:a16="http://schemas.microsoft.com/office/drawing/2014/main" id="{BA2F178C-405B-4543-8F16-55D001EAAA4D}"/>
               </a:ext>
             </a:extLst>
           </p:cNvPr>
@@ -8274,7 +8274,7 @@
           <p:cNvPr id="6" name="">
             <a:extLst xmlns:a="http://schemas.openxmlformats.org/drawingml/2006/main">
               <a:ext uri="{FF2B5EF4-FFF2-40B4-BE49-F238E27FC236}">
-                <a16:creationId xmlns:a16="http://schemas.microsoft.com/office/drawing/2014/main" id="{C2D7699B-0FB5-4590-B779-A94F35F667AF}"/>
+                <a16:creationId xmlns:a16="http://schemas.microsoft.com/office/drawing/2014/main" id="{5B67B2E0-3C3B-43CF-BA6E-4CBCFB2E1B02}"/>
               </a:ext>
             </a:extLst>
           </p:cNvPr>
@@ -8336,7 +8336,7 @@
           <p:cNvPr id="7" name="">
             <a:extLst xmlns:a="http://schemas.openxmlformats.org/drawingml/2006/main">
               <a:ext uri="{FF2B5EF4-FFF2-40B4-BE49-F238E27FC236}">
-                <a16:creationId xmlns:a16="http://schemas.microsoft.com/office/drawing/2014/main" id="{74FFB91F-7687-455A-A3AC-7460AB292D6E}"/>
+                <a16:creationId xmlns:a16="http://schemas.microsoft.com/office/drawing/2014/main" id="{ABFBFB57-B5C2-4503-A421-D570D7C8AF49}"/>
               </a:ext>
             </a:extLst>
           </p:cNvPr>
@@ -8369,7 +8369,7 @@
           <p:cNvPr id="8" name="">
             <a:extLst xmlns:a="http://schemas.openxmlformats.org/drawingml/2006/main">
               <a:ext uri="{FF2B5EF4-FFF2-40B4-BE49-F238E27FC236}">
-                <a16:creationId xmlns:a16="http://schemas.microsoft.com/office/drawing/2014/main" id="{7375356D-E714-459F-B317-45157CA9412B}"/>
+                <a16:creationId xmlns:a16="http://schemas.microsoft.com/office/drawing/2014/main" id="{21118D03-D052-41EB-BD4A-69206349EFCB}"/>
               </a:ext>
             </a:extLst>
           </p:cNvPr>
@@ -8404,7 +8404,7 @@
           <p:cNvPr id="9" name="">
             <a:extLst xmlns:a="http://schemas.openxmlformats.org/drawingml/2006/main">
               <a:ext uri="{FF2B5EF4-FFF2-40B4-BE49-F238E27FC236}">
-                <a16:creationId xmlns:a16="http://schemas.microsoft.com/office/drawing/2014/main" id="{C6705E9F-0FC2-427A-99A2-41BECD279C9C}"/>
+                <a16:creationId xmlns:a16="http://schemas.microsoft.com/office/drawing/2014/main" id="{D8B96813-9465-4E89-8151-6A54367510BF}"/>
               </a:ext>
             </a:extLst>
           </p:cNvPr>
@@ -8435,7 +8435,7 @@
           <p:cNvPr id="10" name="">
             <a:extLst xmlns:a="http://schemas.openxmlformats.org/drawingml/2006/main">
               <a:ext uri="{FF2B5EF4-FFF2-40B4-BE49-F238E27FC236}">
-                <a16:creationId xmlns:a16="http://schemas.microsoft.com/office/drawing/2014/main" id="{B4B866C6-3F11-486A-89A6-5EC5F0A60244}"/>
+                <a16:creationId xmlns:a16="http://schemas.microsoft.com/office/drawing/2014/main" id="{EF42BD76-DD61-45E5-AA50-7525B4A11AC7}"/>
               </a:ext>
             </a:extLst>
           </p:cNvPr>
@@ -8497,7 +8497,7 @@
           <p:cNvPr id="11" name="">
             <a:extLst xmlns:a="http://schemas.openxmlformats.org/drawingml/2006/main">
               <a:ext uri="{FF2B5EF4-FFF2-40B4-BE49-F238E27FC236}">
-                <a16:creationId xmlns:a16="http://schemas.microsoft.com/office/drawing/2014/main" id="{0E575007-FEA1-45C2-86BC-5FE39B9207B4}"/>
+                <a16:creationId xmlns:a16="http://schemas.microsoft.com/office/drawing/2014/main" id="{5802D7B7-FAA1-4220-8FD5-99823EAEBAC1}"/>
               </a:ext>
             </a:extLst>
           </p:cNvPr>
@@ -8559,7 +8559,7 @@
           <p:cNvPr id="12" name="">
             <a:extLst xmlns:a="http://schemas.openxmlformats.org/drawingml/2006/main">
               <a:ext uri="{FF2B5EF4-FFF2-40B4-BE49-F238E27FC236}">
-                <a16:creationId xmlns:a16="http://schemas.microsoft.com/office/drawing/2014/main" id="{03B5ECD1-D37B-4046-A9BF-4EED717FB552}"/>
+                <a16:creationId xmlns:a16="http://schemas.microsoft.com/office/drawing/2014/main" id="{24BAF403-7543-4CC5-8F36-A6794A8E0AB1}"/>
               </a:ext>
             </a:extLst>
           </p:cNvPr>
@@ -8592,7 +8592,7 @@
           <p:cNvPr id="13" name="">
             <a:extLst xmlns:a="http://schemas.openxmlformats.org/drawingml/2006/main">
               <a:ext uri="{FF2B5EF4-FFF2-40B4-BE49-F238E27FC236}">
-                <a16:creationId xmlns:a16="http://schemas.microsoft.com/office/drawing/2014/main" id="{78628661-0384-46A7-90D9-1FBD9787D53F}"/>
+                <a16:creationId xmlns:a16="http://schemas.microsoft.com/office/drawing/2014/main" id="{48153C95-E699-4357-B33F-8F31EA87644B}"/>
               </a:ext>
             </a:extLst>
           </p:cNvPr>
@@ -8627,7 +8627,7 @@
           <p:cNvPr id="14" name="">
             <a:extLst xmlns:a="http://schemas.openxmlformats.org/drawingml/2006/main">
               <a:ext uri="{FF2B5EF4-FFF2-40B4-BE49-F238E27FC236}">
-                <a16:creationId xmlns:a16="http://schemas.microsoft.com/office/drawing/2014/main" id="{304C9AC5-971A-4BDC-827F-DBFD159298CD}"/>
+                <a16:creationId xmlns:a16="http://schemas.microsoft.com/office/drawing/2014/main" id="{DE8640B3-0691-4FAC-AD4B-636C11F9A869}"/>
               </a:ext>
             </a:extLst>
           </p:cNvPr>
@@ -8658,7 +8658,7 @@
           <p:cNvPr id="15" name="">
             <a:extLst xmlns:a="http://schemas.openxmlformats.org/drawingml/2006/main">
               <a:ext uri="{FF2B5EF4-FFF2-40B4-BE49-F238E27FC236}">
-                <a16:creationId xmlns:a16="http://schemas.microsoft.com/office/drawing/2014/main" id="{B229780B-C11F-47CF-901B-7597DE4FEDD8}"/>
+                <a16:creationId xmlns:a16="http://schemas.microsoft.com/office/drawing/2014/main" id="{45D57DF0-CDF6-46B1-9CAB-5C755DA8AADE}"/>
               </a:ext>
             </a:extLst>
           </p:cNvPr>
@@ -8720,7 +8720,7 @@
           <p:cNvPr id="16" name="">
             <a:extLst xmlns:a="http://schemas.openxmlformats.org/drawingml/2006/main">
               <a:ext uri="{FF2B5EF4-FFF2-40B4-BE49-F238E27FC236}">
-                <a16:creationId xmlns:a16="http://schemas.microsoft.com/office/drawing/2014/main" id="{0C413042-D6D6-4524-8A87-77F4CD7A251D}"/>
+                <a16:creationId xmlns:a16="http://schemas.microsoft.com/office/drawing/2014/main" id="{A9C6D8D3-77B0-47FC-906F-F43F81052B0D}"/>
               </a:ext>
             </a:extLst>
           </p:cNvPr>
@@ -8782,7 +8782,7 @@
           <p:cNvPr id="17" name="">
             <a:extLst xmlns:a="http://schemas.openxmlformats.org/drawingml/2006/main">
               <a:ext uri="{FF2B5EF4-FFF2-40B4-BE49-F238E27FC236}">
-                <a16:creationId xmlns:a16="http://schemas.microsoft.com/office/drawing/2014/main" id="{485781C7-ACC9-4057-885C-3D18FD991CF3}"/>
+                <a16:creationId xmlns:a16="http://schemas.microsoft.com/office/drawing/2014/main" id="{92F2D60E-32FA-4C37-8BB7-88FF98934753}"/>
               </a:ext>
             </a:extLst>
           </p:cNvPr>
@@ -8844,7 +8844,7 @@
           <p:cNvPr id="18" name="">
             <a:extLst xmlns:a="http://schemas.openxmlformats.org/drawingml/2006/main">
               <a:ext uri="{FF2B5EF4-FFF2-40B4-BE49-F238E27FC236}">
-                <a16:creationId xmlns:a16="http://schemas.microsoft.com/office/drawing/2014/main" id="{7E49C3DA-0E83-445B-AB0F-ED68299A7478}"/>
+                <a16:creationId xmlns:a16="http://schemas.microsoft.com/office/drawing/2014/main" id="{A2A436EA-9D28-473D-938C-19FFFBADD407}"/>
               </a:ext>
             </a:extLst>
           </p:cNvPr>
@@ -8904,7 +8904,7 @@
     </p:spTree>
     <p:extLst>
       <p:ext uri="{BB962C8B-B14F-4D97-AF65-F5344CB8AC3E}">
-        <p14:creationId xmlns:p14="http://schemas.microsoft.com/office/powerpoint/2010/main" val="1137006715"/>
+        <p14:creationId xmlns:p14="http://schemas.microsoft.com/office/powerpoint/2010/main" val="2136227416"/>
       </p:ext>
     </p:extLst>
   </p:cSld>
@@ -8932,7 +8932,7 @@
           <p:nvPr/>
         </p:nvPicPr>
         <p:blipFill>
-          <a:blip xmlns:r="http://schemas.openxmlformats.org/officeDocument/2006/relationships" xmlns:a="http://schemas.openxmlformats.org/drawingml/2006/main" r:embed="R983601a21bce4079"/>
+          <a:blip xmlns:r="http://schemas.openxmlformats.org/officeDocument/2006/relationships" xmlns:a="http://schemas.openxmlformats.org/drawingml/2006/main" r:embed="R9010d7cf4caf45e7"/>
           <a:srcRect xmlns:a="http://schemas.openxmlformats.org/drawingml/2006/main" l="0" t="0" r="0" b="0"/>
           <a:stretch xmlns:a="http://schemas.openxmlformats.org/drawingml/2006/main">
             <a:fillRect l="0" t="0" r="0" b="0"/>
@@ -8953,7 +8953,7 @@
           <p:cNvPr id="2" name="">
             <a:extLst xmlns:a="http://schemas.openxmlformats.org/drawingml/2006/main">
               <a:ext uri="{FF2B5EF4-FFF2-40B4-BE49-F238E27FC236}">
-                <a16:creationId xmlns:a16="http://schemas.microsoft.com/office/drawing/2014/main" id="{E887D527-62C6-4C07-832F-B345342D6336}"/>
+                <a16:creationId xmlns:a16="http://schemas.microsoft.com/office/drawing/2014/main" id="{0F466C29-DBA7-4D45-AE6B-7E191B60FA3F}"/>
               </a:ext>
             </a:extLst>
           </p:cNvPr>
@@ -9015,7 +9015,7 @@
           <p:cNvPr id="3" name="">
             <a:extLst xmlns:a="http://schemas.openxmlformats.org/drawingml/2006/main">
               <a:ext uri="{FF2B5EF4-FFF2-40B4-BE49-F238E27FC236}">
-                <a16:creationId xmlns:a16="http://schemas.microsoft.com/office/drawing/2014/main" id="{E03EB387-8774-4D8F-B6D2-B0B11226DE64}"/>
+                <a16:creationId xmlns:a16="http://schemas.microsoft.com/office/drawing/2014/main" id="{07678136-DA86-4301-9F7B-55C7E2E650A6}"/>
               </a:ext>
             </a:extLst>
           </p:cNvPr>
@@ -9077,7 +9077,7 @@
           <p:cNvPr id="4" name="">
             <a:extLst xmlns:a="http://schemas.openxmlformats.org/drawingml/2006/main">
               <a:ext uri="{FF2B5EF4-FFF2-40B4-BE49-F238E27FC236}">
-                <a16:creationId xmlns:a16="http://schemas.microsoft.com/office/drawing/2014/main" id="{735220EF-CE78-4612-8A14-FEFF9BD09AA7}"/>
+                <a16:creationId xmlns:a16="http://schemas.microsoft.com/office/drawing/2014/main" id="{2253BFFE-5B9F-4038-A405-A8CA7853FD09}"/>
               </a:ext>
             </a:extLst>
           </p:cNvPr>
@@ -9139,7 +9139,7 @@
           <p:cNvPr id="5" name="">
             <a:extLst xmlns:a="http://schemas.openxmlformats.org/drawingml/2006/main">
               <a:ext uri="{FF2B5EF4-FFF2-40B4-BE49-F238E27FC236}">
-                <a16:creationId xmlns:a16="http://schemas.microsoft.com/office/drawing/2014/main" id="{16586A13-673A-4A31-984F-A8F9BA4375AF}"/>
+                <a16:creationId xmlns:a16="http://schemas.microsoft.com/office/drawing/2014/main" id="{E7F97413-D949-4669-A401-180846549A04}"/>
               </a:ext>
             </a:extLst>
           </p:cNvPr>
@@ -9170,7 +9170,7 @@
           <p:cNvPr id="6" name="">
             <a:extLst xmlns:a="http://schemas.openxmlformats.org/drawingml/2006/main">
               <a:ext uri="{FF2B5EF4-FFF2-40B4-BE49-F238E27FC236}">
-                <a16:creationId xmlns:a16="http://schemas.microsoft.com/office/drawing/2014/main" id="{4CE61CE5-6089-4047-96AD-0F9158D71800}"/>
+                <a16:creationId xmlns:a16="http://schemas.microsoft.com/office/drawing/2014/main" id="{5C01D70A-6B7D-48C2-B25A-FC9AF25863BD}"/>
               </a:ext>
             </a:extLst>
           </p:cNvPr>
@@ -9232,7 +9232,7 @@
           <p:cNvPr id="7" name="">
             <a:extLst xmlns:a="http://schemas.openxmlformats.org/drawingml/2006/main">
               <a:ext uri="{FF2B5EF4-FFF2-40B4-BE49-F238E27FC236}">
-                <a16:creationId xmlns:a16="http://schemas.microsoft.com/office/drawing/2014/main" id="{F489EEB1-F7D0-420F-A5C8-E641107426FB}"/>
+                <a16:creationId xmlns:a16="http://schemas.microsoft.com/office/drawing/2014/main" id="{155BC33F-4980-4F45-A386-5D68E21C42D4}"/>
               </a:ext>
             </a:extLst>
           </p:cNvPr>
@@ -9265,7 +9265,7 @@
           <p:cNvPr id="8" name="">
             <a:extLst xmlns:a="http://schemas.openxmlformats.org/drawingml/2006/main">
               <a:ext uri="{FF2B5EF4-FFF2-40B4-BE49-F238E27FC236}">
-                <a16:creationId xmlns:a16="http://schemas.microsoft.com/office/drawing/2014/main" id="{0A3D30F1-8C9A-453D-9CF3-23D39CCA03CA}"/>
+                <a16:creationId xmlns:a16="http://schemas.microsoft.com/office/drawing/2014/main" id="{D925B0E0-435E-4AC1-ADB5-5F2D8147395B}"/>
               </a:ext>
             </a:extLst>
           </p:cNvPr>
@@ -9300,7 +9300,7 @@
           <p:cNvPr id="9" name="">
             <a:extLst xmlns:a="http://schemas.openxmlformats.org/drawingml/2006/main">
               <a:ext uri="{FF2B5EF4-FFF2-40B4-BE49-F238E27FC236}">
-                <a16:creationId xmlns:a16="http://schemas.microsoft.com/office/drawing/2014/main" id="{FBC8202B-7986-4E59-A0E5-158D616B6EB5}"/>
+                <a16:creationId xmlns:a16="http://schemas.microsoft.com/office/drawing/2014/main" id="{BEC7EB03-8015-4B2F-8730-402CA0F73563}"/>
               </a:ext>
             </a:extLst>
           </p:cNvPr>
@@ -9331,7 +9331,7 @@
           <p:cNvPr id="10" name="">
             <a:extLst xmlns:a="http://schemas.openxmlformats.org/drawingml/2006/main">
               <a:ext uri="{FF2B5EF4-FFF2-40B4-BE49-F238E27FC236}">
-                <a16:creationId xmlns:a16="http://schemas.microsoft.com/office/drawing/2014/main" id="{6084E34C-B3E5-4F1D-959A-617E10F16830}"/>
+                <a16:creationId xmlns:a16="http://schemas.microsoft.com/office/drawing/2014/main" id="{DC9BDFE8-2D45-4FD4-B199-386E4295C051}"/>
               </a:ext>
             </a:extLst>
           </p:cNvPr>
@@ -9393,7 +9393,7 @@
           <p:cNvPr id="11" name="">
             <a:extLst xmlns:a="http://schemas.openxmlformats.org/drawingml/2006/main">
               <a:ext uri="{FF2B5EF4-FFF2-40B4-BE49-F238E27FC236}">
-                <a16:creationId xmlns:a16="http://schemas.microsoft.com/office/drawing/2014/main" id="{20541796-532A-415B-8CB8-0DCF7BAFDEDA}"/>
+                <a16:creationId xmlns:a16="http://schemas.microsoft.com/office/drawing/2014/main" id="{BBDA71DF-DA96-44AB-80A7-2E83E8CAC8EF}"/>
               </a:ext>
             </a:extLst>
           </p:cNvPr>
@@ -9455,7 +9455,7 @@
           <p:cNvPr id="12" name="">
             <a:extLst xmlns:a="http://schemas.openxmlformats.org/drawingml/2006/main">
               <a:ext uri="{FF2B5EF4-FFF2-40B4-BE49-F238E27FC236}">
-                <a16:creationId xmlns:a16="http://schemas.microsoft.com/office/drawing/2014/main" id="{76B5231F-9D56-4597-AF96-EEDF48E923B3}"/>
+                <a16:creationId xmlns:a16="http://schemas.microsoft.com/office/drawing/2014/main" id="{EECF8F7D-FAB8-4EE9-A4A3-F09A4C4FAC05}"/>
               </a:ext>
             </a:extLst>
           </p:cNvPr>
@@ -9517,7 +9517,7 @@
           <p:cNvPr id="13" name="">
             <a:extLst xmlns:a="http://schemas.openxmlformats.org/drawingml/2006/main">
               <a:ext uri="{FF2B5EF4-FFF2-40B4-BE49-F238E27FC236}">
-                <a16:creationId xmlns:a16="http://schemas.microsoft.com/office/drawing/2014/main" id="{D83E9AEE-04DE-4D29-8ADA-0B49CE5FF1FE}"/>
+                <a16:creationId xmlns:a16="http://schemas.microsoft.com/office/drawing/2014/main" id="{1598AEB4-6B2E-4F6A-80CD-40D740D9AFA3}"/>
               </a:ext>
             </a:extLst>
           </p:cNvPr>
@@ -9550,7 +9550,7 @@
           <p:cNvPr id="14" name="">
             <a:extLst xmlns:a="http://schemas.openxmlformats.org/drawingml/2006/main">
               <a:ext uri="{FF2B5EF4-FFF2-40B4-BE49-F238E27FC236}">
-                <a16:creationId xmlns:a16="http://schemas.microsoft.com/office/drawing/2014/main" id="{14CD29DC-A6C1-42B8-A43F-ED1AB9623108}"/>
+                <a16:creationId xmlns:a16="http://schemas.microsoft.com/office/drawing/2014/main" id="{3D7D1540-3E23-4375-B303-0EBBBB9B233C}"/>
               </a:ext>
             </a:extLst>
           </p:cNvPr>
@@ -9585,7 +9585,7 @@
           <p:cNvPr id="15" name="">
             <a:extLst xmlns:a="http://schemas.openxmlformats.org/drawingml/2006/main">
               <a:ext uri="{FF2B5EF4-FFF2-40B4-BE49-F238E27FC236}">
-                <a16:creationId xmlns:a16="http://schemas.microsoft.com/office/drawing/2014/main" id="{121D01D9-A619-4F8E-82B9-4BE0D429BD03}"/>
+                <a16:creationId xmlns:a16="http://schemas.microsoft.com/office/drawing/2014/main" id="{E405EE24-FB07-4BF1-A1CB-F6526E06A37E}"/>
               </a:ext>
             </a:extLst>
           </p:cNvPr>
@@ -9616,7 +9616,7 @@
           <p:cNvPr id="16" name="">
             <a:extLst xmlns:a="http://schemas.openxmlformats.org/drawingml/2006/main">
               <a:ext uri="{FF2B5EF4-FFF2-40B4-BE49-F238E27FC236}">
-                <a16:creationId xmlns:a16="http://schemas.microsoft.com/office/drawing/2014/main" id="{CAA8DE95-BA24-445A-8F8A-7EC8BC60F017}"/>
+                <a16:creationId xmlns:a16="http://schemas.microsoft.com/office/drawing/2014/main" id="{4DF25059-FF45-4DCC-AB02-7B2D87AEF151}"/>
               </a:ext>
             </a:extLst>
           </p:cNvPr>
@@ -9678,7 +9678,7 @@
           <p:cNvPr id="17" name="">
             <a:extLst xmlns:a="http://schemas.openxmlformats.org/drawingml/2006/main">
               <a:ext uri="{FF2B5EF4-FFF2-40B4-BE49-F238E27FC236}">
-                <a16:creationId xmlns:a16="http://schemas.microsoft.com/office/drawing/2014/main" id="{214DC0BC-340A-4F5D-943F-3AF4A085B5E1}"/>
+                <a16:creationId xmlns:a16="http://schemas.microsoft.com/office/drawing/2014/main" id="{DE7C5023-5551-488D-8522-A0813BAE9C4C}"/>
               </a:ext>
             </a:extLst>
           </p:cNvPr>
@@ -9740,7 +9740,7 @@
           <p:cNvPr id="18" name="">
             <a:extLst xmlns:a="http://schemas.openxmlformats.org/drawingml/2006/main">
               <a:ext uri="{FF2B5EF4-FFF2-40B4-BE49-F238E27FC236}">
-                <a16:creationId xmlns:a16="http://schemas.microsoft.com/office/drawing/2014/main" id="{84C3EEDB-DEED-41E2-8592-F9CE42819D13}"/>
+                <a16:creationId xmlns:a16="http://schemas.microsoft.com/office/drawing/2014/main" id="{32BE9CE9-4FAF-4676-8F90-DB8D4EBD1597}"/>
               </a:ext>
             </a:extLst>
           </p:cNvPr>
@@ -9802,7 +9802,7 @@
           <p:cNvPr id="19" name="">
             <a:extLst xmlns:a="http://schemas.openxmlformats.org/drawingml/2006/main">
               <a:ext uri="{FF2B5EF4-FFF2-40B4-BE49-F238E27FC236}">
-                <a16:creationId xmlns:a16="http://schemas.microsoft.com/office/drawing/2014/main" id="{2F5B75E5-34F5-4D17-8364-AC4B265BF263}"/>
+                <a16:creationId xmlns:a16="http://schemas.microsoft.com/office/drawing/2014/main" id="{4775D76F-F469-4514-9936-DC66477BBD0E}"/>
               </a:ext>
             </a:extLst>
           </p:cNvPr>
@@ -9835,7 +9835,7 @@
           <p:cNvPr id="20" name="">
             <a:extLst xmlns:a="http://schemas.openxmlformats.org/drawingml/2006/main">
               <a:ext uri="{FF2B5EF4-FFF2-40B4-BE49-F238E27FC236}">
-                <a16:creationId xmlns:a16="http://schemas.microsoft.com/office/drawing/2014/main" id="{DF76A218-140C-495D-8379-A89195B4EDFF}"/>
+                <a16:creationId xmlns:a16="http://schemas.microsoft.com/office/drawing/2014/main" id="{78B1CCF3-0107-41AC-AE8D-9166B8BE86CF}"/>
               </a:ext>
             </a:extLst>
           </p:cNvPr>
@@ -9870,7 +9870,7 @@
           <p:cNvPr id="21" name="">
             <a:extLst xmlns:a="http://schemas.openxmlformats.org/drawingml/2006/main">
               <a:ext uri="{FF2B5EF4-FFF2-40B4-BE49-F238E27FC236}">
-                <a16:creationId xmlns:a16="http://schemas.microsoft.com/office/drawing/2014/main" id="{99F665CB-333E-4B09-83F8-5E48A01A6BF1}"/>
+                <a16:creationId xmlns:a16="http://schemas.microsoft.com/office/drawing/2014/main" id="{BFE4D6DF-DCB5-460C-A1DF-1A72CA0D008F}"/>
               </a:ext>
             </a:extLst>
           </p:cNvPr>
@@ -9901,7 +9901,7 @@
           <p:cNvPr id="22" name="">
             <a:extLst xmlns:a="http://schemas.openxmlformats.org/drawingml/2006/main">
               <a:ext uri="{FF2B5EF4-FFF2-40B4-BE49-F238E27FC236}">
-                <a16:creationId xmlns:a16="http://schemas.microsoft.com/office/drawing/2014/main" id="{E5646D26-E1F2-42F2-9859-AF872B35302B}"/>
+                <a16:creationId xmlns:a16="http://schemas.microsoft.com/office/drawing/2014/main" id="{A5F26C81-594F-416D-8246-E0ADE16586B6}"/>
               </a:ext>
             </a:extLst>
           </p:cNvPr>
@@ -9963,7 +9963,7 @@
           <p:cNvPr id="23" name="">
             <a:extLst xmlns:a="http://schemas.openxmlformats.org/drawingml/2006/main">
               <a:ext uri="{FF2B5EF4-FFF2-40B4-BE49-F238E27FC236}">
-                <a16:creationId xmlns:a16="http://schemas.microsoft.com/office/drawing/2014/main" id="{01981840-2AAA-4C76-A7B0-3D3D7FE28AC6}"/>
+                <a16:creationId xmlns:a16="http://schemas.microsoft.com/office/drawing/2014/main" id="{B549288F-FF7C-460F-998D-2BDBEDAF1F70}"/>
               </a:ext>
             </a:extLst>
           </p:cNvPr>
@@ -10025,7 +10025,7 @@
           <p:cNvPr id="24" name="">
             <a:extLst xmlns:a="http://schemas.openxmlformats.org/drawingml/2006/main">
               <a:ext uri="{FF2B5EF4-FFF2-40B4-BE49-F238E27FC236}">
-                <a16:creationId xmlns:a16="http://schemas.microsoft.com/office/drawing/2014/main" id="{FD2ED1B6-7C70-4D98-B31A-BFA314F63ADA}"/>
+                <a16:creationId xmlns:a16="http://schemas.microsoft.com/office/drawing/2014/main" id="{2C5004A1-A4D7-4E1E-8665-CCA2666E550D}"/>
               </a:ext>
             </a:extLst>
           </p:cNvPr>
@@ -10087,7 +10087,7 @@
           <p:cNvPr id="25" name="">
             <a:extLst xmlns:a="http://schemas.openxmlformats.org/drawingml/2006/main">
               <a:ext uri="{FF2B5EF4-FFF2-40B4-BE49-F238E27FC236}">
-                <a16:creationId xmlns:a16="http://schemas.microsoft.com/office/drawing/2014/main" id="{18391719-F09A-46FA-A545-C5541EE108EA}"/>
+                <a16:creationId xmlns:a16="http://schemas.microsoft.com/office/drawing/2014/main" id="{5D2C6099-DF69-4762-A79C-E28F31F83A32}"/>
               </a:ext>
             </a:extLst>
           </p:cNvPr>
@@ -10120,7 +10120,7 @@
           <p:cNvPr id="26" name="">
             <a:extLst xmlns:a="http://schemas.openxmlformats.org/drawingml/2006/main">
               <a:ext uri="{FF2B5EF4-FFF2-40B4-BE49-F238E27FC236}">
-                <a16:creationId xmlns:a16="http://schemas.microsoft.com/office/drawing/2014/main" id="{47C395EE-CA23-4E95-A04A-DE184F46D013}"/>
+                <a16:creationId xmlns:a16="http://schemas.microsoft.com/office/drawing/2014/main" id="{BE405D50-F58D-43C9-B26A-2862FD6CA934}"/>
               </a:ext>
             </a:extLst>
           </p:cNvPr>
@@ -10155,7 +10155,7 @@
           <p:cNvPr id="27" name="">
             <a:extLst xmlns:a="http://schemas.openxmlformats.org/drawingml/2006/main">
               <a:ext uri="{FF2B5EF4-FFF2-40B4-BE49-F238E27FC236}">
-                <a16:creationId xmlns:a16="http://schemas.microsoft.com/office/drawing/2014/main" id="{C648DEBF-B654-442E-B2D1-088DEB1D7B98}"/>
+                <a16:creationId xmlns:a16="http://schemas.microsoft.com/office/drawing/2014/main" id="{D56AF5AB-8494-4A2F-8A10-9D06F38C38A0}"/>
               </a:ext>
             </a:extLst>
           </p:cNvPr>
@@ -10186,7 +10186,7 @@
           <p:cNvPr id="28" name="">
             <a:extLst xmlns:a="http://schemas.openxmlformats.org/drawingml/2006/main">
               <a:ext uri="{FF2B5EF4-FFF2-40B4-BE49-F238E27FC236}">
-                <a16:creationId xmlns:a16="http://schemas.microsoft.com/office/drawing/2014/main" id="{B111C13D-A59A-4291-B7C4-08715D7471DC}"/>
+                <a16:creationId xmlns:a16="http://schemas.microsoft.com/office/drawing/2014/main" id="{00032BFD-EADB-42F5-921A-DCC7019B2B5F}"/>
               </a:ext>
             </a:extLst>
           </p:cNvPr>
@@ -10248,7 +10248,7 @@
           <p:cNvPr id="29" name="">
             <a:extLst xmlns:a="http://schemas.openxmlformats.org/drawingml/2006/main">
               <a:ext uri="{FF2B5EF4-FFF2-40B4-BE49-F238E27FC236}">
-                <a16:creationId xmlns:a16="http://schemas.microsoft.com/office/drawing/2014/main" id="{9A453D37-54E2-4299-BEB3-5CCA9407D5C7}"/>
+                <a16:creationId xmlns:a16="http://schemas.microsoft.com/office/drawing/2014/main" id="{3C5E045C-BB0D-4A9D-92E9-A0DB1BEDF7C8}"/>
               </a:ext>
             </a:extLst>
           </p:cNvPr>
@@ -10310,7 +10310,7 @@
           <p:cNvPr id="30" name="">
             <a:extLst xmlns:a="http://schemas.openxmlformats.org/drawingml/2006/main">
               <a:ext uri="{FF2B5EF4-FFF2-40B4-BE49-F238E27FC236}">
-                <a16:creationId xmlns:a16="http://schemas.microsoft.com/office/drawing/2014/main" id="{7B7A0E70-C390-4254-9CB9-77FC44BAF221}"/>
+                <a16:creationId xmlns:a16="http://schemas.microsoft.com/office/drawing/2014/main" id="{B78934C5-D868-49E2-BBA7-C0A8AE74D886}"/>
               </a:ext>
             </a:extLst>
           </p:cNvPr>
@@ -10372,7 +10372,7 @@
           <p:cNvPr id="31" name="">
             <a:extLst xmlns:a="http://schemas.openxmlformats.org/drawingml/2006/main">
               <a:ext uri="{FF2B5EF4-FFF2-40B4-BE49-F238E27FC236}">
-                <a16:creationId xmlns:a16="http://schemas.microsoft.com/office/drawing/2014/main" id="{B8A93E1F-28B7-4E0C-91C4-57A46F704C62}"/>
+                <a16:creationId xmlns:a16="http://schemas.microsoft.com/office/drawing/2014/main" id="{25F5D65C-3023-40D2-A5C7-F867473B58B4}"/>
               </a:ext>
             </a:extLst>
           </p:cNvPr>
@@ -10434,7 +10434,7 @@
           <p:cNvPr id="32" name="">
             <a:extLst xmlns:a="http://schemas.openxmlformats.org/drawingml/2006/main">
               <a:ext uri="{FF2B5EF4-FFF2-40B4-BE49-F238E27FC236}">
-                <a16:creationId xmlns:a16="http://schemas.microsoft.com/office/drawing/2014/main" id="{6D06D618-EA95-456D-94F5-93674460B473}"/>
+                <a16:creationId xmlns:a16="http://schemas.microsoft.com/office/drawing/2014/main" id="{6ABEFB5E-214E-49B2-B443-29CB9CE143AF}"/>
               </a:ext>
             </a:extLst>
           </p:cNvPr>
@@ -10494,7 +10494,7 @@
     </p:spTree>
     <p:extLst>
       <p:ext uri="{BB962C8B-B14F-4D97-AF65-F5344CB8AC3E}">
-        <p14:creationId xmlns:p14="http://schemas.microsoft.com/office/powerpoint/2010/main" val="843018470"/>
+        <p14:creationId xmlns:p14="http://schemas.microsoft.com/office/powerpoint/2010/main" val="673138924"/>
       </p:ext>
     </p:extLst>
   </p:cSld>
@@ -10522,7 +10522,7 @@
           <p:nvPr/>
         </p:nvPicPr>
         <p:blipFill>
-          <a:blip xmlns:r="http://schemas.openxmlformats.org/officeDocument/2006/relationships" xmlns:a="http://schemas.openxmlformats.org/drawingml/2006/main" r:embed="R2f15c69986a94df1"/>
+          <a:blip xmlns:r="http://schemas.openxmlformats.org/officeDocument/2006/relationships" xmlns:a="http://schemas.openxmlformats.org/drawingml/2006/main" r:embed="R0d8a8e73bbdf4e7f"/>
           <a:srcRect xmlns:a="http://schemas.openxmlformats.org/drawingml/2006/main" l="0" t="0" r="0" b="0"/>
           <a:stretch xmlns:a="http://schemas.openxmlformats.org/drawingml/2006/main">
             <a:fillRect l="0" t="0" r="0" b="0"/>
@@ -10543,7 +10543,7 @@
           <p:cNvPr id="2" name="">
             <a:extLst xmlns:a="http://schemas.openxmlformats.org/drawingml/2006/main">
               <a:ext uri="{FF2B5EF4-FFF2-40B4-BE49-F238E27FC236}">
-                <a16:creationId xmlns:a16="http://schemas.microsoft.com/office/drawing/2014/main" id="{5B221F13-FD42-4DA7-9CFD-956C0BBF90C5}"/>
+                <a16:creationId xmlns:a16="http://schemas.microsoft.com/office/drawing/2014/main" id="{B259B413-292E-4A51-A714-7DCFCEC4D256}"/>
               </a:ext>
             </a:extLst>
           </p:cNvPr>
@@ -10605,7 +10605,7 @@
           <p:cNvPr id="3" name="">
             <a:extLst xmlns:a="http://schemas.openxmlformats.org/drawingml/2006/main">
               <a:ext uri="{FF2B5EF4-FFF2-40B4-BE49-F238E27FC236}">
-                <a16:creationId xmlns:a16="http://schemas.microsoft.com/office/drawing/2014/main" id="{2A2CE1D4-9B32-42F2-BAB9-5E4D53FC438A}"/>
+                <a16:creationId xmlns:a16="http://schemas.microsoft.com/office/drawing/2014/main" id="{0C24BEFA-E8C1-4C33-8B23-7E27A3ED81BF}"/>
               </a:ext>
             </a:extLst>
           </p:cNvPr>
@@ -10667,7 +10667,7 @@
           <p:cNvPr id="4" name="">
             <a:extLst xmlns:a="http://schemas.openxmlformats.org/drawingml/2006/main">
               <a:ext uri="{FF2B5EF4-FFF2-40B4-BE49-F238E27FC236}">
-                <a16:creationId xmlns:a16="http://schemas.microsoft.com/office/drawing/2014/main" id="{9016D5BB-CD51-4E36-9BE6-00520AC5A92E}"/>
+                <a16:creationId xmlns:a16="http://schemas.microsoft.com/office/drawing/2014/main" id="{F1038194-A491-4539-B868-5F6C681B9182}"/>
               </a:ext>
             </a:extLst>
           </p:cNvPr>
@@ -10729,7 +10729,7 @@
           <p:cNvPr id="5" name="">
             <a:extLst xmlns:a="http://schemas.openxmlformats.org/drawingml/2006/main">
               <a:ext uri="{FF2B5EF4-FFF2-40B4-BE49-F238E27FC236}">
-                <a16:creationId xmlns:a16="http://schemas.microsoft.com/office/drawing/2014/main" id="{9AB54350-C357-419A-9B03-36A580932955}"/>
+                <a16:creationId xmlns:a16="http://schemas.microsoft.com/office/drawing/2014/main" id="{C6DA02F0-D74F-458E-BAF6-13ED4017D283}"/>
               </a:ext>
             </a:extLst>
           </p:cNvPr>
@@ -10760,7 +10760,7 @@
           <p:cNvPr id="6" name="">
             <a:extLst xmlns:a="http://schemas.openxmlformats.org/drawingml/2006/main">
               <a:ext uri="{FF2B5EF4-FFF2-40B4-BE49-F238E27FC236}">
-                <a16:creationId xmlns:a16="http://schemas.microsoft.com/office/drawing/2014/main" id="{4D08F941-25DE-4B7E-A1D3-59CD16EF196C}"/>
+                <a16:creationId xmlns:a16="http://schemas.microsoft.com/office/drawing/2014/main" id="{1551D260-7723-44FD-8E19-34098B3D7752}"/>
               </a:ext>
             </a:extLst>
           </p:cNvPr>
@@ -10822,7 +10822,7 @@
           <p:cNvPr id="7" name="">
             <a:extLst xmlns:a="http://schemas.openxmlformats.org/drawingml/2006/main">
               <a:ext uri="{FF2B5EF4-FFF2-40B4-BE49-F238E27FC236}">
-                <a16:creationId xmlns:a16="http://schemas.microsoft.com/office/drawing/2014/main" id="{9D701E94-2A9B-48C7-912F-C3B260C1C2C5}"/>
+                <a16:creationId xmlns:a16="http://schemas.microsoft.com/office/drawing/2014/main" id="{900053BD-015A-4E67-BE2D-5BEA541F07B9}"/>
               </a:ext>
             </a:extLst>
           </p:cNvPr>
@@ -10855,7 +10855,7 @@
           <p:cNvPr id="8" name="">
             <a:extLst xmlns:a="http://schemas.openxmlformats.org/drawingml/2006/main">
               <a:ext uri="{FF2B5EF4-FFF2-40B4-BE49-F238E27FC236}">
-                <a16:creationId xmlns:a16="http://schemas.microsoft.com/office/drawing/2014/main" id="{3C1572AD-0D9A-47A9-8583-6F963D3BA173}"/>
+                <a16:creationId xmlns:a16="http://schemas.microsoft.com/office/drawing/2014/main" id="{FD796AC2-A020-485B-BC35-C36037A84433}"/>
               </a:ext>
             </a:extLst>
           </p:cNvPr>
@@ -10890,7 +10890,7 @@
           <p:cNvPr id="9" name="">
             <a:extLst xmlns:a="http://schemas.openxmlformats.org/drawingml/2006/main">
               <a:ext uri="{FF2B5EF4-FFF2-40B4-BE49-F238E27FC236}">
-                <a16:creationId xmlns:a16="http://schemas.microsoft.com/office/drawing/2014/main" id="{EA876D7F-632A-4C8D-9072-837B7BCA89B2}"/>
+                <a16:creationId xmlns:a16="http://schemas.microsoft.com/office/drawing/2014/main" id="{2C96A675-C42E-4D49-937C-596A9D88FCEA}"/>
               </a:ext>
             </a:extLst>
           </p:cNvPr>
@@ -10921,7 +10921,7 @@
           <p:cNvPr id="10" name="">
             <a:extLst xmlns:a="http://schemas.openxmlformats.org/drawingml/2006/main">
               <a:ext uri="{FF2B5EF4-FFF2-40B4-BE49-F238E27FC236}">
-                <a16:creationId xmlns:a16="http://schemas.microsoft.com/office/drawing/2014/main" id="{BB7E83E5-0566-47C7-B3C0-5B8E2AE441C2}"/>
+                <a16:creationId xmlns:a16="http://schemas.microsoft.com/office/drawing/2014/main" id="{1B786206-18B4-470B-AF2F-A281E9CF50B7}"/>
               </a:ext>
             </a:extLst>
           </p:cNvPr>
@@ -10983,7 +10983,7 @@
           <p:cNvPr id="11" name="">
             <a:extLst xmlns:a="http://schemas.openxmlformats.org/drawingml/2006/main">
               <a:ext uri="{FF2B5EF4-FFF2-40B4-BE49-F238E27FC236}">
-                <a16:creationId xmlns:a16="http://schemas.microsoft.com/office/drawing/2014/main" id="{14A5C363-9C09-4E44-800F-8EDC877D7707}"/>
+                <a16:creationId xmlns:a16="http://schemas.microsoft.com/office/drawing/2014/main" id="{0C6C1D76-089E-43D3-875D-0844EB0DC6A2}"/>
               </a:ext>
             </a:extLst>
           </p:cNvPr>
@@ -11045,7 +11045,7 @@
           <p:cNvPr id="12" name="">
             <a:extLst xmlns:a="http://schemas.openxmlformats.org/drawingml/2006/main">
               <a:ext uri="{FF2B5EF4-FFF2-40B4-BE49-F238E27FC236}">
-                <a16:creationId xmlns:a16="http://schemas.microsoft.com/office/drawing/2014/main" id="{70FF07AB-189D-4B21-A17E-F63BB2B68EA7}"/>
+                <a16:creationId xmlns:a16="http://schemas.microsoft.com/office/drawing/2014/main" id="{44373121-009D-460F-A4DE-E4B388F88F2D}"/>
               </a:ext>
             </a:extLst>
           </p:cNvPr>
@@ -11107,7 +11107,7 @@
           <p:cNvPr id="13" name="">
             <a:extLst xmlns:a="http://schemas.openxmlformats.org/drawingml/2006/main">
               <a:ext uri="{FF2B5EF4-FFF2-40B4-BE49-F238E27FC236}">
-                <a16:creationId xmlns:a16="http://schemas.microsoft.com/office/drawing/2014/main" id="{4BEFC551-A43F-4495-B003-3C86F042C586}"/>
+                <a16:creationId xmlns:a16="http://schemas.microsoft.com/office/drawing/2014/main" id="{DC8418BC-0F7A-4101-82CB-892BACED0A30}"/>
               </a:ext>
             </a:extLst>
           </p:cNvPr>
@@ -11167,7 +11167,7 @@
     </p:spTree>
     <p:extLst>
       <p:ext uri="{BB962C8B-B14F-4D97-AF65-F5344CB8AC3E}">
-        <p14:creationId xmlns:p14="http://schemas.microsoft.com/office/powerpoint/2010/main" val="1888632577"/>
+        <p14:creationId xmlns:p14="http://schemas.microsoft.com/office/powerpoint/2010/main" val="1978597956"/>
       </p:ext>
     </p:extLst>
   </p:cSld>
@@ -11195,7 +11195,7 @@
           <p:nvPr/>
         </p:nvPicPr>
         <p:blipFill>
-          <a:blip xmlns:r="http://schemas.openxmlformats.org/officeDocument/2006/relationships" xmlns:a="http://schemas.openxmlformats.org/drawingml/2006/main" r:embed="Rf50cb1c996d843ec"/>
+          <a:blip xmlns:r="http://schemas.openxmlformats.org/officeDocument/2006/relationships" xmlns:a="http://schemas.openxmlformats.org/drawingml/2006/main" r:embed="Rbd2a13813e8b4cac"/>
           <a:srcRect xmlns:a="http://schemas.openxmlformats.org/drawingml/2006/main" l="0" t="0" r="0" b="0"/>
           <a:stretch xmlns:a="http://schemas.openxmlformats.org/drawingml/2006/main">
             <a:fillRect l="0" t="0" r="0" b="0"/>
@@ -11216,7 +11216,7 @@
           <p:cNvPr id="2" name="">
             <a:extLst xmlns:a="http://schemas.openxmlformats.org/drawingml/2006/main">
               <a:ext uri="{FF2B5EF4-FFF2-40B4-BE49-F238E27FC236}">
-                <a16:creationId xmlns:a16="http://schemas.microsoft.com/office/drawing/2014/main" id="{33767261-FD3A-4DE7-A41F-5D90CD51125C}"/>
+                <a16:creationId xmlns:a16="http://schemas.microsoft.com/office/drawing/2014/main" id="{12E0B181-003E-40FB-A56E-F65D32705130}"/>
               </a:ext>
             </a:extLst>
           </p:cNvPr>
@@ -11278,7 +11278,7 @@
           <p:cNvPr id="3" name="">
             <a:extLst xmlns:a="http://schemas.openxmlformats.org/drawingml/2006/main">
               <a:ext uri="{FF2B5EF4-FFF2-40B4-BE49-F238E27FC236}">
-                <a16:creationId xmlns:a16="http://schemas.microsoft.com/office/drawing/2014/main" id="{96FBE0E9-20F0-4255-92EC-648B1B9FFB67}"/>
+                <a16:creationId xmlns:a16="http://schemas.microsoft.com/office/drawing/2014/main" id="{B49610B7-F472-41E1-9A32-004460DF3047}"/>
               </a:ext>
             </a:extLst>
           </p:cNvPr>
@@ -11340,7 +11340,7 @@
           <p:cNvPr id="4" name="">
             <a:extLst xmlns:a="http://schemas.openxmlformats.org/drawingml/2006/main">
               <a:ext uri="{FF2B5EF4-FFF2-40B4-BE49-F238E27FC236}">
-                <a16:creationId xmlns:a16="http://schemas.microsoft.com/office/drawing/2014/main" id="{0AF95E35-53F6-4F1D-B9E4-E0F5739078F5}"/>
+                <a16:creationId xmlns:a16="http://schemas.microsoft.com/office/drawing/2014/main" id="{15EC7417-8220-4158-BF4F-012629B9DDD3}"/>
               </a:ext>
             </a:extLst>
           </p:cNvPr>
@@ -11402,7 +11402,7 @@
           <p:cNvPr id="5" name="">
             <a:extLst xmlns:a="http://schemas.openxmlformats.org/drawingml/2006/main">
               <a:ext uri="{FF2B5EF4-FFF2-40B4-BE49-F238E27FC236}">
-                <a16:creationId xmlns:a16="http://schemas.microsoft.com/office/drawing/2014/main" id="{5A5C29E8-1F9F-46BB-8193-8F20C74217E0}"/>
+                <a16:creationId xmlns:a16="http://schemas.microsoft.com/office/drawing/2014/main" id="{94CDDFBD-18D5-43F3-85CB-5B3ACD541A3C}"/>
               </a:ext>
             </a:extLst>
           </p:cNvPr>
@@ -11433,7 +11433,7 @@
           <p:cNvPr id="6" name="">
             <a:extLst xmlns:a="http://schemas.openxmlformats.org/drawingml/2006/main">
               <a:ext uri="{FF2B5EF4-FFF2-40B4-BE49-F238E27FC236}">
-                <a16:creationId xmlns:a16="http://schemas.microsoft.com/office/drawing/2014/main" id="{60B1F4AA-B5C6-4B68-903B-5F9A529C5EC3}"/>
+                <a16:creationId xmlns:a16="http://schemas.microsoft.com/office/drawing/2014/main" id="{C9A886B6-7B2C-4CBA-8484-850BE222D162}"/>
               </a:ext>
             </a:extLst>
           </p:cNvPr>
@@ -11495,7 +11495,7 @@
           <p:cNvPr id="7" name="">
             <a:extLst xmlns:a="http://schemas.openxmlformats.org/drawingml/2006/main">
               <a:ext uri="{FF2B5EF4-FFF2-40B4-BE49-F238E27FC236}">
-                <a16:creationId xmlns:a16="http://schemas.microsoft.com/office/drawing/2014/main" id="{624384E1-0387-4D0D-BF9F-A9849B939C2B}"/>
+                <a16:creationId xmlns:a16="http://schemas.microsoft.com/office/drawing/2014/main" id="{870BA215-3242-49A1-A0A1-D4102E95F927}"/>
               </a:ext>
             </a:extLst>
           </p:cNvPr>
@@ -11528,7 +11528,7 @@
           <p:cNvPr id="8" name="">
             <a:extLst xmlns:a="http://schemas.openxmlformats.org/drawingml/2006/main">
               <a:ext uri="{FF2B5EF4-FFF2-40B4-BE49-F238E27FC236}">
-                <a16:creationId xmlns:a16="http://schemas.microsoft.com/office/drawing/2014/main" id="{2854D2B4-B38F-4087-AC4E-0BD63E897DB9}"/>
+                <a16:creationId xmlns:a16="http://schemas.microsoft.com/office/drawing/2014/main" id="{BC942ED7-F679-4B0B-81CC-4EDD7F511093}"/>
               </a:ext>
             </a:extLst>
           </p:cNvPr>
@@ -11563,7 +11563,7 @@
           <p:cNvPr id="9" name="">
             <a:extLst xmlns:a="http://schemas.openxmlformats.org/drawingml/2006/main">
               <a:ext uri="{FF2B5EF4-FFF2-40B4-BE49-F238E27FC236}">
-                <a16:creationId xmlns:a16="http://schemas.microsoft.com/office/drawing/2014/main" id="{8E6C3397-7DB1-4D4E-825D-F285A3831EC7}"/>
+                <a16:creationId xmlns:a16="http://schemas.microsoft.com/office/drawing/2014/main" id="{6113EE8C-35BB-440A-AA94-E55FDEC4C13A}"/>
               </a:ext>
             </a:extLst>
           </p:cNvPr>
@@ -11594,7 +11594,7 @@
           <p:cNvPr id="10" name="">
             <a:extLst xmlns:a="http://schemas.openxmlformats.org/drawingml/2006/main">
               <a:ext uri="{FF2B5EF4-FFF2-40B4-BE49-F238E27FC236}">
-                <a16:creationId xmlns:a16="http://schemas.microsoft.com/office/drawing/2014/main" id="{B0CA3DE7-347A-4698-9E3A-ED2B148ABB2C}"/>
+                <a16:creationId xmlns:a16="http://schemas.microsoft.com/office/drawing/2014/main" id="{A543F11E-B308-41AC-BD37-50C40CF0A168}"/>
               </a:ext>
             </a:extLst>
           </p:cNvPr>
@@ -11656,7 +11656,7 @@
           <p:cNvPr id="11" name="">
             <a:extLst xmlns:a="http://schemas.openxmlformats.org/drawingml/2006/main">
               <a:ext uri="{FF2B5EF4-FFF2-40B4-BE49-F238E27FC236}">
-                <a16:creationId xmlns:a16="http://schemas.microsoft.com/office/drawing/2014/main" id="{840C6913-AD06-4547-A750-6FFF9DF3CF3F}"/>
+                <a16:creationId xmlns:a16="http://schemas.microsoft.com/office/drawing/2014/main" id="{0655EF7F-DCC6-4781-98DC-DCE16522D575}"/>
               </a:ext>
             </a:extLst>
           </p:cNvPr>
@@ -11718,7 +11718,7 @@
           <p:cNvPr id="12" name="">
             <a:extLst xmlns:a="http://schemas.openxmlformats.org/drawingml/2006/main">
               <a:ext uri="{FF2B5EF4-FFF2-40B4-BE49-F238E27FC236}">
-                <a16:creationId xmlns:a16="http://schemas.microsoft.com/office/drawing/2014/main" id="{D3B1B726-33CB-4A6F-B590-2D1EF51C30BF}"/>
+                <a16:creationId xmlns:a16="http://schemas.microsoft.com/office/drawing/2014/main" id="{75472503-F933-4CF7-AC95-85BA8D4B48C8}"/>
               </a:ext>
             </a:extLst>
           </p:cNvPr>
@@ -11780,7 +11780,7 @@
           <p:cNvPr id="13" name="">
             <a:extLst xmlns:a="http://schemas.openxmlformats.org/drawingml/2006/main">
               <a:ext uri="{FF2B5EF4-FFF2-40B4-BE49-F238E27FC236}">
-                <a16:creationId xmlns:a16="http://schemas.microsoft.com/office/drawing/2014/main" id="{E9A28699-5A12-4B79-B0BC-F827C3C5F25C}"/>
+                <a16:creationId xmlns:a16="http://schemas.microsoft.com/office/drawing/2014/main" id="{C45B0DC5-579A-4F57-B738-FF618C5CD524}"/>
               </a:ext>
             </a:extLst>
           </p:cNvPr>
@@ -11813,7 +11813,7 @@
           <p:cNvPr id="14" name="">
             <a:extLst xmlns:a="http://schemas.openxmlformats.org/drawingml/2006/main">
               <a:ext uri="{FF2B5EF4-FFF2-40B4-BE49-F238E27FC236}">
-                <a16:creationId xmlns:a16="http://schemas.microsoft.com/office/drawing/2014/main" id="{AF4191A8-293C-4915-9A2F-EEC61F38E323}"/>
+                <a16:creationId xmlns:a16="http://schemas.microsoft.com/office/drawing/2014/main" id="{0CD43C4B-2E7A-4D54-86FB-929D083C6FED}"/>
               </a:ext>
             </a:extLst>
           </p:cNvPr>
@@ -11848,7 +11848,7 @@
           <p:cNvPr id="15" name="">
             <a:extLst xmlns:a="http://schemas.openxmlformats.org/drawingml/2006/main">
               <a:ext uri="{FF2B5EF4-FFF2-40B4-BE49-F238E27FC236}">
-                <a16:creationId xmlns:a16="http://schemas.microsoft.com/office/drawing/2014/main" id="{3D5C369E-7D05-4C83-9EFF-63F2DD5916DC}"/>
+                <a16:creationId xmlns:a16="http://schemas.microsoft.com/office/drawing/2014/main" id="{D058CDA9-98D7-4E8E-85D8-780F1ED39FF8}"/>
               </a:ext>
             </a:extLst>
           </p:cNvPr>
@@ -11879,7 +11879,7 @@
           <p:cNvPr id="16" name="">
             <a:extLst xmlns:a="http://schemas.openxmlformats.org/drawingml/2006/main">
               <a:ext uri="{FF2B5EF4-FFF2-40B4-BE49-F238E27FC236}">
-                <a16:creationId xmlns:a16="http://schemas.microsoft.com/office/drawing/2014/main" id="{AA8CEAF2-DF78-4821-8832-741109C7DD10}"/>
+                <a16:creationId xmlns:a16="http://schemas.microsoft.com/office/drawing/2014/main" id="{AEA544A3-C945-48B6-88C8-AF2226976343}"/>
               </a:ext>
             </a:extLst>
           </p:cNvPr>
@@ -11941,7 +11941,7 @@
           <p:cNvPr id="17" name="">
             <a:extLst xmlns:a="http://schemas.openxmlformats.org/drawingml/2006/main">
               <a:ext uri="{FF2B5EF4-FFF2-40B4-BE49-F238E27FC236}">
-                <a16:creationId xmlns:a16="http://schemas.microsoft.com/office/drawing/2014/main" id="{B884F17B-2520-4BAF-A06E-DFABD08BBFCB}"/>
+                <a16:creationId xmlns:a16="http://schemas.microsoft.com/office/drawing/2014/main" id="{67BB2037-8CA8-4FB1-B347-101C29C2AABF}"/>
               </a:ext>
             </a:extLst>
           </p:cNvPr>
@@ -12003,7 +12003,7 @@
           <p:cNvPr id="18" name="">
             <a:extLst xmlns:a="http://schemas.openxmlformats.org/drawingml/2006/main">
               <a:ext uri="{FF2B5EF4-FFF2-40B4-BE49-F238E27FC236}">
-                <a16:creationId xmlns:a16="http://schemas.microsoft.com/office/drawing/2014/main" id="{3C1F3ECF-E819-406C-A275-CCF47CCC7277}"/>
+                <a16:creationId xmlns:a16="http://schemas.microsoft.com/office/drawing/2014/main" id="{695D0E64-6C8E-4C3D-91BE-17EB94DBE088}"/>
               </a:ext>
             </a:extLst>
           </p:cNvPr>
@@ -12065,7 +12065,7 @@
           <p:cNvPr id="19" name="">
             <a:extLst xmlns:a="http://schemas.openxmlformats.org/drawingml/2006/main">
               <a:ext uri="{FF2B5EF4-FFF2-40B4-BE49-F238E27FC236}">
-                <a16:creationId xmlns:a16="http://schemas.microsoft.com/office/drawing/2014/main" id="{45DF3033-EE7F-410B-B3C4-617E1369AF84}"/>
+                <a16:creationId xmlns:a16="http://schemas.microsoft.com/office/drawing/2014/main" id="{A8C22A3D-FA4D-47B1-BC44-2C9445808445}"/>
               </a:ext>
             </a:extLst>
           </p:cNvPr>
@@ -12098,7 +12098,7 @@
           <p:cNvPr id="20" name="">
             <a:extLst xmlns:a="http://schemas.openxmlformats.org/drawingml/2006/main">
               <a:ext uri="{FF2B5EF4-FFF2-40B4-BE49-F238E27FC236}">
-                <a16:creationId xmlns:a16="http://schemas.microsoft.com/office/drawing/2014/main" id="{80C4FC48-DBB6-4B58-86D8-9189837F8D9B}"/>
+                <a16:creationId xmlns:a16="http://schemas.microsoft.com/office/drawing/2014/main" id="{7FF7FA5C-0CF6-4DBF-B53B-8AF20E29EFEC}"/>
               </a:ext>
             </a:extLst>
           </p:cNvPr>
@@ -12133,7 +12133,7 @@
           <p:cNvPr id="21" name="">
             <a:extLst xmlns:a="http://schemas.openxmlformats.org/drawingml/2006/main">
               <a:ext uri="{FF2B5EF4-FFF2-40B4-BE49-F238E27FC236}">
-                <a16:creationId xmlns:a16="http://schemas.microsoft.com/office/drawing/2014/main" id="{9CCD9326-2EA9-4571-BF7D-97B7E6818DED}"/>
+                <a16:creationId xmlns:a16="http://schemas.microsoft.com/office/drawing/2014/main" id="{B3649EE1-B0B0-4024-95E6-A9C293210DAD}"/>
               </a:ext>
             </a:extLst>
           </p:cNvPr>
@@ -12164,7 +12164,7 @@
           <p:cNvPr id="22" name="">
             <a:extLst xmlns:a="http://schemas.openxmlformats.org/drawingml/2006/main">
               <a:ext uri="{FF2B5EF4-FFF2-40B4-BE49-F238E27FC236}">
-                <a16:creationId xmlns:a16="http://schemas.microsoft.com/office/drawing/2014/main" id="{E97912BD-C60E-4D47-867F-9DB4E681BABD}"/>
+                <a16:creationId xmlns:a16="http://schemas.microsoft.com/office/drawing/2014/main" id="{C59BFB4A-79CC-42DF-807C-BBBB88091D74}"/>
               </a:ext>
             </a:extLst>
           </p:cNvPr>
@@ -12226,7 +12226,7 @@
           <p:cNvPr id="23" name="">
             <a:extLst xmlns:a="http://schemas.openxmlformats.org/drawingml/2006/main">
               <a:ext uri="{FF2B5EF4-FFF2-40B4-BE49-F238E27FC236}">
-                <a16:creationId xmlns:a16="http://schemas.microsoft.com/office/drawing/2014/main" id="{B9394594-1AF7-426C-B5A3-7DC9CF488B12}"/>
+                <a16:creationId xmlns:a16="http://schemas.microsoft.com/office/drawing/2014/main" id="{E41CF3D0-8794-496C-A895-5684A06C5789}"/>
               </a:ext>
             </a:extLst>
           </p:cNvPr>
@@ -12288,7 +12288,7 @@
           <p:cNvPr id="24" name="">
             <a:extLst xmlns:a="http://schemas.openxmlformats.org/drawingml/2006/main">
               <a:ext uri="{FF2B5EF4-FFF2-40B4-BE49-F238E27FC236}">
-                <a16:creationId xmlns:a16="http://schemas.microsoft.com/office/drawing/2014/main" id="{7F225A46-B3D7-4708-AB8D-309D72EC9E50}"/>
+                <a16:creationId xmlns:a16="http://schemas.microsoft.com/office/drawing/2014/main" id="{FA6EF37C-E359-4DD9-8D0A-BF8EEE8D76ED}"/>
               </a:ext>
             </a:extLst>
           </p:cNvPr>
@@ -12350,7 +12350,7 @@
           <p:cNvPr id="25" name="">
             <a:extLst xmlns:a="http://schemas.openxmlformats.org/drawingml/2006/main">
               <a:ext uri="{FF2B5EF4-FFF2-40B4-BE49-F238E27FC236}">
-                <a16:creationId xmlns:a16="http://schemas.microsoft.com/office/drawing/2014/main" id="{E8ECC996-DC2E-4D3D-9EE3-0CDEC86BDFC9}"/>
+                <a16:creationId xmlns:a16="http://schemas.microsoft.com/office/drawing/2014/main" id="{A9E41B23-E330-4687-9174-132861959981}"/>
               </a:ext>
             </a:extLst>
           </p:cNvPr>
@@ -12383,7 +12383,7 @@
           <p:cNvPr id="26" name="">
             <a:extLst xmlns:a="http://schemas.openxmlformats.org/drawingml/2006/main">
               <a:ext uri="{FF2B5EF4-FFF2-40B4-BE49-F238E27FC236}">
-                <a16:creationId xmlns:a16="http://schemas.microsoft.com/office/drawing/2014/main" id="{B8F79166-5F42-48C3-A0EF-D8ABAE73DFF3}"/>
+                <a16:creationId xmlns:a16="http://schemas.microsoft.com/office/drawing/2014/main" id="{B6356775-EEC3-4B53-9A63-70FDB9EA4F1B}"/>
               </a:ext>
             </a:extLst>
           </p:cNvPr>
@@ -12418,7 +12418,7 @@
           <p:cNvPr id="27" name="">
             <a:extLst xmlns:a="http://schemas.openxmlformats.org/drawingml/2006/main">
               <a:ext uri="{FF2B5EF4-FFF2-40B4-BE49-F238E27FC236}">
-                <a16:creationId xmlns:a16="http://schemas.microsoft.com/office/drawing/2014/main" id="{06DEDB9B-5C3A-4E34-B957-5497E2B2F8E0}"/>
+                <a16:creationId xmlns:a16="http://schemas.microsoft.com/office/drawing/2014/main" id="{47345A22-F84E-4AEC-9C1D-260CFB97CFBB}"/>
               </a:ext>
             </a:extLst>
           </p:cNvPr>
@@ -12449,7 +12449,7 @@
           <p:cNvPr id="28" name="">
             <a:extLst xmlns:a="http://schemas.openxmlformats.org/drawingml/2006/main">
               <a:ext uri="{FF2B5EF4-FFF2-40B4-BE49-F238E27FC236}">
-                <a16:creationId xmlns:a16="http://schemas.microsoft.com/office/drawing/2014/main" id="{166A36A2-27AA-41AE-AAC8-D929820596C9}"/>
+                <a16:creationId xmlns:a16="http://schemas.microsoft.com/office/drawing/2014/main" id="{F2EDB20B-AC93-42E9-B077-7F5E273F1B1E}"/>
               </a:ext>
             </a:extLst>
           </p:cNvPr>
@@ -12511,7 +12511,7 @@
           <p:cNvPr id="29" name="">
             <a:extLst xmlns:a="http://schemas.openxmlformats.org/drawingml/2006/main">
               <a:ext uri="{FF2B5EF4-FFF2-40B4-BE49-F238E27FC236}">
-                <a16:creationId xmlns:a16="http://schemas.microsoft.com/office/drawing/2014/main" id="{8B5BE2D8-A605-4C25-9391-E0571D25E709}"/>
+                <a16:creationId xmlns:a16="http://schemas.microsoft.com/office/drawing/2014/main" id="{9298C8E0-87EE-48B5-8A1B-D08776DFB655}"/>
               </a:ext>
             </a:extLst>
           </p:cNvPr>
@@ -12573,7 +12573,7 @@
           <p:cNvPr id="30" name="">
             <a:extLst xmlns:a="http://schemas.openxmlformats.org/drawingml/2006/main">
               <a:ext uri="{FF2B5EF4-FFF2-40B4-BE49-F238E27FC236}">
-                <a16:creationId xmlns:a16="http://schemas.microsoft.com/office/drawing/2014/main" id="{27915000-C85F-4C27-9C97-E790DC8E267F}"/>
+                <a16:creationId xmlns:a16="http://schemas.microsoft.com/office/drawing/2014/main" id="{099915AE-9242-4BF5-82CB-0B552C1611D7}"/>
               </a:ext>
             </a:extLst>
           </p:cNvPr>
@@ -12635,7 +12635,7 @@
           <p:cNvPr id="31" name="">
             <a:extLst xmlns:a="http://schemas.openxmlformats.org/drawingml/2006/main">
               <a:ext uri="{FF2B5EF4-FFF2-40B4-BE49-F238E27FC236}">
-                <a16:creationId xmlns:a16="http://schemas.microsoft.com/office/drawing/2014/main" id="{7F29468D-B954-4816-8CD1-8B0AB11E63BC}"/>
+                <a16:creationId xmlns:a16="http://schemas.microsoft.com/office/drawing/2014/main" id="{D427ED9D-F137-4CE5-B619-4177E52468D6}"/>
               </a:ext>
             </a:extLst>
           </p:cNvPr>
@@ -12668,7 +12668,7 @@
           <p:cNvPr id="32" name="">
             <a:extLst xmlns:a="http://schemas.openxmlformats.org/drawingml/2006/main">
               <a:ext uri="{FF2B5EF4-FFF2-40B4-BE49-F238E27FC236}">
-                <a16:creationId xmlns:a16="http://schemas.microsoft.com/office/drawing/2014/main" id="{F74BC408-D9B1-4012-9B56-9D622223CE7F}"/>
+                <a16:creationId xmlns:a16="http://schemas.microsoft.com/office/drawing/2014/main" id="{5047AF0C-52A7-42C4-81F5-66EA902ED2E4}"/>
               </a:ext>
             </a:extLst>
           </p:cNvPr>
@@ -12703,7 +12703,7 @@
           <p:cNvPr id="33" name="">
             <a:extLst xmlns:a="http://schemas.openxmlformats.org/drawingml/2006/main">
               <a:ext uri="{FF2B5EF4-FFF2-40B4-BE49-F238E27FC236}">
-                <a16:creationId xmlns:a16="http://schemas.microsoft.com/office/drawing/2014/main" id="{7707F4E7-4C50-4267-A65E-10D16322CBA7}"/>
+                <a16:creationId xmlns:a16="http://schemas.microsoft.com/office/drawing/2014/main" id="{F3B32756-F2C7-4C1F-8CEC-82CD2DC17766}"/>
               </a:ext>
             </a:extLst>
           </p:cNvPr>
@@ -12734,7 +12734,7 @@
           <p:cNvPr id="34" name="">
             <a:extLst xmlns:a="http://schemas.openxmlformats.org/drawingml/2006/main">
               <a:ext uri="{FF2B5EF4-FFF2-40B4-BE49-F238E27FC236}">
-                <a16:creationId xmlns:a16="http://schemas.microsoft.com/office/drawing/2014/main" id="{E4249A0D-B4F1-4CD9-AEFD-AECE45E7B420}"/>
+                <a16:creationId xmlns:a16="http://schemas.microsoft.com/office/drawing/2014/main" id="{DC6D6A6E-075E-4CE6-8E80-64F167867CC3}"/>
               </a:ext>
             </a:extLst>
           </p:cNvPr>
@@ -12796,7 +12796,7 @@
           <p:cNvPr id="35" name="">
             <a:extLst xmlns:a="http://schemas.openxmlformats.org/drawingml/2006/main">
               <a:ext uri="{FF2B5EF4-FFF2-40B4-BE49-F238E27FC236}">
-                <a16:creationId xmlns:a16="http://schemas.microsoft.com/office/drawing/2014/main" id="{C152F9F8-C19F-4C5E-919B-1C5A27D23D3F}"/>
+                <a16:creationId xmlns:a16="http://schemas.microsoft.com/office/drawing/2014/main" id="{7890475A-021A-4720-A5B6-9CB8B487156E}"/>
               </a:ext>
             </a:extLst>
           </p:cNvPr>
@@ -12858,7 +12858,7 @@
           <p:cNvPr id="36" name="">
             <a:extLst xmlns:a="http://schemas.openxmlformats.org/drawingml/2006/main">
               <a:ext uri="{FF2B5EF4-FFF2-40B4-BE49-F238E27FC236}">
-                <a16:creationId xmlns:a16="http://schemas.microsoft.com/office/drawing/2014/main" id="{B67A2DD4-849A-4A8B-AC07-C4FD551860CD}"/>
+                <a16:creationId xmlns:a16="http://schemas.microsoft.com/office/drawing/2014/main" id="{02303E93-6320-4C29-9463-EFDBF73AFC82}"/>
               </a:ext>
             </a:extLst>
           </p:cNvPr>
@@ -12920,7 +12920,7 @@
           <p:cNvPr id="37" name="">
             <a:extLst xmlns:a="http://schemas.openxmlformats.org/drawingml/2006/main">
               <a:ext uri="{FF2B5EF4-FFF2-40B4-BE49-F238E27FC236}">
-                <a16:creationId xmlns:a16="http://schemas.microsoft.com/office/drawing/2014/main" id="{DE1C9E5B-82E4-4404-9C78-A769ECB43C91}"/>
+                <a16:creationId xmlns:a16="http://schemas.microsoft.com/office/drawing/2014/main" id="{0E005FCD-83F8-48B0-B277-E4DC68FF0F95}"/>
               </a:ext>
             </a:extLst>
           </p:cNvPr>
@@ -12982,7 +12982,7 @@
           <p:cNvPr id="38" name="">
             <a:extLst xmlns:a="http://schemas.openxmlformats.org/drawingml/2006/main">
               <a:ext uri="{FF2B5EF4-FFF2-40B4-BE49-F238E27FC236}">
-                <a16:creationId xmlns:a16="http://schemas.microsoft.com/office/drawing/2014/main" id="{FBE47404-1F3A-42F8-852C-2715630B1DDD}"/>
+                <a16:creationId xmlns:a16="http://schemas.microsoft.com/office/drawing/2014/main" id="{7A138062-B998-44C8-8903-39A2AE650982}"/>
               </a:ext>
             </a:extLst>
           </p:cNvPr>
@@ -13042,7 +13042,7 @@
     </p:spTree>
     <p:extLst>
       <p:ext uri="{BB962C8B-B14F-4D97-AF65-F5344CB8AC3E}">
-        <p14:creationId xmlns:p14="http://schemas.microsoft.com/office/powerpoint/2010/main" val="798057793"/>
+        <p14:creationId xmlns:p14="http://schemas.microsoft.com/office/powerpoint/2010/main" val="319347788"/>
       </p:ext>
     </p:extLst>
   </p:cSld>
@@ -13070,7 +13070,7 @@
           <p:nvPr/>
         </p:nvPicPr>
         <p:blipFill>
-          <a:blip xmlns:r="http://schemas.openxmlformats.org/officeDocument/2006/relationships" xmlns:a="http://schemas.openxmlformats.org/drawingml/2006/main" r:embed="R96753e3fed8e4247"/>
+          <a:blip xmlns:r="http://schemas.openxmlformats.org/officeDocument/2006/relationships" xmlns:a="http://schemas.openxmlformats.org/drawingml/2006/main" r:embed="Rac5729333ab04f89"/>
           <a:srcRect xmlns:a="http://schemas.openxmlformats.org/drawingml/2006/main" l="0" t="0" r="0" b="0"/>
           <a:stretch xmlns:a="http://schemas.openxmlformats.org/drawingml/2006/main">
             <a:fillRect l="0" t="0" r="0" b="0"/>
@@ -13091,7 +13091,7 @@
           <p:cNvPr id="2" name="">
             <a:extLst xmlns:a="http://schemas.openxmlformats.org/drawingml/2006/main">
               <a:ext uri="{FF2B5EF4-FFF2-40B4-BE49-F238E27FC236}">
-                <a16:creationId xmlns:a16="http://schemas.microsoft.com/office/drawing/2014/main" id="{26DB541D-8B22-4F1E-AB4D-6C2A76B53EC9}"/>
+                <a16:creationId xmlns:a16="http://schemas.microsoft.com/office/drawing/2014/main" id="{28CC4E3A-377D-4F7B-951E-4B11B3DD7152}"/>
               </a:ext>
             </a:extLst>
           </p:cNvPr>
@@ -13153,7 +13153,7 @@
           <p:cNvPr id="3" name="">
             <a:extLst xmlns:a="http://schemas.openxmlformats.org/drawingml/2006/main">
               <a:ext uri="{FF2B5EF4-FFF2-40B4-BE49-F238E27FC236}">
-                <a16:creationId xmlns:a16="http://schemas.microsoft.com/office/drawing/2014/main" id="{4CA2CA29-B05E-44F7-B9A4-E893587F18D3}"/>
+                <a16:creationId xmlns:a16="http://schemas.microsoft.com/office/drawing/2014/main" id="{4ED41269-721D-49CB-9BFD-AC128D7D42FE}"/>
               </a:ext>
             </a:extLst>
           </p:cNvPr>
@@ -13215,7 +13215,7 @@
           <p:cNvPr id="4" name="">
             <a:extLst xmlns:a="http://schemas.openxmlformats.org/drawingml/2006/main">
               <a:ext uri="{FF2B5EF4-FFF2-40B4-BE49-F238E27FC236}">
-                <a16:creationId xmlns:a16="http://schemas.microsoft.com/office/drawing/2014/main" id="{78B8B7B5-1C89-4461-953A-EFC48F4636AD}"/>
+                <a16:creationId xmlns:a16="http://schemas.microsoft.com/office/drawing/2014/main" id="{B9132632-4F63-4521-8193-1B5C2B040EBE}"/>
               </a:ext>
             </a:extLst>
           </p:cNvPr>
@@ -13277,7 +13277,7 @@
           <p:cNvPr id="5" name="">
             <a:extLst xmlns:a="http://schemas.openxmlformats.org/drawingml/2006/main">
               <a:ext uri="{FF2B5EF4-FFF2-40B4-BE49-F238E27FC236}">
-                <a16:creationId xmlns:a16="http://schemas.microsoft.com/office/drawing/2014/main" id="{CAC62AD0-60CA-416D-9540-25344EB4F6B9}"/>
+                <a16:creationId xmlns:a16="http://schemas.microsoft.com/office/drawing/2014/main" id="{3F7C6B84-CEC6-4553-8035-18CEE81D8BAF}"/>
               </a:ext>
             </a:extLst>
           </p:cNvPr>
@@ -13339,7 +13339,7 @@
           <p:cNvPr id="6" name="">
             <a:extLst xmlns:a="http://schemas.openxmlformats.org/drawingml/2006/main">
               <a:ext uri="{FF2B5EF4-FFF2-40B4-BE49-F238E27FC236}">
-                <a16:creationId xmlns:a16="http://schemas.microsoft.com/office/drawing/2014/main" id="{5A653DE3-E2C1-44CD-8419-02D47793DC58}"/>
+                <a16:creationId xmlns:a16="http://schemas.microsoft.com/office/drawing/2014/main" id="{A12BED5C-4CEB-47D4-B3A6-0276FBA3FCBE}"/>
               </a:ext>
             </a:extLst>
           </p:cNvPr>
@@ -13399,7 +13399,7 @@
     </p:spTree>
     <p:extLst>
       <p:ext uri="{BB962C8B-B14F-4D97-AF65-F5344CB8AC3E}">
-        <p14:creationId xmlns:p14="http://schemas.microsoft.com/office/powerpoint/2010/main" val="1058425077"/>
+        <p14:creationId xmlns:p14="http://schemas.microsoft.com/office/powerpoint/2010/main" val="1752242452"/>
       </p:ext>
     </p:extLst>
   </p:cSld>
@@ -13427,7 +13427,7 @@
           <p:nvPr/>
         </p:nvPicPr>
         <p:blipFill>
-          <a:blip xmlns:r="http://schemas.openxmlformats.org/officeDocument/2006/relationships" xmlns:a="http://schemas.openxmlformats.org/drawingml/2006/main" r:embed="Rdedbcfcd7c1d4ce7"/>
+          <a:blip xmlns:r="http://schemas.openxmlformats.org/officeDocument/2006/relationships" xmlns:a="http://schemas.openxmlformats.org/drawingml/2006/main" r:embed="R087786a839414dcd"/>
           <a:srcRect xmlns:a="http://schemas.openxmlformats.org/drawingml/2006/main" l="0" t="0" r="0" b="0"/>
           <a:stretch xmlns:a="http://schemas.openxmlformats.org/drawingml/2006/main">
             <a:fillRect l="0" t="0" r="0" b="0"/>
@@ -13448,7 +13448,7 @@
           <p:cNvPr id="2" name="">
             <a:extLst xmlns:a="http://schemas.openxmlformats.org/drawingml/2006/main">
               <a:ext uri="{FF2B5EF4-FFF2-40B4-BE49-F238E27FC236}">
-                <a16:creationId xmlns:a16="http://schemas.microsoft.com/office/drawing/2014/main" id="{C390FB0A-DB0B-498F-83E9-90648206DED7}"/>
+                <a16:creationId xmlns:a16="http://schemas.microsoft.com/office/drawing/2014/main" id="{DAE6F8F1-9B84-4C96-9B7B-BE924752228D}"/>
               </a:ext>
             </a:extLst>
           </p:cNvPr>
@@ -13510,7 +13510,7 @@
           <p:cNvPr id="3" name="">
             <a:extLst xmlns:a="http://schemas.openxmlformats.org/drawingml/2006/main">
               <a:ext uri="{FF2B5EF4-FFF2-40B4-BE49-F238E27FC236}">
-                <a16:creationId xmlns:a16="http://schemas.microsoft.com/office/drawing/2014/main" id="{02A6B0B9-893A-4BCC-90F7-D4624B791F92}"/>
+                <a16:creationId xmlns:a16="http://schemas.microsoft.com/office/drawing/2014/main" id="{CE8EF926-F625-4F30-96BC-CDCBD91559AF}"/>
               </a:ext>
             </a:extLst>
           </p:cNvPr>
@@ -13572,7 +13572,7 @@
           <p:cNvPr id="4" name="">
             <a:extLst xmlns:a="http://schemas.openxmlformats.org/drawingml/2006/main">
               <a:ext uri="{FF2B5EF4-FFF2-40B4-BE49-F238E27FC236}">
-                <a16:creationId xmlns:a16="http://schemas.microsoft.com/office/drawing/2014/main" id="{A1D1A1F4-F1EA-48B0-806E-6810711FA46D}"/>
+                <a16:creationId xmlns:a16="http://schemas.microsoft.com/office/drawing/2014/main" id="{731FF42E-E86B-4D37-BFE9-493FECABC28C}"/>
               </a:ext>
             </a:extLst>
           </p:cNvPr>
@@ -13634,7 +13634,7 @@
           <p:cNvPr id="5" name="">
             <a:extLst xmlns:a="http://schemas.openxmlformats.org/drawingml/2006/main">
               <a:ext uri="{FF2B5EF4-FFF2-40B4-BE49-F238E27FC236}">
-                <a16:creationId xmlns:a16="http://schemas.microsoft.com/office/drawing/2014/main" id="{16C6F1F2-9574-41CB-A956-F0E759876B99}"/>
+                <a16:creationId xmlns:a16="http://schemas.microsoft.com/office/drawing/2014/main" id="{FDDE0603-722B-4E95-B2D6-16EC3F7595DE}"/>
               </a:ext>
             </a:extLst>
           </p:cNvPr>
@@ -13665,7 +13665,7 @@
           <p:cNvPr id="6" name="">
             <a:extLst xmlns:a="http://schemas.openxmlformats.org/drawingml/2006/main">
               <a:ext uri="{FF2B5EF4-FFF2-40B4-BE49-F238E27FC236}">
-                <a16:creationId xmlns:a16="http://schemas.microsoft.com/office/drawing/2014/main" id="{DF3617E4-87F3-436A-812A-1FFB0064B00C}"/>
+                <a16:creationId xmlns:a16="http://schemas.microsoft.com/office/drawing/2014/main" id="{7924E307-9380-4DC0-A357-FA546FE9E7A1}"/>
               </a:ext>
             </a:extLst>
           </p:cNvPr>
@@ -13727,7 +13727,7 @@
           <p:cNvPr id="7" name="">
             <a:extLst xmlns:a="http://schemas.openxmlformats.org/drawingml/2006/main">
               <a:ext uri="{FF2B5EF4-FFF2-40B4-BE49-F238E27FC236}">
-                <a16:creationId xmlns:a16="http://schemas.microsoft.com/office/drawing/2014/main" id="{B0009574-E158-486D-AF46-351DBE775450}"/>
+                <a16:creationId xmlns:a16="http://schemas.microsoft.com/office/drawing/2014/main" id="{E929F16F-AB0F-4C23-B25C-A5688FC5ED31}"/>
               </a:ext>
             </a:extLst>
           </p:cNvPr>
@@ -13760,7 +13760,7 @@
           <p:cNvPr id="8" name="">
             <a:extLst xmlns:a="http://schemas.openxmlformats.org/drawingml/2006/main">
               <a:ext uri="{FF2B5EF4-FFF2-40B4-BE49-F238E27FC236}">
-                <a16:creationId xmlns:a16="http://schemas.microsoft.com/office/drawing/2014/main" id="{0A8D41C7-7A42-4CB8-A3D8-AD0B2240055C}"/>
+                <a16:creationId xmlns:a16="http://schemas.microsoft.com/office/drawing/2014/main" id="{F1C27D39-1420-47BA-883C-221579CE6461}"/>
               </a:ext>
             </a:extLst>
           </p:cNvPr>
@@ -13795,7 +13795,7 @@
           <p:cNvPr id="9" name="">
             <a:extLst xmlns:a="http://schemas.openxmlformats.org/drawingml/2006/main">
               <a:ext uri="{FF2B5EF4-FFF2-40B4-BE49-F238E27FC236}">
-                <a16:creationId xmlns:a16="http://schemas.microsoft.com/office/drawing/2014/main" id="{49C64D3F-5A81-43D5-9907-D89BF02209B5}"/>
+                <a16:creationId xmlns:a16="http://schemas.microsoft.com/office/drawing/2014/main" id="{FA151C9E-CB95-425A-84BD-65BCD914A464}"/>
               </a:ext>
             </a:extLst>
           </p:cNvPr>
@@ -13826,7 +13826,7 @@
           <p:cNvPr id="10" name="">
             <a:extLst xmlns:a="http://schemas.openxmlformats.org/drawingml/2006/main">
               <a:ext uri="{FF2B5EF4-FFF2-40B4-BE49-F238E27FC236}">
-                <a16:creationId xmlns:a16="http://schemas.microsoft.com/office/drawing/2014/main" id="{AD02D482-6283-4F95-BB1D-A0F21D230807}"/>
+                <a16:creationId xmlns:a16="http://schemas.microsoft.com/office/drawing/2014/main" id="{77FA244C-6664-477E-950F-27429AD53B7E}"/>
               </a:ext>
             </a:extLst>
           </p:cNvPr>
@@ -13888,7 +13888,7 @@
           <p:cNvPr id="11" name="">
             <a:extLst xmlns:a="http://schemas.openxmlformats.org/drawingml/2006/main">
               <a:ext uri="{FF2B5EF4-FFF2-40B4-BE49-F238E27FC236}">
-                <a16:creationId xmlns:a16="http://schemas.microsoft.com/office/drawing/2014/main" id="{6B116F9D-99FF-4CB4-B9D5-CC0240FBDC82}"/>
+                <a16:creationId xmlns:a16="http://schemas.microsoft.com/office/drawing/2014/main" id="{BFDDBDB4-7FA7-4E1F-B7AB-282209C93E5F}"/>
               </a:ext>
             </a:extLst>
           </p:cNvPr>
@@ -13950,7 +13950,7 @@
           <p:cNvPr id="12" name="">
             <a:extLst xmlns:a="http://schemas.openxmlformats.org/drawingml/2006/main">
               <a:ext uri="{FF2B5EF4-FFF2-40B4-BE49-F238E27FC236}">
-                <a16:creationId xmlns:a16="http://schemas.microsoft.com/office/drawing/2014/main" id="{EC9373DC-0D6D-4B33-BDE2-74863BDF7F7F}"/>
+                <a16:creationId xmlns:a16="http://schemas.microsoft.com/office/drawing/2014/main" id="{36188E27-7727-4AA4-A519-F9E074967383}"/>
               </a:ext>
             </a:extLst>
           </p:cNvPr>
@@ -14012,7 +14012,7 @@
           <p:cNvPr id="13" name="">
             <a:extLst xmlns:a="http://schemas.openxmlformats.org/drawingml/2006/main">
               <a:ext uri="{FF2B5EF4-FFF2-40B4-BE49-F238E27FC236}">
-                <a16:creationId xmlns:a16="http://schemas.microsoft.com/office/drawing/2014/main" id="{47E800E4-B436-4071-9190-A60F4CAA5276}"/>
+                <a16:creationId xmlns:a16="http://schemas.microsoft.com/office/drawing/2014/main" id="{7594CC02-A23A-44BD-98E2-50EC824DD943}"/>
               </a:ext>
             </a:extLst>
           </p:cNvPr>
@@ -14045,7 +14045,7 @@
           <p:cNvPr id="14" name="">
             <a:extLst xmlns:a="http://schemas.openxmlformats.org/drawingml/2006/main">
               <a:ext uri="{FF2B5EF4-FFF2-40B4-BE49-F238E27FC236}">
-                <a16:creationId xmlns:a16="http://schemas.microsoft.com/office/drawing/2014/main" id="{6834861C-1BD3-45A6-92AF-09F9595440EE}"/>
+                <a16:creationId xmlns:a16="http://schemas.microsoft.com/office/drawing/2014/main" id="{882F2F46-1158-4D4A-8C9D-68E0CA0077BE}"/>
               </a:ext>
             </a:extLst>
           </p:cNvPr>
@@ -14080,7 +14080,7 @@
           <p:cNvPr id="15" name="">
             <a:extLst xmlns:a="http://schemas.openxmlformats.org/drawingml/2006/main">
               <a:ext uri="{FF2B5EF4-FFF2-40B4-BE49-F238E27FC236}">
-                <a16:creationId xmlns:a16="http://schemas.microsoft.com/office/drawing/2014/main" id="{F97CF865-8B08-4E8E-8F29-457208E2664C}"/>
+                <a16:creationId xmlns:a16="http://schemas.microsoft.com/office/drawing/2014/main" id="{E52E410B-4DE4-4913-AC3A-CDFAE5514E95}"/>
               </a:ext>
             </a:extLst>
           </p:cNvPr>
@@ -14111,7 +14111,7 @@
           <p:cNvPr id="16" name="">
             <a:extLst xmlns:a="http://schemas.openxmlformats.org/drawingml/2006/main">
               <a:ext uri="{FF2B5EF4-FFF2-40B4-BE49-F238E27FC236}">
-                <a16:creationId xmlns:a16="http://schemas.microsoft.com/office/drawing/2014/main" id="{B61A7795-C3E7-4467-AAFF-0E5923E9E51B}"/>
+                <a16:creationId xmlns:a16="http://schemas.microsoft.com/office/drawing/2014/main" id="{F5310EF3-A071-4086-A097-209D220E3465}"/>
               </a:ext>
             </a:extLst>
           </p:cNvPr>
@@ -14173,7 +14173,7 @@
           <p:cNvPr id="17" name="">
             <a:extLst xmlns:a="http://schemas.openxmlformats.org/drawingml/2006/main">
               <a:ext uri="{FF2B5EF4-FFF2-40B4-BE49-F238E27FC236}">
-                <a16:creationId xmlns:a16="http://schemas.microsoft.com/office/drawing/2014/main" id="{D3DAA60A-BF9A-40F4-8997-A1ABCCEBFA7C}"/>
+                <a16:creationId xmlns:a16="http://schemas.microsoft.com/office/drawing/2014/main" id="{3A9E4856-5462-4CA6-83AC-549992FF6D9B}"/>
               </a:ext>
             </a:extLst>
           </p:cNvPr>
@@ -14235,7 +14235,7 @@
           <p:cNvPr id="18" name="">
             <a:extLst xmlns:a="http://schemas.openxmlformats.org/drawingml/2006/main">
               <a:ext uri="{FF2B5EF4-FFF2-40B4-BE49-F238E27FC236}">
-                <a16:creationId xmlns:a16="http://schemas.microsoft.com/office/drawing/2014/main" id="{B7EA0B13-94C3-462B-91B7-BD1E75AD96CF}"/>
+                <a16:creationId xmlns:a16="http://schemas.microsoft.com/office/drawing/2014/main" id="{1DC1DF06-F731-4930-842C-738AD4881713}"/>
               </a:ext>
             </a:extLst>
           </p:cNvPr>
@@ -14297,7 +14297,7 @@
           <p:cNvPr id="19" name="">
             <a:extLst xmlns:a="http://schemas.openxmlformats.org/drawingml/2006/main">
               <a:ext uri="{FF2B5EF4-FFF2-40B4-BE49-F238E27FC236}">
-                <a16:creationId xmlns:a16="http://schemas.microsoft.com/office/drawing/2014/main" id="{E3161D17-99E5-4F51-9761-DD458548328A}"/>
+                <a16:creationId xmlns:a16="http://schemas.microsoft.com/office/drawing/2014/main" id="{A048F7BD-B94E-4D70-89CE-A03B4A735218}"/>
               </a:ext>
             </a:extLst>
           </p:cNvPr>
@@ -14330,7 +14330,7 @@
           <p:cNvPr id="20" name="">
             <a:extLst xmlns:a="http://schemas.openxmlformats.org/drawingml/2006/main">
               <a:ext uri="{FF2B5EF4-FFF2-40B4-BE49-F238E27FC236}">
-                <a16:creationId xmlns:a16="http://schemas.microsoft.com/office/drawing/2014/main" id="{BF3EBF4A-C482-4578-966A-94255FC497D9}"/>
+                <a16:creationId xmlns:a16="http://schemas.microsoft.com/office/drawing/2014/main" id="{700F05DD-0D48-4E59-8FDD-975E23AC29F8}"/>
               </a:ext>
             </a:extLst>
           </p:cNvPr>
@@ -14365,7 +14365,7 @@
           <p:cNvPr id="21" name="">
             <a:extLst xmlns:a="http://schemas.openxmlformats.org/drawingml/2006/main">
               <a:ext uri="{FF2B5EF4-FFF2-40B4-BE49-F238E27FC236}">
-                <a16:creationId xmlns:a16="http://schemas.microsoft.com/office/drawing/2014/main" id="{FF95E724-7C1E-4118-9BBA-EB9104DEF827}"/>
+                <a16:creationId xmlns:a16="http://schemas.microsoft.com/office/drawing/2014/main" id="{AA733ECE-846A-4359-89A6-234031D65A03}"/>
               </a:ext>
             </a:extLst>
           </p:cNvPr>
@@ -14396,7 +14396,7 @@
           <p:cNvPr id="22" name="">
             <a:extLst xmlns:a="http://schemas.openxmlformats.org/drawingml/2006/main">
               <a:ext uri="{FF2B5EF4-FFF2-40B4-BE49-F238E27FC236}">
-                <a16:creationId xmlns:a16="http://schemas.microsoft.com/office/drawing/2014/main" id="{05373CEE-AC51-4B39-90DA-EEFE5C01AFEE}"/>
+                <a16:creationId xmlns:a16="http://schemas.microsoft.com/office/drawing/2014/main" id="{90FDDF7E-E61A-46F6-8893-AB9BDB7C6354}"/>
               </a:ext>
             </a:extLst>
           </p:cNvPr>
@@ -14458,7 +14458,7 @@
           <p:cNvPr id="23" name="">
             <a:extLst xmlns:a="http://schemas.openxmlformats.org/drawingml/2006/main">
               <a:ext uri="{FF2B5EF4-FFF2-40B4-BE49-F238E27FC236}">
-                <a16:creationId xmlns:a16="http://schemas.microsoft.com/office/drawing/2014/main" id="{E7D38482-CB24-40AD-B190-2DCA3C76D640}"/>
+                <a16:creationId xmlns:a16="http://schemas.microsoft.com/office/drawing/2014/main" id="{B0FE4CF3-2B92-4F19-A74D-371CF9B5FFD5}"/>
               </a:ext>
             </a:extLst>
           </p:cNvPr>
@@ -14520,7 +14520,7 @@
           <p:cNvPr id="24" name="">
             <a:extLst xmlns:a="http://schemas.openxmlformats.org/drawingml/2006/main">
               <a:ext uri="{FF2B5EF4-FFF2-40B4-BE49-F238E27FC236}">
-                <a16:creationId xmlns:a16="http://schemas.microsoft.com/office/drawing/2014/main" id="{0061BFE3-FE60-4458-8422-35F1F0C4F609}"/>
+                <a16:creationId xmlns:a16="http://schemas.microsoft.com/office/drawing/2014/main" id="{108B9199-8528-4BD6-AD21-4816CB832F5B}"/>
               </a:ext>
             </a:extLst>
           </p:cNvPr>
@@ -14582,7 +14582,7 @@
           <p:cNvPr id="25" name="">
             <a:extLst xmlns:a="http://schemas.openxmlformats.org/drawingml/2006/main">
               <a:ext uri="{FF2B5EF4-FFF2-40B4-BE49-F238E27FC236}">
-                <a16:creationId xmlns:a16="http://schemas.microsoft.com/office/drawing/2014/main" id="{1E0EFCD6-94E8-4444-BE02-D11D77F36A7D}"/>
+                <a16:creationId xmlns:a16="http://schemas.microsoft.com/office/drawing/2014/main" id="{E87DF06F-F873-47D7-8291-89CDEF3D65DE}"/>
               </a:ext>
             </a:extLst>
           </p:cNvPr>
@@ -14644,7 +14644,7 @@
           <p:cNvPr id="26" name="">
             <a:extLst xmlns:a="http://schemas.openxmlformats.org/drawingml/2006/main">
               <a:ext uri="{FF2B5EF4-FFF2-40B4-BE49-F238E27FC236}">
-                <a16:creationId xmlns:a16="http://schemas.microsoft.com/office/drawing/2014/main" id="{4B79AEB0-A00C-41F8-8B9C-4E75E1DAA817}"/>
+                <a16:creationId xmlns:a16="http://schemas.microsoft.com/office/drawing/2014/main" id="{CC4DF359-D8A6-45D1-B7F9-0E40DD599195}"/>
               </a:ext>
             </a:extLst>
           </p:cNvPr>
@@ -14704,7 +14704,7 @@
     </p:spTree>
     <p:extLst>
       <p:ext uri="{BB962C8B-B14F-4D97-AF65-F5344CB8AC3E}">
-        <p14:creationId xmlns:p14="http://schemas.microsoft.com/office/powerpoint/2010/main" val="1444270732"/>
+        <p14:creationId xmlns:p14="http://schemas.microsoft.com/office/powerpoint/2010/main" val="1276344174"/>
       </p:ext>
     </p:extLst>
   </p:cSld>
@@ -14732,7 +14732,7 @@
           <p:nvPr/>
         </p:nvPicPr>
         <p:blipFill>
-          <a:blip xmlns:r="http://schemas.openxmlformats.org/officeDocument/2006/relationships" xmlns:a="http://schemas.openxmlformats.org/drawingml/2006/main" r:embed="Raf4f9c054d274927"/>
+          <a:blip xmlns:r="http://schemas.openxmlformats.org/officeDocument/2006/relationships" xmlns:a="http://schemas.openxmlformats.org/drawingml/2006/main" r:embed="Rdc5ce33f35914f04"/>
           <a:srcRect xmlns:a="http://schemas.openxmlformats.org/drawingml/2006/main" l="0" t="0" r="0" b="0"/>
           <a:stretch xmlns:a="http://schemas.openxmlformats.org/drawingml/2006/main">
             <a:fillRect l="0" t="0" r="0" b="0"/>
@@ -14753,7 +14753,7 @@
           <p:cNvPr id="2" name="">
             <a:extLst xmlns:a="http://schemas.openxmlformats.org/drawingml/2006/main">
               <a:ext uri="{FF2B5EF4-FFF2-40B4-BE49-F238E27FC236}">
-                <a16:creationId xmlns:a16="http://schemas.microsoft.com/office/drawing/2014/main" id="{D250A3A7-730A-4D43-9E76-3397BD823E38}"/>
+                <a16:creationId xmlns:a16="http://schemas.microsoft.com/office/drawing/2014/main" id="{5B3C9809-D629-46B5-BDE0-032746F1AB25}"/>
               </a:ext>
             </a:extLst>
           </p:cNvPr>
@@ -14815,7 +14815,7 @@
           <p:cNvPr id="3" name="">
             <a:extLst xmlns:a="http://schemas.openxmlformats.org/drawingml/2006/main">
               <a:ext uri="{FF2B5EF4-FFF2-40B4-BE49-F238E27FC236}">
-                <a16:creationId xmlns:a16="http://schemas.microsoft.com/office/drawing/2014/main" id="{F79512DE-6F58-4F49-A135-EE248A6484BE}"/>
+                <a16:creationId xmlns:a16="http://schemas.microsoft.com/office/drawing/2014/main" id="{E1657BB6-4643-4F18-A690-73D9BC04E66B}"/>
               </a:ext>
             </a:extLst>
           </p:cNvPr>
@@ -14877,7 +14877,7 @@
           <p:cNvPr id="4" name="">
             <a:extLst xmlns:a="http://schemas.openxmlformats.org/drawingml/2006/main">
               <a:ext uri="{FF2B5EF4-FFF2-40B4-BE49-F238E27FC236}">
-                <a16:creationId xmlns:a16="http://schemas.microsoft.com/office/drawing/2014/main" id="{6706592D-C808-41AD-8BBB-881A9F6F0740}"/>
+                <a16:creationId xmlns:a16="http://schemas.microsoft.com/office/drawing/2014/main" id="{94687E2F-F9B8-46F7-9910-CC85EED85325}"/>
               </a:ext>
             </a:extLst>
           </p:cNvPr>
@@ -14939,7 +14939,7 @@
           <p:cNvPr id="5" name="">
             <a:extLst xmlns:a="http://schemas.openxmlformats.org/drawingml/2006/main">
               <a:ext uri="{FF2B5EF4-FFF2-40B4-BE49-F238E27FC236}">
-                <a16:creationId xmlns:a16="http://schemas.microsoft.com/office/drawing/2014/main" id="{1D239A00-ED27-4BC4-AD4E-720F77C02FA4}"/>
+                <a16:creationId xmlns:a16="http://schemas.microsoft.com/office/drawing/2014/main" id="{EE6B1D6A-6564-4AA9-9F42-CE42CC25B825}"/>
               </a:ext>
             </a:extLst>
           </p:cNvPr>
@@ -14970,7 +14970,7 @@
           <p:cNvPr id="6" name="">
             <a:extLst xmlns:a="http://schemas.openxmlformats.org/drawingml/2006/main">
               <a:ext uri="{FF2B5EF4-FFF2-40B4-BE49-F238E27FC236}">
-                <a16:creationId xmlns:a16="http://schemas.microsoft.com/office/drawing/2014/main" id="{C144F813-19EA-40DB-B9F0-FB041632DFB5}"/>
+                <a16:creationId xmlns:a16="http://schemas.microsoft.com/office/drawing/2014/main" id="{6EC9C5E9-B4C4-4A20-811A-C5741F76B829}"/>
               </a:ext>
             </a:extLst>
           </p:cNvPr>
@@ -15032,7 +15032,7 @@
           <p:cNvPr id="7" name="">
             <a:extLst xmlns:a="http://schemas.openxmlformats.org/drawingml/2006/main">
               <a:ext uri="{FF2B5EF4-FFF2-40B4-BE49-F238E27FC236}">
-                <a16:creationId xmlns:a16="http://schemas.microsoft.com/office/drawing/2014/main" id="{55994994-F5FD-4863-816F-57FE5CCDE138}"/>
+                <a16:creationId xmlns:a16="http://schemas.microsoft.com/office/drawing/2014/main" id="{96127C4C-6880-411F-A4B6-1F635AD5F2BD}"/>
               </a:ext>
             </a:extLst>
           </p:cNvPr>
@@ -15065,7 +15065,7 @@
           <p:cNvPr id="8" name="">
             <a:extLst xmlns:a="http://schemas.openxmlformats.org/drawingml/2006/main">
               <a:ext uri="{FF2B5EF4-FFF2-40B4-BE49-F238E27FC236}">
-                <a16:creationId xmlns:a16="http://schemas.microsoft.com/office/drawing/2014/main" id="{68ED51E5-4945-433D-AF1F-EE06C4F4C1C3}"/>
+                <a16:creationId xmlns:a16="http://schemas.microsoft.com/office/drawing/2014/main" id="{E13FA90F-03F7-46D8-B448-82EB80CA1D71}"/>
               </a:ext>
             </a:extLst>
           </p:cNvPr>
@@ -15100,7 +15100,7 @@
           <p:cNvPr id="9" name="">
             <a:extLst xmlns:a="http://schemas.openxmlformats.org/drawingml/2006/main">
               <a:ext uri="{FF2B5EF4-FFF2-40B4-BE49-F238E27FC236}">
-                <a16:creationId xmlns:a16="http://schemas.microsoft.com/office/drawing/2014/main" id="{F47F9C6E-D863-4422-BA12-2D1068069147}"/>
+                <a16:creationId xmlns:a16="http://schemas.microsoft.com/office/drawing/2014/main" id="{057483BA-8E6A-48C4-94A0-8EC4FBF3DE9C}"/>
               </a:ext>
             </a:extLst>
           </p:cNvPr>
@@ -15131,7 +15131,7 @@
           <p:cNvPr id="10" name="">
             <a:extLst xmlns:a="http://schemas.openxmlformats.org/drawingml/2006/main">
               <a:ext uri="{FF2B5EF4-FFF2-40B4-BE49-F238E27FC236}">
-                <a16:creationId xmlns:a16="http://schemas.microsoft.com/office/drawing/2014/main" id="{3A8FF824-CC19-4F7D-A010-D3ED7935C4FB}"/>
+                <a16:creationId xmlns:a16="http://schemas.microsoft.com/office/drawing/2014/main" id="{884230D5-59FD-443D-8F5A-EF91845B04B2}"/>
               </a:ext>
             </a:extLst>
           </p:cNvPr>
@@ -15193,7 +15193,7 @@
           <p:cNvPr id="11" name="">
             <a:extLst xmlns:a="http://schemas.openxmlformats.org/drawingml/2006/main">
               <a:ext uri="{FF2B5EF4-FFF2-40B4-BE49-F238E27FC236}">
-                <a16:creationId xmlns:a16="http://schemas.microsoft.com/office/drawing/2014/main" id="{F29346F1-2F70-4BC2-8BB6-73E1B3F2F4E6}"/>
+                <a16:creationId xmlns:a16="http://schemas.microsoft.com/office/drawing/2014/main" id="{8B7892EB-1DE1-48F0-8503-E7C53D65B596}"/>
               </a:ext>
             </a:extLst>
           </p:cNvPr>
@@ -15255,7 +15255,7 @@
           <p:cNvPr id="12" name="">
             <a:extLst xmlns:a="http://schemas.openxmlformats.org/drawingml/2006/main">
               <a:ext uri="{FF2B5EF4-FFF2-40B4-BE49-F238E27FC236}">
-                <a16:creationId xmlns:a16="http://schemas.microsoft.com/office/drawing/2014/main" id="{26315936-CA67-41FA-90F2-4158EEF43A80}"/>
+                <a16:creationId xmlns:a16="http://schemas.microsoft.com/office/drawing/2014/main" id="{037BFFBB-58E0-4156-A299-21726D0F2D7A}"/>
               </a:ext>
             </a:extLst>
           </p:cNvPr>
@@ -15317,7 +15317,7 @@
           <p:cNvPr id="13" name="">
             <a:extLst xmlns:a="http://schemas.openxmlformats.org/drawingml/2006/main">
               <a:ext uri="{FF2B5EF4-FFF2-40B4-BE49-F238E27FC236}">
-                <a16:creationId xmlns:a16="http://schemas.microsoft.com/office/drawing/2014/main" id="{4DCA5C8F-BA88-4651-827D-F82E6CBAA1E9}"/>
+                <a16:creationId xmlns:a16="http://schemas.microsoft.com/office/drawing/2014/main" id="{80625866-A274-4698-B35F-039F61EC4943}"/>
               </a:ext>
             </a:extLst>
           </p:cNvPr>
@@ -15350,7 +15350,7 @@
           <p:cNvPr id="14" name="">
             <a:extLst xmlns:a="http://schemas.openxmlformats.org/drawingml/2006/main">
               <a:ext uri="{FF2B5EF4-FFF2-40B4-BE49-F238E27FC236}">
-                <a16:creationId xmlns:a16="http://schemas.microsoft.com/office/drawing/2014/main" id="{9CB3F846-FEAB-4466-8A63-FE93D6057780}"/>
+                <a16:creationId xmlns:a16="http://schemas.microsoft.com/office/drawing/2014/main" id="{B7503219-C0CC-4186-ACB3-2D5C7D02C201}"/>
               </a:ext>
             </a:extLst>
           </p:cNvPr>
@@ -15385,7 +15385,7 @@
           <p:cNvPr id="15" name="">
             <a:extLst xmlns:a="http://schemas.openxmlformats.org/drawingml/2006/main">
               <a:ext uri="{FF2B5EF4-FFF2-40B4-BE49-F238E27FC236}">
-                <a16:creationId xmlns:a16="http://schemas.microsoft.com/office/drawing/2014/main" id="{B0E77C95-03A3-4CE4-81E7-6E9D580CE8C4}"/>
+                <a16:creationId xmlns:a16="http://schemas.microsoft.com/office/drawing/2014/main" id="{5E028711-2335-47AC-B3CC-B53A49AC7C49}"/>
               </a:ext>
             </a:extLst>
           </p:cNvPr>
@@ -15416,7 +15416,7 @@
           <p:cNvPr id="16" name="">
             <a:extLst xmlns:a="http://schemas.openxmlformats.org/drawingml/2006/main">
               <a:ext uri="{FF2B5EF4-FFF2-40B4-BE49-F238E27FC236}">
-                <a16:creationId xmlns:a16="http://schemas.microsoft.com/office/drawing/2014/main" id="{F6316D42-BA27-479B-AD24-FD1A7A7078F3}"/>
+                <a16:creationId xmlns:a16="http://schemas.microsoft.com/office/drawing/2014/main" id="{AE2CA73D-A90E-4105-B05C-AC0145306C9A}"/>
               </a:ext>
             </a:extLst>
           </p:cNvPr>
@@ -15478,7 +15478,7 @@
           <p:cNvPr id="17" name="">
             <a:extLst xmlns:a="http://schemas.openxmlformats.org/drawingml/2006/main">
               <a:ext uri="{FF2B5EF4-FFF2-40B4-BE49-F238E27FC236}">
-                <a16:creationId xmlns:a16="http://schemas.microsoft.com/office/drawing/2014/main" id="{BDC6008A-1718-449F-9C04-15C5618CE1C0}"/>
+                <a16:creationId xmlns:a16="http://schemas.microsoft.com/office/drawing/2014/main" id="{22BC9DEE-F607-44AD-AA23-A2DD050070DF}"/>
               </a:ext>
             </a:extLst>
           </p:cNvPr>
@@ -15540,7 +15540,7 @@
           <p:cNvPr id="18" name="">
             <a:extLst xmlns:a="http://schemas.openxmlformats.org/drawingml/2006/main">
               <a:ext uri="{FF2B5EF4-FFF2-40B4-BE49-F238E27FC236}">
-                <a16:creationId xmlns:a16="http://schemas.microsoft.com/office/drawing/2014/main" id="{D139BC7F-461D-4DCD-9D0B-5DE931ADCF03}"/>
+                <a16:creationId xmlns:a16="http://schemas.microsoft.com/office/drawing/2014/main" id="{F34CFA5C-770F-4D77-96AC-FC048045F21B}"/>
               </a:ext>
             </a:extLst>
           </p:cNvPr>
@@ -15602,7 +15602,7 @@
           <p:cNvPr id="19" name="">
             <a:extLst xmlns:a="http://schemas.openxmlformats.org/drawingml/2006/main">
               <a:ext uri="{FF2B5EF4-FFF2-40B4-BE49-F238E27FC236}">
-                <a16:creationId xmlns:a16="http://schemas.microsoft.com/office/drawing/2014/main" id="{5DEC59A3-C42A-4745-AE41-59C3A31E5A0D}"/>
+                <a16:creationId xmlns:a16="http://schemas.microsoft.com/office/drawing/2014/main" id="{1D76792C-D8E8-4562-B3E0-3A7C3B087C6A}"/>
               </a:ext>
             </a:extLst>
           </p:cNvPr>
@@ -15635,7 +15635,7 @@
           <p:cNvPr id="20" name="">
             <a:extLst xmlns:a="http://schemas.openxmlformats.org/drawingml/2006/main">
               <a:ext uri="{FF2B5EF4-FFF2-40B4-BE49-F238E27FC236}">
-                <a16:creationId xmlns:a16="http://schemas.microsoft.com/office/drawing/2014/main" id="{23564F91-6CEA-4212-AC88-949EF5F0173B}"/>
+                <a16:creationId xmlns:a16="http://schemas.microsoft.com/office/drawing/2014/main" id="{AB16A4E9-2227-4122-82D3-2DE938F8956D}"/>
               </a:ext>
             </a:extLst>
           </p:cNvPr>
@@ -15670,7 +15670,7 @@
           <p:cNvPr id="21" name="">
             <a:extLst xmlns:a="http://schemas.openxmlformats.org/drawingml/2006/main">
               <a:ext uri="{FF2B5EF4-FFF2-40B4-BE49-F238E27FC236}">
-                <a16:creationId xmlns:a16="http://schemas.microsoft.com/office/drawing/2014/main" id="{65A63606-F820-4C87-9FC1-8E01C0D840FD}"/>
+                <a16:creationId xmlns:a16="http://schemas.microsoft.com/office/drawing/2014/main" id="{2498A6EA-9A28-4CA1-82C2-DEC27C10B2F7}"/>
               </a:ext>
             </a:extLst>
           </p:cNvPr>
@@ -15701,7 +15701,7 @@
           <p:cNvPr id="22" name="">
             <a:extLst xmlns:a="http://schemas.openxmlformats.org/drawingml/2006/main">
               <a:ext uri="{FF2B5EF4-FFF2-40B4-BE49-F238E27FC236}">
-                <a16:creationId xmlns:a16="http://schemas.microsoft.com/office/drawing/2014/main" id="{9BFD4203-1B94-4311-A789-9FADEE65E653}"/>
+                <a16:creationId xmlns:a16="http://schemas.microsoft.com/office/drawing/2014/main" id="{6EC06FAB-6AAE-47B4-965B-CE3267BEE762}"/>
               </a:ext>
             </a:extLst>
           </p:cNvPr>
@@ -15763,7 +15763,7 @@
           <p:cNvPr id="23" name="">
             <a:extLst xmlns:a="http://schemas.openxmlformats.org/drawingml/2006/main">
               <a:ext uri="{FF2B5EF4-FFF2-40B4-BE49-F238E27FC236}">
-                <a16:creationId xmlns:a16="http://schemas.microsoft.com/office/drawing/2014/main" id="{2D9376D2-0B52-440C-B1AA-65FDC6655FE0}"/>
+                <a16:creationId xmlns:a16="http://schemas.microsoft.com/office/drawing/2014/main" id="{ADB73BCD-2170-4847-A8D8-1B296E4C8D99}"/>
               </a:ext>
             </a:extLst>
           </p:cNvPr>
@@ -15825,7 +15825,7 @@
           <p:cNvPr id="24" name="">
             <a:extLst xmlns:a="http://schemas.openxmlformats.org/drawingml/2006/main">
               <a:ext uri="{FF2B5EF4-FFF2-40B4-BE49-F238E27FC236}">
-                <a16:creationId xmlns:a16="http://schemas.microsoft.com/office/drawing/2014/main" id="{E91DB307-AB6F-4089-9A2F-6E30A54CA436}"/>
+                <a16:creationId xmlns:a16="http://schemas.microsoft.com/office/drawing/2014/main" id="{37A6E2E7-6DB2-49B5-8F9D-FFBD217385E9}"/>
               </a:ext>
             </a:extLst>
           </p:cNvPr>
@@ -15887,7 +15887,7 @@
           <p:cNvPr id="25" name="">
             <a:extLst xmlns:a="http://schemas.openxmlformats.org/drawingml/2006/main">
               <a:ext uri="{FF2B5EF4-FFF2-40B4-BE49-F238E27FC236}">
-                <a16:creationId xmlns:a16="http://schemas.microsoft.com/office/drawing/2014/main" id="{C503BAB0-074D-4330-BA9E-E12CF0222B38}"/>
+                <a16:creationId xmlns:a16="http://schemas.microsoft.com/office/drawing/2014/main" id="{83014D53-FEED-4CFC-BDC9-FE622A5B12D1}"/>
               </a:ext>
             </a:extLst>
           </p:cNvPr>
@@ -15949,7 +15949,7 @@
           <p:cNvPr id="26" name="">
             <a:extLst xmlns:a="http://schemas.openxmlformats.org/drawingml/2006/main">
               <a:ext uri="{FF2B5EF4-FFF2-40B4-BE49-F238E27FC236}">
-                <a16:creationId xmlns:a16="http://schemas.microsoft.com/office/drawing/2014/main" id="{A1A91790-F619-4524-B413-68BEA2FB9A59}"/>
+                <a16:creationId xmlns:a16="http://schemas.microsoft.com/office/drawing/2014/main" id="{92E4B6B3-4435-4067-9687-1C430056901D}"/>
               </a:ext>
             </a:extLst>
           </p:cNvPr>
@@ -16009,7 +16009,7 @@
     </p:spTree>
     <p:extLst>
       <p:ext uri="{BB962C8B-B14F-4D97-AF65-F5344CB8AC3E}">
-        <p14:creationId xmlns:p14="http://schemas.microsoft.com/office/powerpoint/2010/main" val="178025159"/>
+        <p14:creationId xmlns:p14="http://schemas.microsoft.com/office/powerpoint/2010/main" val="1887470248"/>
       </p:ext>
     </p:extLst>
   </p:cSld>
@@ -16037,7 +16037,7 @@
           <p:nvPr/>
         </p:nvPicPr>
         <p:blipFill>
-          <a:blip xmlns:r="http://schemas.openxmlformats.org/officeDocument/2006/relationships" xmlns:a="http://schemas.openxmlformats.org/drawingml/2006/main" r:embed="R89ce769b04804731"/>
+          <a:blip xmlns:r="http://schemas.openxmlformats.org/officeDocument/2006/relationships" xmlns:a="http://schemas.openxmlformats.org/drawingml/2006/main" r:embed="R65df8afd255845bc"/>
           <a:srcRect xmlns:a="http://schemas.openxmlformats.org/drawingml/2006/main" l="0" t="0" r="0" b="0"/>
           <a:stretch xmlns:a="http://schemas.openxmlformats.org/drawingml/2006/main">
             <a:fillRect l="0" t="0" r="0" b="0"/>
@@ -16058,7 +16058,7 @@
           <p:cNvPr id="2" name="">
             <a:extLst xmlns:a="http://schemas.openxmlformats.org/drawingml/2006/main">
               <a:ext uri="{FF2B5EF4-FFF2-40B4-BE49-F238E27FC236}">
-                <a16:creationId xmlns:a16="http://schemas.microsoft.com/office/drawing/2014/main" id="{E765F0ED-9FD0-4A75-9FC6-787FA8F6F502}"/>
+                <a16:creationId xmlns:a16="http://schemas.microsoft.com/office/drawing/2014/main" id="{7117E9D3-D4EE-4027-9A1E-CD4DC04D3192}"/>
               </a:ext>
             </a:extLst>
           </p:cNvPr>
@@ -16120,7 +16120,7 @@
           <p:cNvPr id="3" name="">
             <a:extLst xmlns:a="http://schemas.openxmlformats.org/drawingml/2006/main">
               <a:ext uri="{FF2B5EF4-FFF2-40B4-BE49-F238E27FC236}">
-                <a16:creationId xmlns:a16="http://schemas.microsoft.com/office/drawing/2014/main" id="{4DEDE900-CEA1-4AF3-B802-8344A480264B}"/>
+                <a16:creationId xmlns:a16="http://schemas.microsoft.com/office/drawing/2014/main" id="{2FB1A423-CD7D-4E93-ABB1-EA772FE739BE}"/>
               </a:ext>
             </a:extLst>
           </p:cNvPr>
@@ -16182,7 +16182,7 @@
           <p:cNvPr id="4" name="">
             <a:extLst xmlns:a="http://schemas.openxmlformats.org/drawingml/2006/main">
               <a:ext uri="{FF2B5EF4-FFF2-40B4-BE49-F238E27FC236}">
-                <a16:creationId xmlns:a16="http://schemas.microsoft.com/office/drawing/2014/main" id="{77BBF24B-477C-498F-928A-A9A19146BEE3}"/>
+                <a16:creationId xmlns:a16="http://schemas.microsoft.com/office/drawing/2014/main" id="{9F72A5A7-BE3E-42C4-BBB5-7F54A964FEEA}"/>
               </a:ext>
             </a:extLst>
           </p:cNvPr>
@@ -16244,7 +16244,7 @@
           <p:cNvPr id="5" name="">
             <a:extLst xmlns:a="http://schemas.openxmlformats.org/drawingml/2006/main">
               <a:ext uri="{FF2B5EF4-FFF2-40B4-BE49-F238E27FC236}">
-                <a16:creationId xmlns:a16="http://schemas.microsoft.com/office/drawing/2014/main" id="{C0B30BCA-7A1F-4A6E-B624-2EDC5719C3D9}"/>
+                <a16:creationId xmlns:a16="http://schemas.microsoft.com/office/drawing/2014/main" id="{70A7FB28-F79B-4B0E-9254-4DC24CAB18A1}"/>
               </a:ext>
             </a:extLst>
           </p:cNvPr>
@@ -16275,7 +16275,7 @@
           <p:cNvPr id="6" name="">
             <a:extLst xmlns:a="http://schemas.openxmlformats.org/drawingml/2006/main">
               <a:ext uri="{FF2B5EF4-FFF2-40B4-BE49-F238E27FC236}">
-                <a16:creationId xmlns:a16="http://schemas.microsoft.com/office/drawing/2014/main" id="{1203C971-272C-4CEB-9A44-184AE7855C42}"/>
+                <a16:creationId xmlns:a16="http://schemas.microsoft.com/office/drawing/2014/main" id="{52C3E239-19D4-4377-8676-DD02281458D9}"/>
               </a:ext>
             </a:extLst>
           </p:cNvPr>
@@ -16337,7 +16337,7 @@
           <p:cNvPr id="7" name="">
             <a:extLst xmlns:a="http://schemas.openxmlformats.org/drawingml/2006/main">
               <a:ext uri="{FF2B5EF4-FFF2-40B4-BE49-F238E27FC236}">
-                <a16:creationId xmlns:a16="http://schemas.microsoft.com/office/drawing/2014/main" id="{8D07F077-D723-43F4-9E9E-7BDE7E85D27E}"/>
+                <a16:creationId xmlns:a16="http://schemas.microsoft.com/office/drawing/2014/main" id="{780DF1F3-4B74-4FB5-95CE-B9021615F5EB}"/>
               </a:ext>
             </a:extLst>
           </p:cNvPr>
@@ -16370,7 +16370,7 @@
           <p:cNvPr id="8" name="">
             <a:extLst xmlns:a="http://schemas.openxmlformats.org/drawingml/2006/main">
               <a:ext uri="{FF2B5EF4-FFF2-40B4-BE49-F238E27FC236}">
-                <a16:creationId xmlns:a16="http://schemas.microsoft.com/office/drawing/2014/main" id="{98A2F5BF-ED3C-48B1-A892-388E5709D779}"/>
+                <a16:creationId xmlns:a16="http://schemas.microsoft.com/office/drawing/2014/main" id="{AA72C2EE-C80D-4C1E-8B8B-828C8980F840}"/>
               </a:ext>
             </a:extLst>
           </p:cNvPr>
@@ -16405,7 +16405,7 @@
           <p:cNvPr id="9" name="">
             <a:extLst xmlns:a="http://schemas.openxmlformats.org/drawingml/2006/main">
               <a:ext uri="{FF2B5EF4-FFF2-40B4-BE49-F238E27FC236}">
-                <a16:creationId xmlns:a16="http://schemas.microsoft.com/office/drawing/2014/main" id="{04DEA1D5-E510-4916-8723-1422019D8E49}"/>
+                <a16:creationId xmlns:a16="http://schemas.microsoft.com/office/drawing/2014/main" id="{6A576529-CFFF-4743-84A4-733E10A17200}"/>
               </a:ext>
             </a:extLst>
           </p:cNvPr>
@@ -16436,7 +16436,7 @@
           <p:cNvPr id="10" name="">
             <a:extLst xmlns:a="http://schemas.openxmlformats.org/drawingml/2006/main">
               <a:ext uri="{FF2B5EF4-FFF2-40B4-BE49-F238E27FC236}">
-                <a16:creationId xmlns:a16="http://schemas.microsoft.com/office/drawing/2014/main" id="{5FEDE9EC-D29F-476E-A379-4CE8E6BCDE5A}"/>
+                <a16:creationId xmlns:a16="http://schemas.microsoft.com/office/drawing/2014/main" id="{BB13712B-430A-43D4-A4A7-9EF996BA8563}"/>
               </a:ext>
             </a:extLst>
           </p:cNvPr>
@@ -16498,7 +16498,7 @@
           <p:cNvPr id="11" name="">
             <a:extLst xmlns:a="http://schemas.openxmlformats.org/drawingml/2006/main">
               <a:ext uri="{FF2B5EF4-FFF2-40B4-BE49-F238E27FC236}">
-                <a16:creationId xmlns:a16="http://schemas.microsoft.com/office/drawing/2014/main" id="{C8CBC57A-EF6D-4485-A8FD-55FC4124C48C}"/>
+                <a16:creationId xmlns:a16="http://schemas.microsoft.com/office/drawing/2014/main" id="{18FC3BB2-8D0D-4323-A58C-757FBA422230}"/>
               </a:ext>
             </a:extLst>
           </p:cNvPr>
@@ -16560,7 +16560,7 @@
           <p:cNvPr id="12" name="">
             <a:extLst xmlns:a="http://schemas.openxmlformats.org/drawingml/2006/main">
               <a:ext uri="{FF2B5EF4-FFF2-40B4-BE49-F238E27FC236}">
-                <a16:creationId xmlns:a16="http://schemas.microsoft.com/office/drawing/2014/main" id="{914B62EC-CF47-4E4F-AB2C-A12FF9C19058}"/>
+                <a16:creationId xmlns:a16="http://schemas.microsoft.com/office/drawing/2014/main" id="{B09E2B3A-48AC-4169-8823-3BB2F5DA133C}"/>
               </a:ext>
             </a:extLst>
           </p:cNvPr>
@@ -16593,7 +16593,7 @@
           <p:cNvPr id="13" name="">
             <a:extLst xmlns:a="http://schemas.openxmlformats.org/drawingml/2006/main">
               <a:ext uri="{FF2B5EF4-FFF2-40B4-BE49-F238E27FC236}">
-                <a16:creationId xmlns:a16="http://schemas.microsoft.com/office/drawing/2014/main" id="{29271EE1-53BC-4B43-8254-FC26CC0546C8}"/>
+                <a16:creationId xmlns:a16="http://schemas.microsoft.com/office/drawing/2014/main" id="{6D08E0E7-9586-48A5-886E-D0B0930B338F}"/>
               </a:ext>
             </a:extLst>
           </p:cNvPr>
@@ -16628,7 +16628,7 @@
           <p:cNvPr id="14" name="">
             <a:extLst xmlns:a="http://schemas.openxmlformats.org/drawingml/2006/main">
               <a:ext uri="{FF2B5EF4-FFF2-40B4-BE49-F238E27FC236}">
-                <a16:creationId xmlns:a16="http://schemas.microsoft.com/office/drawing/2014/main" id="{A94669DD-D7D0-4935-A5F0-4D557598BA27}"/>
+                <a16:creationId xmlns:a16="http://schemas.microsoft.com/office/drawing/2014/main" id="{9632819E-1814-4D57-8BE7-E8ED02BA1B27}"/>
               </a:ext>
             </a:extLst>
           </p:cNvPr>
@@ -16659,7 +16659,7 @@
           <p:cNvPr id="15" name="">
             <a:extLst xmlns:a="http://schemas.openxmlformats.org/drawingml/2006/main">
               <a:ext uri="{FF2B5EF4-FFF2-40B4-BE49-F238E27FC236}">
-                <a16:creationId xmlns:a16="http://schemas.microsoft.com/office/drawing/2014/main" id="{58263114-EE13-4652-A8E9-2317E4B1D380}"/>
+                <a16:creationId xmlns:a16="http://schemas.microsoft.com/office/drawing/2014/main" id="{00100077-2BCC-4DEE-A0C7-45A4C61CF7CB}"/>
               </a:ext>
             </a:extLst>
           </p:cNvPr>
@@ -16721,7 +16721,7 @@
           <p:cNvPr id="16" name="">
             <a:extLst xmlns:a="http://schemas.openxmlformats.org/drawingml/2006/main">
               <a:ext uri="{FF2B5EF4-FFF2-40B4-BE49-F238E27FC236}">
-                <a16:creationId xmlns:a16="http://schemas.microsoft.com/office/drawing/2014/main" id="{DED0D5FC-5694-47B4-B808-C2B2D136B281}"/>
+                <a16:creationId xmlns:a16="http://schemas.microsoft.com/office/drawing/2014/main" id="{562A1249-5BC0-466E-AB21-AE5EA435FC3D}"/>
               </a:ext>
             </a:extLst>
           </p:cNvPr>
@@ -16783,7 +16783,7 @@
           <p:cNvPr id="17" name="">
             <a:extLst xmlns:a="http://schemas.openxmlformats.org/drawingml/2006/main">
               <a:ext uri="{FF2B5EF4-FFF2-40B4-BE49-F238E27FC236}">
-                <a16:creationId xmlns:a16="http://schemas.microsoft.com/office/drawing/2014/main" id="{6D194EB4-88C8-4269-9203-EAB2F602B26D}"/>
+                <a16:creationId xmlns:a16="http://schemas.microsoft.com/office/drawing/2014/main" id="{5A79FD41-D4B0-4D01-90BA-9F348D63D14A}"/>
               </a:ext>
             </a:extLst>
           </p:cNvPr>
@@ -16816,7 +16816,7 @@
           <p:cNvPr id="18" name="">
             <a:extLst xmlns:a="http://schemas.openxmlformats.org/drawingml/2006/main">
               <a:ext uri="{FF2B5EF4-FFF2-40B4-BE49-F238E27FC236}">
-                <a16:creationId xmlns:a16="http://schemas.microsoft.com/office/drawing/2014/main" id="{92951CFC-80E7-4E7A-B30C-B72DCD6994F1}"/>
+                <a16:creationId xmlns:a16="http://schemas.microsoft.com/office/drawing/2014/main" id="{351FDD47-BFA3-4711-BA41-BA76F6114491}"/>
               </a:ext>
             </a:extLst>
           </p:cNvPr>
@@ -16851,7 +16851,7 @@
           <p:cNvPr id="19" name="">
             <a:extLst xmlns:a="http://schemas.openxmlformats.org/drawingml/2006/main">
               <a:ext uri="{FF2B5EF4-FFF2-40B4-BE49-F238E27FC236}">
-                <a16:creationId xmlns:a16="http://schemas.microsoft.com/office/drawing/2014/main" id="{64A23626-8EDC-4B67-8208-5BC3CEEBC4C5}"/>
+                <a16:creationId xmlns:a16="http://schemas.microsoft.com/office/drawing/2014/main" id="{77C2A13C-038B-4755-8781-1541C40B961B}"/>
               </a:ext>
             </a:extLst>
           </p:cNvPr>
@@ -16882,7 +16882,7 @@
           <p:cNvPr id="20" name="">
             <a:extLst xmlns:a="http://schemas.openxmlformats.org/drawingml/2006/main">
               <a:ext uri="{FF2B5EF4-FFF2-40B4-BE49-F238E27FC236}">
-                <a16:creationId xmlns:a16="http://schemas.microsoft.com/office/drawing/2014/main" id="{29ABBECC-7EE7-4D1E-ADF8-2CA1F09B1A64}"/>
+                <a16:creationId xmlns:a16="http://schemas.microsoft.com/office/drawing/2014/main" id="{C56674B8-A52B-495E-89C9-B50768EB3E05}"/>
               </a:ext>
             </a:extLst>
           </p:cNvPr>
@@ -16944,7 +16944,7 @@
           <p:cNvPr id="21" name="">
             <a:extLst xmlns:a="http://schemas.openxmlformats.org/drawingml/2006/main">
               <a:ext uri="{FF2B5EF4-FFF2-40B4-BE49-F238E27FC236}">
-                <a16:creationId xmlns:a16="http://schemas.microsoft.com/office/drawing/2014/main" id="{A6BF9A62-09B6-4BFA-ABA4-40AE6C7AE0C7}"/>
+                <a16:creationId xmlns:a16="http://schemas.microsoft.com/office/drawing/2014/main" id="{EC6087BE-3C93-4131-B17D-BE032ACEA169}"/>
               </a:ext>
             </a:extLst>
           </p:cNvPr>
@@ -17006,7 +17006,7 @@
           <p:cNvPr id="22" name="">
             <a:extLst xmlns:a="http://schemas.openxmlformats.org/drawingml/2006/main">
               <a:ext uri="{FF2B5EF4-FFF2-40B4-BE49-F238E27FC236}">
-                <a16:creationId xmlns:a16="http://schemas.microsoft.com/office/drawing/2014/main" id="{A27829A2-0DC0-45C6-A1A5-D35F29F37E16}"/>
+                <a16:creationId xmlns:a16="http://schemas.microsoft.com/office/drawing/2014/main" id="{634215A6-13FD-474B-9E24-E57B7FC6AE25}"/>
               </a:ext>
             </a:extLst>
           </p:cNvPr>
@@ -17068,7 +17068,7 @@
           <p:cNvPr id="23" name="">
             <a:extLst xmlns:a="http://schemas.openxmlformats.org/drawingml/2006/main">
               <a:ext uri="{FF2B5EF4-FFF2-40B4-BE49-F238E27FC236}">
-                <a16:creationId xmlns:a16="http://schemas.microsoft.com/office/drawing/2014/main" id="{B56C025B-5308-4AF2-AB0B-8A622E538A60}"/>
+                <a16:creationId xmlns:a16="http://schemas.microsoft.com/office/drawing/2014/main" id="{D355E095-4E7D-420A-8E59-BDE16FDDAE64}"/>
               </a:ext>
             </a:extLst>
           </p:cNvPr>
@@ -17128,7 +17128,7 @@
     </p:spTree>
     <p:extLst>
       <p:ext uri="{BB962C8B-B14F-4D97-AF65-F5344CB8AC3E}">
-        <p14:creationId xmlns:p14="http://schemas.microsoft.com/office/powerpoint/2010/main" val="1459611668"/>
+        <p14:creationId xmlns:p14="http://schemas.microsoft.com/office/powerpoint/2010/main" val="928001559"/>
       </p:ext>
     </p:extLst>
   </p:cSld>
@@ -17156,7 +17156,7 @@
           <p:nvPr/>
         </p:nvPicPr>
         <p:blipFill>
-          <a:blip xmlns:r="http://schemas.openxmlformats.org/officeDocument/2006/relationships" xmlns:a="http://schemas.openxmlformats.org/drawingml/2006/main" r:embed="R88434b13a7814400"/>
+          <a:blip xmlns:r="http://schemas.openxmlformats.org/officeDocument/2006/relationships" xmlns:a="http://schemas.openxmlformats.org/drawingml/2006/main" r:embed="R82af54e50fd14128"/>
           <a:srcRect xmlns:a="http://schemas.openxmlformats.org/drawingml/2006/main" l="0" t="0" r="0" b="0"/>
           <a:stretch xmlns:a="http://schemas.openxmlformats.org/drawingml/2006/main">
             <a:fillRect l="0" t="0" r="0" b="0"/>
@@ -17177,7 +17177,7 @@
           <p:cNvPr id="2" name="">
             <a:extLst xmlns:a="http://schemas.openxmlformats.org/drawingml/2006/main">
               <a:ext uri="{FF2B5EF4-FFF2-40B4-BE49-F238E27FC236}">
-                <a16:creationId xmlns:a16="http://schemas.microsoft.com/office/drawing/2014/main" id="{B4CBD159-0233-49EE-96BC-4B157E64F7A5}"/>
+                <a16:creationId xmlns:a16="http://schemas.microsoft.com/office/drawing/2014/main" id="{2E194873-72F2-475C-B7F9-177DD05624EF}"/>
               </a:ext>
             </a:extLst>
           </p:cNvPr>
@@ -17239,7 +17239,7 @@
           <p:cNvPr id="3" name="">
             <a:extLst xmlns:a="http://schemas.openxmlformats.org/drawingml/2006/main">
               <a:ext uri="{FF2B5EF4-FFF2-40B4-BE49-F238E27FC236}">
-                <a16:creationId xmlns:a16="http://schemas.microsoft.com/office/drawing/2014/main" id="{55B9BDAF-A98C-4638-8678-1DC89E73E139}"/>
+                <a16:creationId xmlns:a16="http://schemas.microsoft.com/office/drawing/2014/main" id="{37532E9E-1BBC-4185-86D0-98E128A1CAA6}"/>
               </a:ext>
             </a:extLst>
           </p:cNvPr>
@@ -17301,7 +17301,7 @@
           <p:cNvPr id="4" name="">
             <a:extLst xmlns:a="http://schemas.openxmlformats.org/drawingml/2006/main">
               <a:ext uri="{FF2B5EF4-FFF2-40B4-BE49-F238E27FC236}">
-                <a16:creationId xmlns:a16="http://schemas.microsoft.com/office/drawing/2014/main" id="{4D9D52AA-84C4-4C30-8058-5DA0EA7AA930}"/>
+                <a16:creationId xmlns:a16="http://schemas.microsoft.com/office/drawing/2014/main" id="{90ACF4FA-593C-485F-B167-6C8319009447}"/>
               </a:ext>
             </a:extLst>
           </p:cNvPr>
@@ -17363,7 +17363,7 @@
           <p:cNvPr id="5" name="">
             <a:extLst xmlns:a="http://schemas.openxmlformats.org/drawingml/2006/main">
               <a:ext uri="{FF2B5EF4-FFF2-40B4-BE49-F238E27FC236}">
-                <a16:creationId xmlns:a16="http://schemas.microsoft.com/office/drawing/2014/main" id="{99D7AB55-56C0-4B7C-AC4B-680F73DE87DC}"/>
+                <a16:creationId xmlns:a16="http://schemas.microsoft.com/office/drawing/2014/main" id="{17BD2D0F-D46C-40BD-AA3E-E6033D812ED9}"/>
               </a:ext>
             </a:extLst>
           </p:cNvPr>
@@ -17394,7 +17394,7 @@
           <p:cNvPr id="6" name="">
             <a:extLst xmlns:a="http://schemas.openxmlformats.org/drawingml/2006/main">
               <a:ext uri="{FF2B5EF4-FFF2-40B4-BE49-F238E27FC236}">
-                <a16:creationId xmlns:a16="http://schemas.microsoft.com/office/drawing/2014/main" id="{B8953C66-A6F4-4204-B272-A4B445A63BF4}"/>
+                <a16:creationId xmlns:a16="http://schemas.microsoft.com/office/drawing/2014/main" id="{2DAF8ED8-8276-41DE-B137-42964C45398D}"/>
               </a:ext>
             </a:extLst>
           </p:cNvPr>
@@ -17456,7 +17456,7 @@
           <p:cNvPr id="7" name="">
             <a:extLst xmlns:a="http://schemas.openxmlformats.org/drawingml/2006/main">
               <a:ext uri="{FF2B5EF4-FFF2-40B4-BE49-F238E27FC236}">
-                <a16:creationId xmlns:a16="http://schemas.microsoft.com/office/drawing/2014/main" id="{2D2DE785-271B-439F-8706-972562560371}"/>
+                <a16:creationId xmlns:a16="http://schemas.microsoft.com/office/drawing/2014/main" id="{CC964454-BB15-4E6B-8A64-42B053419438}"/>
               </a:ext>
             </a:extLst>
           </p:cNvPr>
@@ -17489,7 +17489,7 @@
           <p:cNvPr id="8" name="">
             <a:extLst xmlns:a="http://schemas.openxmlformats.org/drawingml/2006/main">
               <a:ext uri="{FF2B5EF4-FFF2-40B4-BE49-F238E27FC236}">
-                <a16:creationId xmlns:a16="http://schemas.microsoft.com/office/drawing/2014/main" id="{4FADF805-7FF1-423B-97EF-E1B9EF1F52A1}"/>
+                <a16:creationId xmlns:a16="http://schemas.microsoft.com/office/drawing/2014/main" id="{74A9249C-183A-431C-B6AB-3CC16ABDABF7}"/>
               </a:ext>
             </a:extLst>
           </p:cNvPr>
@@ -17524,7 +17524,7 @@
           <p:cNvPr id="9" name="">
             <a:extLst xmlns:a="http://schemas.openxmlformats.org/drawingml/2006/main">
               <a:ext uri="{FF2B5EF4-FFF2-40B4-BE49-F238E27FC236}">
-                <a16:creationId xmlns:a16="http://schemas.microsoft.com/office/drawing/2014/main" id="{A4B14277-83C3-4C9F-A6EA-4541F40B2A72}"/>
+                <a16:creationId xmlns:a16="http://schemas.microsoft.com/office/drawing/2014/main" id="{A3498749-5FA6-4277-818F-470C83DBFE79}"/>
               </a:ext>
             </a:extLst>
           </p:cNvPr>
@@ -17555,7 +17555,7 @@
           <p:cNvPr id="10" name="">
             <a:extLst xmlns:a="http://schemas.openxmlformats.org/drawingml/2006/main">
               <a:ext uri="{FF2B5EF4-FFF2-40B4-BE49-F238E27FC236}">
-                <a16:creationId xmlns:a16="http://schemas.microsoft.com/office/drawing/2014/main" id="{58EE6D13-C502-4F39-8318-E88256D5D785}"/>
+                <a16:creationId xmlns:a16="http://schemas.microsoft.com/office/drawing/2014/main" id="{CD7EB224-8B8C-4E30-80FA-1192DADCE5A3}"/>
               </a:ext>
             </a:extLst>
           </p:cNvPr>
@@ -17617,7 +17617,7 @@
           <p:cNvPr id="11" name="">
             <a:extLst xmlns:a="http://schemas.openxmlformats.org/drawingml/2006/main">
               <a:ext uri="{FF2B5EF4-FFF2-40B4-BE49-F238E27FC236}">
-                <a16:creationId xmlns:a16="http://schemas.microsoft.com/office/drawing/2014/main" id="{36B876CB-D8CD-4AE3-8D12-14EBEC37497A}"/>
+                <a16:creationId xmlns:a16="http://schemas.microsoft.com/office/drawing/2014/main" id="{77957BD4-77C6-4F0C-B21B-9A9F73EC77C1}"/>
               </a:ext>
             </a:extLst>
           </p:cNvPr>
@@ -17679,7 +17679,7 @@
           <p:cNvPr id="12" name="">
             <a:extLst xmlns:a="http://schemas.openxmlformats.org/drawingml/2006/main">
               <a:ext uri="{FF2B5EF4-FFF2-40B4-BE49-F238E27FC236}">
-                <a16:creationId xmlns:a16="http://schemas.microsoft.com/office/drawing/2014/main" id="{0A820E40-859E-47B0-9161-BF111A1AD5DA}"/>
+                <a16:creationId xmlns:a16="http://schemas.microsoft.com/office/drawing/2014/main" id="{57B57EDE-AF7D-4305-A056-68C73BEF4911}"/>
               </a:ext>
             </a:extLst>
           </p:cNvPr>
@@ -17712,7 +17712,7 @@
           <p:cNvPr id="13" name="">
             <a:extLst xmlns:a="http://schemas.openxmlformats.org/drawingml/2006/main">
               <a:ext uri="{FF2B5EF4-FFF2-40B4-BE49-F238E27FC236}">
-                <a16:creationId xmlns:a16="http://schemas.microsoft.com/office/drawing/2014/main" id="{3E99848A-1D6E-4D33-B2DB-A4DB62093FFB}"/>
+                <a16:creationId xmlns:a16="http://schemas.microsoft.com/office/drawing/2014/main" id="{00E39E0C-EA8D-4667-9CB4-3BA6326793DC}"/>
               </a:ext>
             </a:extLst>
           </p:cNvPr>
@@ -17747,7 +17747,7 @@
           <p:cNvPr id="14" name="">
             <a:extLst xmlns:a="http://schemas.openxmlformats.org/drawingml/2006/main">
               <a:ext uri="{FF2B5EF4-FFF2-40B4-BE49-F238E27FC236}">
-                <a16:creationId xmlns:a16="http://schemas.microsoft.com/office/drawing/2014/main" id="{55CDC760-916B-4C14-9D78-BA70CAE669B7}"/>
+                <a16:creationId xmlns:a16="http://schemas.microsoft.com/office/drawing/2014/main" id="{3DC11C1F-CF42-4031-BD4D-6556D3EDE4D6}"/>
               </a:ext>
             </a:extLst>
           </p:cNvPr>
@@ -17778,7 +17778,7 @@
           <p:cNvPr id="15" name="">
             <a:extLst xmlns:a="http://schemas.openxmlformats.org/drawingml/2006/main">
               <a:ext uri="{FF2B5EF4-FFF2-40B4-BE49-F238E27FC236}">
-                <a16:creationId xmlns:a16="http://schemas.microsoft.com/office/drawing/2014/main" id="{6BE280C5-8669-4FBF-A516-BFFAFF31561A}"/>
+                <a16:creationId xmlns:a16="http://schemas.microsoft.com/office/drawing/2014/main" id="{A6F26B14-08C0-4C1A-AA4F-903344866D68}"/>
               </a:ext>
             </a:extLst>
           </p:cNvPr>
@@ -17840,7 +17840,7 @@
           <p:cNvPr id="16" name="">
             <a:extLst xmlns:a="http://schemas.openxmlformats.org/drawingml/2006/main">
               <a:ext uri="{FF2B5EF4-FFF2-40B4-BE49-F238E27FC236}">
-                <a16:creationId xmlns:a16="http://schemas.microsoft.com/office/drawing/2014/main" id="{DB35E917-8831-4537-ACB5-FAA536D464CD}"/>
+                <a16:creationId xmlns:a16="http://schemas.microsoft.com/office/drawing/2014/main" id="{F8253476-6808-4CF7-82A2-7E424E43BD9A}"/>
               </a:ext>
             </a:extLst>
           </p:cNvPr>
@@ -17902,7 +17902,7 @@
           <p:cNvPr id="17" name="">
             <a:extLst xmlns:a="http://schemas.openxmlformats.org/drawingml/2006/main">
               <a:ext uri="{FF2B5EF4-FFF2-40B4-BE49-F238E27FC236}">
-                <a16:creationId xmlns:a16="http://schemas.microsoft.com/office/drawing/2014/main" id="{5F80E9DE-AA2E-4BF5-B0D6-057BA322D743}"/>
+                <a16:creationId xmlns:a16="http://schemas.microsoft.com/office/drawing/2014/main" id="{3272FBAC-6D84-474B-B154-79E1B9CB5954}"/>
               </a:ext>
             </a:extLst>
           </p:cNvPr>
@@ -17964,7 +17964,7 @@
           <p:cNvPr id="18" name="">
             <a:extLst xmlns:a="http://schemas.openxmlformats.org/drawingml/2006/main">
               <a:ext uri="{FF2B5EF4-FFF2-40B4-BE49-F238E27FC236}">
-                <a16:creationId xmlns:a16="http://schemas.microsoft.com/office/drawing/2014/main" id="{E6A571D8-6B44-44FD-97D7-69C72FA51A74}"/>
+                <a16:creationId xmlns:a16="http://schemas.microsoft.com/office/drawing/2014/main" id="{D6326DDE-7FCB-423A-A2F0-E1B6676317FB}"/>
               </a:ext>
             </a:extLst>
           </p:cNvPr>
@@ -18024,7 +18024,7 @@
     </p:spTree>
     <p:extLst>
       <p:ext uri="{BB962C8B-B14F-4D97-AF65-F5344CB8AC3E}">
-        <p14:creationId xmlns:p14="http://schemas.microsoft.com/office/powerpoint/2010/main" val="1236577835"/>
+        <p14:creationId xmlns:p14="http://schemas.microsoft.com/office/powerpoint/2010/main" val="1261487897"/>
       </p:ext>
     </p:extLst>
   </p:cSld>
@@ -18052,7 +18052,7 @@
           <p:nvPr/>
         </p:nvPicPr>
         <p:blipFill>
-          <a:blip xmlns:r="http://schemas.openxmlformats.org/officeDocument/2006/relationships" xmlns:a="http://schemas.openxmlformats.org/drawingml/2006/main" r:embed="R83881609231e4078"/>
+          <a:blip xmlns:r="http://schemas.openxmlformats.org/officeDocument/2006/relationships" xmlns:a="http://schemas.openxmlformats.org/drawingml/2006/main" r:embed="Ra3bca7b928724c52"/>
           <a:srcRect xmlns:a="http://schemas.openxmlformats.org/drawingml/2006/main" l="0" t="0" r="0" b="0"/>
           <a:stretch xmlns:a="http://schemas.openxmlformats.org/drawingml/2006/main">
             <a:fillRect l="0" t="0" r="0" b="0"/>
@@ -18073,7 +18073,7 @@
           <p:cNvPr id="2" name="">
             <a:extLst xmlns:a="http://schemas.openxmlformats.org/drawingml/2006/main">
               <a:ext uri="{FF2B5EF4-FFF2-40B4-BE49-F238E27FC236}">
-                <a16:creationId xmlns:a16="http://schemas.microsoft.com/office/drawing/2014/main" id="{02F7B92B-8EA2-4D22-8F42-48BBF41390E8}"/>
+                <a16:creationId xmlns:a16="http://schemas.microsoft.com/office/drawing/2014/main" id="{65675B11-253B-4F1D-8FA2-D9DD7C154CDC}"/>
               </a:ext>
             </a:extLst>
           </p:cNvPr>
@@ -18135,7 +18135,7 @@
           <p:cNvPr id="3" name="">
             <a:extLst xmlns:a="http://schemas.openxmlformats.org/drawingml/2006/main">
               <a:ext uri="{FF2B5EF4-FFF2-40B4-BE49-F238E27FC236}">
-                <a16:creationId xmlns:a16="http://schemas.microsoft.com/office/drawing/2014/main" id="{6A0A8EB7-6048-4780-8DDB-58D7AEB1ABC1}"/>
+                <a16:creationId xmlns:a16="http://schemas.microsoft.com/office/drawing/2014/main" id="{862B12E8-7D1E-472C-BBED-3D06C6AAF784}"/>
               </a:ext>
             </a:extLst>
           </p:cNvPr>
@@ -18197,7 +18197,7 @@
           <p:cNvPr id="4" name="">
             <a:extLst xmlns:a="http://schemas.openxmlformats.org/drawingml/2006/main">
               <a:ext uri="{FF2B5EF4-FFF2-40B4-BE49-F238E27FC236}">
-                <a16:creationId xmlns:a16="http://schemas.microsoft.com/office/drawing/2014/main" id="{739530A6-F24B-48FA-8C77-0393A57455EF}"/>
+                <a16:creationId xmlns:a16="http://schemas.microsoft.com/office/drawing/2014/main" id="{96BD3927-19EB-4C1C-85C3-CE0F181FDC2D}"/>
               </a:ext>
             </a:extLst>
           </p:cNvPr>
@@ -18259,7 +18259,7 @@
           <p:cNvPr id="5" name="">
             <a:extLst xmlns:a="http://schemas.openxmlformats.org/drawingml/2006/main">
               <a:ext uri="{FF2B5EF4-FFF2-40B4-BE49-F238E27FC236}">
-                <a16:creationId xmlns:a16="http://schemas.microsoft.com/office/drawing/2014/main" id="{FF92AC43-EFFB-40B6-ADDD-64A8707B45CA}"/>
+                <a16:creationId xmlns:a16="http://schemas.microsoft.com/office/drawing/2014/main" id="{8DA1AF62-B44C-4CA7-A89A-BCC71E44B262}"/>
               </a:ext>
             </a:extLst>
           </p:cNvPr>
@@ -18290,7 +18290,7 @@
           <p:cNvPr id="6" name="">
             <a:extLst xmlns:a="http://schemas.openxmlformats.org/drawingml/2006/main">
               <a:ext uri="{FF2B5EF4-FFF2-40B4-BE49-F238E27FC236}">
-                <a16:creationId xmlns:a16="http://schemas.microsoft.com/office/drawing/2014/main" id="{5E58B5EA-07F2-4162-9345-38EBCDC560B5}"/>
+                <a16:creationId xmlns:a16="http://schemas.microsoft.com/office/drawing/2014/main" id="{EE9DEC28-95A6-449D-9EBB-7EADD8D0FC76}"/>
               </a:ext>
             </a:extLst>
           </p:cNvPr>
@@ -18352,7 +18352,7 @@
           <p:cNvPr id="7" name="">
             <a:extLst xmlns:a="http://schemas.openxmlformats.org/drawingml/2006/main">
               <a:ext uri="{FF2B5EF4-FFF2-40B4-BE49-F238E27FC236}">
-                <a16:creationId xmlns:a16="http://schemas.microsoft.com/office/drawing/2014/main" id="{0C11F60D-EE9A-431F-AE76-9C2C9D3C93FD}"/>
+                <a16:creationId xmlns:a16="http://schemas.microsoft.com/office/drawing/2014/main" id="{6496D633-65C2-408E-9F76-FA7146A7BE8A}"/>
               </a:ext>
             </a:extLst>
           </p:cNvPr>
@@ -18385,7 +18385,7 @@
           <p:cNvPr id="8" name="">
             <a:extLst xmlns:a="http://schemas.openxmlformats.org/drawingml/2006/main">
               <a:ext uri="{FF2B5EF4-FFF2-40B4-BE49-F238E27FC236}">
-                <a16:creationId xmlns:a16="http://schemas.microsoft.com/office/drawing/2014/main" id="{4352BE15-FBC3-425C-ACA6-6FCA1B43E05C}"/>
+                <a16:creationId xmlns:a16="http://schemas.microsoft.com/office/drawing/2014/main" id="{BA2FF48D-C164-452A-A55D-13AE2B282306}"/>
               </a:ext>
             </a:extLst>
           </p:cNvPr>
@@ -18420,7 +18420,7 @@
           <p:cNvPr id="9" name="">
             <a:extLst xmlns:a="http://schemas.openxmlformats.org/drawingml/2006/main">
               <a:ext uri="{FF2B5EF4-FFF2-40B4-BE49-F238E27FC236}">
-                <a16:creationId xmlns:a16="http://schemas.microsoft.com/office/drawing/2014/main" id="{F9A4718B-5430-42D2-A036-35914E3CC868}"/>
+                <a16:creationId xmlns:a16="http://schemas.microsoft.com/office/drawing/2014/main" id="{779E8143-2B3C-486B-A2FC-305929A43F48}"/>
               </a:ext>
             </a:extLst>
           </p:cNvPr>
@@ -18451,7 +18451,7 @@
           <p:cNvPr id="10" name="">
             <a:extLst xmlns:a="http://schemas.openxmlformats.org/drawingml/2006/main">
               <a:ext uri="{FF2B5EF4-FFF2-40B4-BE49-F238E27FC236}">
-                <a16:creationId xmlns:a16="http://schemas.microsoft.com/office/drawing/2014/main" id="{9BED4D00-61CE-4B64-8DC0-9E1005549647}"/>
+                <a16:creationId xmlns:a16="http://schemas.microsoft.com/office/drawing/2014/main" id="{AEE47E80-4E79-4050-ADC8-24EB8D4DCA98}"/>
               </a:ext>
             </a:extLst>
           </p:cNvPr>
@@ -18513,7 +18513,7 @@
           <p:cNvPr id="11" name="">
             <a:extLst xmlns:a="http://schemas.openxmlformats.org/drawingml/2006/main">
               <a:ext uri="{FF2B5EF4-FFF2-40B4-BE49-F238E27FC236}">
-                <a16:creationId xmlns:a16="http://schemas.microsoft.com/office/drawing/2014/main" id="{4A4B553F-3D27-4455-B8F0-2C85C0869B13}"/>
+                <a16:creationId xmlns:a16="http://schemas.microsoft.com/office/drawing/2014/main" id="{A7C87E14-635D-4FD7-A3A8-7A2BCCC0BBDA}"/>
               </a:ext>
             </a:extLst>
           </p:cNvPr>
@@ -18575,7 +18575,7 @@
           <p:cNvPr id="12" name="">
             <a:extLst xmlns:a="http://schemas.openxmlformats.org/drawingml/2006/main">
               <a:ext uri="{FF2B5EF4-FFF2-40B4-BE49-F238E27FC236}">
-                <a16:creationId xmlns:a16="http://schemas.microsoft.com/office/drawing/2014/main" id="{D7DB3BC9-9657-465C-B33B-2AD2F0133F18}"/>
+                <a16:creationId xmlns:a16="http://schemas.microsoft.com/office/drawing/2014/main" id="{1AD062F4-DEF9-4001-9393-8ADF10797A7A}"/>
               </a:ext>
             </a:extLst>
           </p:cNvPr>
@@ -18637,7 +18637,7 @@
           <p:cNvPr id="13" name="">
             <a:extLst xmlns:a="http://schemas.openxmlformats.org/drawingml/2006/main">
               <a:ext uri="{FF2B5EF4-FFF2-40B4-BE49-F238E27FC236}">
-                <a16:creationId xmlns:a16="http://schemas.microsoft.com/office/drawing/2014/main" id="{BC20609A-0D31-4EE2-8EAC-1B570D195445}"/>
+                <a16:creationId xmlns:a16="http://schemas.microsoft.com/office/drawing/2014/main" id="{914CF739-7B9F-452F-985C-E3247A1424D1}"/>
               </a:ext>
             </a:extLst>
           </p:cNvPr>
@@ -18670,7 +18670,7 @@
           <p:cNvPr id="14" name="">
             <a:extLst xmlns:a="http://schemas.openxmlformats.org/drawingml/2006/main">
               <a:ext uri="{FF2B5EF4-FFF2-40B4-BE49-F238E27FC236}">
-                <a16:creationId xmlns:a16="http://schemas.microsoft.com/office/drawing/2014/main" id="{580A9B4D-D63A-4117-B099-5CAF22F8C412}"/>
+                <a16:creationId xmlns:a16="http://schemas.microsoft.com/office/drawing/2014/main" id="{BFA115B8-952A-41C8-8AF6-F951F146F7DD}"/>
               </a:ext>
             </a:extLst>
           </p:cNvPr>
@@ -18705,7 +18705,7 @@
           <p:cNvPr id="15" name="">
             <a:extLst xmlns:a="http://schemas.openxmlformats.org/drawingml/2006/main">
               <a:ext uri="{FF2B5EF4-FFF2-40B4-BE49-F238E27FC236}">
-                <a16:creationId xmlns:a16="http://schemas.microsoft.com/office/drawing/2014/main" id="{8DACED72-58B5-4F30-BFAA-6C6FD7156451}"/>
+                <a16:creationId xmlns:a16="http://schemas.microsoft.com/office/drawing/2014/main" id="{4A957F9B-1245-4841-A61F-A24F5C382821}"/>
               </a:ext>
             </a:extLst>
           </p:cNvPr>
@@ -18736,7 +18736,7 @@
           <p:cNvPr id="16" name="">
             <a:extLst xmlns:a="http://schemas.openxmlformats.org/drawingml/2006/main">
               <a:ext uri="{FF2B5EF4-FFF2-40B4-BE49-F238E27FC236}">
-                <a16:creationId xmlns:a16="http://schemas.microsoft.com/office/drawing/2014/main" id="{EB5CE836-1472-424B-89F2-12F00ECE4CC8}"/>
+                <a16:creationId xmlns:a16="http://schemas.microsoft.com/office/drawing/2014/main" id="{0AF6DFEC-7749-44E5-B93F-1346D23AECB2}"/>
               </a:ext>
             </a:extLst>
           </p:cNvPr>
@@ -18798,7 +18798,7 @@
           <p:cNvPr id="17" name="">
             <a:extLst xmlns:a="http://schemas.openxmlformats.org/drawingml/2006/main">
               <a:ext uri="{FF2B5EF4-FFF2-40B4-BE49-F238E27FC236}">
-                <a16:creationId xmlns:a16="http://schemas.microsoft.com/office/drawing/2014/main" id="{844C5FE4-5C49-4B0C-8CD4-734034E266CD}"/>
+                <a16:creationId xmlns:a16="http://schemas.microsoft.com/office/drawing/2014/main" id="{D7EA01F6-11C2-49A5-ADFD-C891ED2B0BA1}"/>
               </a:ext>
             </a:extLst>
           </p:cNvPr>
@@ -18860,7 +18860,7 @@
           <p:cNvPr id="18" name="">
             <a:extLst xmlns:a="http://schemas.openxmlformats.org/drawingml/2006/main">
               <a:ext uri="{FF2B5EF4-FFF2-40B4-BE49-F238E27FC236}">
-                <a16:creationId xmlns:a16="http://schemas.microsoft.com/office/drawing/2014/main" id="{662EC7E4-9CFF-4F21-84FF-5953C30800D2}"/>
+                <a16:creationId xmlns:a16="http://schemas.microsoft.com/office/drawing/2014/main" id="{8B1D40FB-9C32-4301-8A9E-45F438CDD932}"/>
               </a:ext>
             </a:extLst>
           </p:cNvPr>
@@ -18922,7 +18922,7 @@
           <p:cNvPr id="19" name="">
             <a:extLst xmlns:a="http://schemas.openxmlformats.org/drawingml/2006/main">
               <a:ext uri="{FF2B5EF4-FFF2-40B4-BE49-F238E27FC236}">
-                <a16:creationId xmlns:a16="http://schemas.microsoft.com/office/drawing/2014/main" id="{3504CF55-5F15-496C-AA84-96B825775BA0}"/>
+                <a16:creationId xmlns:a16="http://schemas.microsoft.com/office/drawing/2014/main" id="{231B196F-152F-4295-824D-C6458991AA9E}"/>
               </a:ext>
             </a:extLst>
           </p:cNvPr>
@@ -18955,7 +18955,7 @@
           <p:cNvPr id="20" name="">
             <a:extLst xmlns:a="http://schemas.openxmlformats.org/drawingml/2006/main">
               <a:ext uri="{FF2B5EF4-FFF2-40B4-BE49-F238E27FC236}">
-                <a16:creationId xmlns:a16="http://schemas.microsoft.com/office/drawing/2014/main" id="{497A78A3-2595-44EC-8AA8-E552E8F071C3}"/>
+                <a16:creationId xmlns:a16="http://schemas.microsoft.com/office/drawing/2014/main" id="{4A0B2781-EECA-4012-8022-6E5FF497BBD3}"/>
               </a:ext>
             </a:extLst>
           </p:cNvPr>
@@ -18990,7 +18990,7 @@
           <p:cNvPr id="21" name="">
             <a:extLst xmlns:a="http://schemas.openxmlformats.org/drawingml/2006/main">
               <a:ext uri="{FF2B5EF4-FFF2-40B4-BE49-F238E27FC236}">
-                <a16:creationId xmlns:a16="http://schemas.microsoft.com/office/drawing/2014/main" id="{6D50989D-92CE-4949-B54E-901847A8CF0B}"/>
+                <a16:creationId xmlns:a16="http://schemas.microsoft.com/office/drawing/2014/main" id="{496299BA-B22E-47BE-93E2-22C71E74B3CE}"/>
               </a:ext>
             </a:extLst>
           </p:cNvPr>
@@ -19021,7 +19021,7 @@
           <p:cNvPr id="22" name="">
             <a:extLst xmlns:a="http://schemas.openxmlformats.org/drawingml/2006/main">
               <a:ext uri="{FF2B5EF4-FFF2-40B4-BE49-F238E27FC236}">
-                <a16:creationId xmlns:a16="http://schemas.microsoft.com/office/drawing/2014/main" id="{99AF3ECB-824E-4CDC-9F8B-EDA6789AE3AE}"/>
+                <a16:creationId xmlns:a16="http://schemas.microsoft.com/office/drawing/2014/main" id="{9C976E50-6765-4B45-AE5D-821C7906EB2D}"/>
               </a:ext>
             </a:extLst>
           </p:cNvPr>
@@ -19083,7 +19083,7 @@
           <p:cNvPr id="23" name="">
             <a:extLst xmlns:a="http://schemas.openxmlformats.org/drawingml/2006/main">
               <a:ext uri="{FF2B5EF4-FFF2-40B4-BE49-F238E27FC236}">
-                <a16:creationId xmlns:a16="http://schemas.microsoft.com/office/drawing/2014/main" id="{25490B6F-7CCE-493D-A3AC-01649CF5A613}"/>
+                <a16:creationId xmlns:a16="http://schemas.microsoft.com/office/drawing/2014/main" id="{6F936A75-2AAD-4DE0-9478-42AFF40904BC}"/>
               </a:ext>
             </a:extLst>
           </p:cNvPr>
@@ -19145,7 +19145,7 @@
           <p:cNvPr id="24" name="">
             <a:extLst xmlns:a="http://schemas.openxmlformats.org/drawingml/2006/main">
               <a:ext uri="{FF2B5EF4-FFF2-40B4-BE49-F238E27FC236}">
-                <a16:creationId xmlns:a16="http://schemas.microsoft.com/office/drawing/2014/main" id="{07C94B99-20EA-4793-8FF8-618E31468DF1}"/>
+                <a16:creationId xmlns:a16="http://schemas.microsoft.com/office/drawing/2014/main" id="{548BF3C8-462B-498D-BA3A-84E1D9D5864E}"/>
               </a:ext>
             </a:extLst>
           </p:cNvPr>
@@ -19207,7 +19207,7 @@
           <p:cNvPr id="25" name="">
             <a:extLst xmlns:a="http://schemas.openxmlformats.org/drawingml/2006/main">
               <a:ext uri="{FF2B5EF4-FFF2-40B4-BE49-F238E27FC236}">
-                <a16:creationId xmlns:a16="http://schemas.microsoft.com/office/drawing/2014/main" id="{AF995CC5-D6E8-4719-BADE-70051A60BA31}"/>
+                <a16:creationId xmlns:a16="http://schemas.microsoft.com/office/drawing/2014/main" id="{6A9C8AA1-4F0E-4E38-A383-40D0D61AC850}"/>
               </a:ext>
             </a:extLst>
           </p:cNvPr>
@@ -19240,7 +19240,7 @@
           <p:cNvPr id="26" name="">
             <a:extLst xmlns:a="http://schemas.openxmlformats.org/drawingml/2006/main">
               <a:ext uri="{FF2B5EF4-FFF2-40B4-BE49-F238E27FC236}">
-                <a16:creationId xmlns:a16="http://schemas.microsoft.com/office/drawing/2014/main" id="{85D813C1-0C63-4C95-82E1-6811EC03B930}"/>
+                <a16:creationId xmlns:a16="http://schemas.microsoft.com/office/drawing/2014/main" id="{07EBAFA2-B0EC-471E-891C-F3B2E8BBF4EC}"/>
               </a:ext>
             </a:extLst>
           </p:cNvPr>
@@ -19275,7 +19275,7 @@
           <p:cNvPr id="27" name="">
             <a:extLst xmlns:a="http://schemas.openxmlformats.org/drawingml/2006/main">
               <a:ext uri="{FF2B5EF4-FFF2-40B4-BE49-F238E27FC236}">
-                <a16:creationId xmlns:a16="http://schemas.microsoft.com/office/drawing/2014/main" id="{E263190E-EBCA-43BB-876B-181D085ECC66}"/>
+                <a16:creationId xmlns:a16="http://schemas.microsoft.com/office/drawing/2014/main" id="{1CBEC5D5-38B7-4C23-9520-2796922C3683}"/>
               </a:ext>
             </a:extLst>
           </p:cNvPr>
@@ -19306,7 +19306,7 @@
           <p:cNvPr id="28" name="">
             <a:extLst xmlns:a="http://schemas.openxmlformats.org/drawingml/2006/main">
               <a:ext uri="{FF2B5EF4-FFF2-40B4-BE49-F238E27FC236}">
-                <a16:creationId xmlns:a16="http://schemas.microsoft.com/office/drawing/2014/main" id="{B4CD9E9E-E7BD-4B21-B811-46B534254ED1}"/>
+                <a16:creationId xmlns:a16="http://schemas.microsoft.com/office/drawing/2014/main" id="{16BC10E6-A494-4451-A00E-6D2BF0AB7862}"/>
               </a:ext>
             </a:extLst>
           </p:cNvPr>
@@ -19368,7 +19368,7 @@
           <p:cNvPr id="29" name="">
             <a:extLst xmlns:a="http://schemas.openxmlformats.org/drawingml/2006/main">
               <a:ext uri="{FF2B5EF4-FFF2-40B4-BE49-F238E27FC236}">
-                <a16:creationId xmlns:a16="http://schemas.microsoft.com/office/drawing/2014/main" id="{C8C66A1A-AFAD-41D7-9FDA-15BCFF2D3A9B}"/>
+                <a16:creationId xmlns:a16="http://schemas.microsoft.com/office/drawing/2014/main" id="{94437635-06E7-4154-BA0D-0D8A584EEB98}"/>
               </a:ext>
             </a:extLst>
           </p:cNvPr>
@@ -19430,7 +19430,7 @@
           <p:cNvPr id="30" name="">
             <a:extLst xmlns:a="http://schemas.openxmlformats.org/drawingml/2006/main">
               <a:ext uri="{FF2B5EF4-FFF2-40B4-BE49-F238E27FC236}">
-                <a16:creationId xmlns:a16="http://schemas.microsoft.com/office/drawing/2014/main" id="{E721D191-4D04-41DA-A702-A698706DF905}"/>
+                <a16:creationId xmlns:a16="http://schemas.microsoft.com/office/drawing/2014/main" id="{EE784FB4-6E4F-4C7E-8AC6-19F91D036E81}"/>
               </a:ext>
             </a:extLst>
           </p:cNvPr>
@@ -19492,7 +19492,7 @@
           <p:cNvPr id="31" name="">
             <a:extLst xmlns:a="http://schemas.openxmlformats.org/drawingml/2006/main">
               <a:ext uri="{FF2B5EF4-FFF2-40B4-BE49-F238E27FC236}">
-                <a16:creationId xmlns:a16="http://schemas.microsoft.com/office/drawing/2014/main" id="{8D982C7C-1DF9-404A-AFAC-B41158ED41A5}"/>
+                <a16:creationId xmlns:a16="http://schemas.microsoft.com/office/drawing/2014/main" id="{710A9E82-0CE8-4545-AB38-1BD55F259423}"/>
               </a:ext>
             </a:extLst>
           </p:cNvPr>
@@ -19554,7 +19554,7 @@
           <p:cNvPr id="32" name="">
             <a:extLst xmlns:a="http://schemas.openxmlformats.org/drawingml/2006/main">
               <a:ext uri="{FF2B5EF4-FFF2-40B4-BE49-F238E27FC236}">
-                <a16:creationId xmlns:a16="http://schemas.microsoft.com/office/drawing/2014/main" id="{C444BF07-800D-4EFF-B9F5-7D03CE41ADDA}"/>
+                <a16:creationId xmlns:a16="http://schemas.microsoft.com/office/drawing/2014/main" id="{28A0A784-FF01-4CF8-A0AB-1C31180A1B8A}"/>
               </a:ext>
             </a:extLst>
           </p:cNvPr>
@@ -19614,7 +19614,7 @@
     </p:spTree>
     <p:extLst>
       <p:ext uri="{BB962C8B-B14F-4D97-AF65-F5344CB8AC3E}">
-        <p14:creationId xmlns:p14="http://schemas.microsoft.com/office/powerpoint/2010/main" val="1251066539"/>
+        <p14:creationId xmlns:p14="http://schemas.microsoft.com/office/powerpoint/2010/main" val="1681058095"/>
       </p:ext>
     </p:extLst>
   </p:cSld>
@@ -19642,7 +19642,7 @@
           <p:nvPr/>
         </p:nvPicPr>
         <p:blipFill>
-          <a:blip xmlns:r="http://schemas.openxmlformats.org/officeDocument/2006/relationships" xmlns:a="http://schemas.openxmlformats.org/drawingml/2006/main" r:embed="R50331900b25747e1"/>
+          <a:blip xmlns:r="http://schemas.openxmlformats.org/officeDocument/2006/relationships" xmlns:a="http://schemas.openxmlformats.org/drawingml/2006/main" r:embed="R60229e008297465c"/>
           <a:srcRect xmlns:a="http://schemas.openxmlformats.org/drawingml/2006/main" l="0" t="0" r="0" b="0"/>
           <a:stretch xmlns:a="http://schemas.openxmlformats.org/drawingml/2006/main">
             <a:fillRect l="0" t="0" r="0" b="0"/>
@@ -19663,7 +19663,7 @@
           <p:cNvPr id="2" name="">
             <a:extLst xmlns:a="http://schemas.openxmlformats.org/drawingml/2006/main">
               <a:ext uri="{FF2B5EF4-FFF2-40B4-BE49-F238E27FC236}">
-                <a16:creationId xmlns:a16="http://schemas.microsoft.com/office/drawing/2014/main" id="{896E9DEB-FE65-4060-91F9-CF4105C9A487}"/>
+                <a16:creationId xmlns:a16="http://schemas.microsoft.com/office/drawing/2014/main" id="{89F772CF-58E4-4BA2-B682-EFADC4725170}"/>
               </a:ext>
             </a:extLst>
           </p:cNvPr>
@@ -19725,7 +19725,7 @@
           <p:cNvPr id="3" name="">
             <a:extLst xmlns:a="http://schemas.openxmlformats.org/drawingml/2006/main">
               <a:ext uri="{FF2B5EF4-FFF2-40B4-BE49-F238E27FC236}">
-                <a16:creationId xmlns:a16="http://schemas.microsoft.com/office/drawing/2014/main" id="{6037003F-E574-42D1-A5E6-AB3BDE982B6E}"/>
+                <a16:creationId xmlns:a16="http://schemas.microsoft.com/office/drawing/2014/main" id="{4A5FE069-45F4-4578-8A93-219123F28059}"/>
               </a:ext>
             </a:extLst>
           </p:cNvPr>
@@ -19787,7 +19787,7 @@
           <p:cNvPr id="4" name="">
             <a:extLst xmlns:a="http://schemas.openxmlformats.org/drawingml/2006/main">
               <a:ext uri="{FF2B5EF4-FFF2-40B4-BE49-F238E27FC236}">
-                <a16:creationId xmlns:a16="http://schemas.microsoft.com/office/drawing/2014/main" id="{4522A48C-F343-478B-B1DC-3B3CA0F8A6AA}"/>
+                <a16:creationId xmlns:a16="http://schemas.microsoft.com/office/drawing/2014/main" id="{5FF6CADF-8F3D-4CEA-8718-AA91A3F309BA}"/>
               </a:ext>
             </a:extLst>
           </p:cNvPr>
@@ -19849,7 +19849,7 @@
           <p:cNvPr id="5" name="">
             <a:extLst xmlns:a="http://schemas.openxmlformats.org/drawingml/2006/main">
               <a:ext uri="{FF2B5EF4-FFF2-40B4-BE49-F238E27FC236}">
-                <a16:creationId xmlns:a16="http://schemas.microsoft.com/office/drawing/2014/main" id="{EEBC5CB4-AF32-422F-A05C-39FC81BE6310}"/>
+                <a16:creationId xmlns:a16="http://schemas.microsoft.com/office/drawing/2014/main" id="{43629AFC-DD3E-46B1-A3F0-B28BFECFBEE1}"/>
               </a:ext>
             </a:extLst>
           </p:cNvPr>
@@ -19880,7 +19880,7 @@
           <p:cNvPr id="6" name="">
             <a:extLst xmlns:a="http://schemas.openxmlformats.org/drawingml/2006/main">
               <a:ext uri="{FF2B5EF4-FFF2-40B4-BE49-F238E27FC236}">
-                <a16:creationId xmlns:a16="http://schemas.microsoft.com/office/drawing/2014/main" id="{CFE3D03B-E172-46A0-A56E-772C45E72316}"/>
+                <a16:creationId xmlns:a16="http://schemas.microsoft.com/office/drawing/2014/main" id="{DE224A96-2960-4963-B044-99537649B24E}"/>
               </a:ext>
             </a:extLst>
           </p:cNvPr>
@@ -19942,7 +19942,7 @@
           <p:cNvPr id="7" name="">
             <a:extLst xmlns:a="http://schemas.openxmlformats.org/drawingml/2006/main">
               <a:ext uri="{FF2B5EF4-FFF2-40B4-BE49-F238E27FC236}">
-                <a16:creationId xmlns:a16="http://schemas.microsoft.com/office/drawing/2014/main" id="{CB9C9581-F22A-40AC-859B-6E17C242C6AF}"/>
+                <a16:creationId xmlns:a16="http://schemas.microsoft.com/office/drawing/2014/main" id="{5A27332D-06A9-4562-B2A6-7C1628F4AA65}"/>
               </a:ext>
             </a:extLst>
           </p:cNvPr>
@@ -19975,7 +19975,7 @@
           <p:cNvPr id="8" name="">
             <a:extLst xmlns:a="http://schemas.openxmlformats.org/drawingml/2006/main">
               <a:ext uri="{FF2B5EF4-FFF2-40B4-BE49-F238E27FC236}">
-                <a16:creationId xmlns:a16="http://schemas.microsoft.com/office/drawing/2014/main" id="{44BCFEC1-FF47-4A1D-A58E-F09947554F69}"/>
+                <a16:creationId xmlns:a16="http://schemas.microsoft.com/office/drawing/2014/main" id="{9B817F8F-1876-47F1-8A25-20ECFFDAE88E}"/>
               </a:ext>
             </a:extLst>
           </p:cNvPr>
@@ -20010,7 +20010,7 @@
           <p:cNvPr id="9" name="">
             <a:extLst xmlns:a="http://schemas.openxmlformats.org/drawingml/2006/main">
               <a:ext uri="{FF2B5EF4-FFF2-40B4-BE49-F238E27FC236}">
-                <a16:creationId xmlns:a16="http://schemas.microsoft.com/office/drawing/2014/main" id="{4532944B-7CA5-49E4-B630-7C62DA74FE82}"/>
+                <a16:creationId xmlns:a16="http://schemas.microsoft.com/office/drawing/2014/main" id="{E13B5C07-75ED-41BC-B29F-C4F43F48C682}"/>
               </a:ext>
             </a:extLst>
           </p:cNvPr>
@@ -20041,7 +20041,7 @@
           <p:cNvPr id="10" name="">
             <a:extLst xmlns:a="http://schemas.openxmlformats.org/drawingml/2006/main">
               <a:ext uri="{FF2B5EF4-FFF2-40B4-BE49-F238E27FC236}">
-                <a16:creationId xmlns:a16="http://schemas.microsoft.com/office/drawing/2014/main" id="{17351FE3-487E-4210-89A9-0AD1CB2AA003}"/>
+                <a16:creationId xmlns:a16="http://schemas.microsoft.com/office/drawing/2014/main" id="{5A8AF155-1463-4A0A-87B9-A9797D0DB94A}"/>
               </a:ext>
             </a:extLst>
           </p:cNvPr>
@@ -20103,7 +20103,7 @@
           <p:cNvPr id="11" name="">
             <a:extLst xmlns:a="http://schemas.openxmlformats.org/drawingml/2006/main">
               <a:ext uri="{FF2B5EF4-FFF2-40B4-BE49-F238E27FC236}">
-                <a16:creationId xmlns:a16="http://schemas.microsoft.com/office/drawing/2014/main" id="{543D83D9-2DC4-4A78-AF53-7B80BA720E70}"/>
+                <a16:creationId xmlns:a16="http://schemas.microsoft.com/office/drawing/2014/main" id="{9BFBC141-992D-4AB2-95DE-E659FDF7273C}"/>
               </a:ext>
             </a:extLst>
           </p:cNvPr>
@@ -20165,7 +20165,7 @@
           <p:cNvPr id="12" name="">
             <a:extLst xmlns:a="http://schemas.openxmlformats.org/drawingml/2006/main">
               <a:ext uri="{FF2B5EF4-FFF2-40B4-BE49-F238E27FC236}">
-                <a16:creationId xmlns:a16="http://schemas.microsoft.com/office/drawing/2014/main" id="{1D227F7E-C737-4ED3-9572-C023304AC0F9}"/>
+                <a16:creationId xmlns:a16="http://schemas.microsoft.com/office/drawing/2014/main" id="{7C0E49D4-EE9B-4EF8-A7A8-3C2F278563E3}"/>
               </a:ext>
             </a:extLst>
           </p:cNvPr>
@@ -20198,7 +20198,7 @@
           <p:cNvPr id="13" name="">
             <a:extLst xmlns:a="http://schemas.openxmlformats.org/drawingml/2006/main">
               <a:ext uri="{FF2B5EF4-FFF2-40B4-BE49-F238E27FC236}">
-                <a16:creationId xmlns:a16="http://schemas.microsoft.com/office/drawing/2014/main" id="{E7AFA003-C780-4737-AA47-C05E32627B16}"/>
+                <a16:creationId xmlns:a16="http://schemas.microsoft.com/office/drawing/2014/main" id="{DFAE16DF-ECFE-4E84-990F-7BDC106BE4B0}"/>
               </a:ext>
             </a:extLst>
           </p:cNvPr>
@@ -20233,7 +20233,7 @@
           <p:cNvPr id="14" name="">
             <a:extLst xmlns:a="http://schemas.openxmlformats.org/drawingml/2006/main">
               <a:ext uri="{FF2B5EF4-FFF2-40B4-BE49-F238E27FC236}">
-                <a16:creationId xmlns:a16="http://schemas.microsoft.com/office/drawing/2014/main" id="{FAFA2715-29F0-4B75-8ECD-098C4122229E}"/>
+                <a16:creationId xmlns:a16="http://schemas.microsoft.com/office/drawing/2014/main" id="{109F50FA-0374-48C9-AD81-C75981CB656F}"/>
               </a:ext>
             </a:extLst>
           </p:cNvPr>
@@ -20264,7 +20264,7 @@
           <p:cNvPr id="15" name="">
             <a:extLst xmlns:a="http://schemas.openxmlformats.org/drawingml/2006/main">
               <a:ext uri="{FF2B5EF4-FFF2-40B4-BE49-F238E27FC236}">
-                <a16:creationId xmlns:a16="http://schemas.microsoft.com/office/drawing/2014/main" id="{8654DD20-A277-4A13-B1CD-F7D954DA155F}"/>
+                <a16:creationId xmlns:a16="http://schemas.microsoft.com/office/drawing/2014/main" id="{B6B64BC6-1ACA-430F-9763-5F11CEDB5AC2}"/>
               </a:ext>
             </a:extLst>
           </p:cNvPr>
@@ -20326,7 +20326,7 @@
           <p:cNvPr id="16" name="">
             <a:extLst xmlns:a="http://schemas.openxmlformats.org/drawingml/2006/main">
               <a:ext uri="{FF2B5EF4-FFF2-40B4-BE49-F238E27FC236}">
-                <a16:creationId xmlns:a16="http://schemas.microsoft.com/office/drawing/2014/main" id="{41AFFA70-35B7-45C2-91C4-589D18E020F4}"/>
+                <a16:creationId xmlns:a16="http://schemas.microsoft.com/office/drawing/2014/main" id="{04C74BD3-BF87-433B-99A1-467739F1865B}"/>
               </a:ext>
             </a:extLst>
           </p:cNvPr>
@@ -20388,7 +20388,7 @@
           <p:cNvPr id="17" name="">
             <a:extLst xmlns:a="http://schemas.openxmlformats.org/drawingml/2006/main">
               <a:ext uri="{FF2B5EF4-FFF2-40B4-BE49-F238E27FC236}">
-                <a16:creationId xmlns:a16="http://schemas.microsoft.com/office/drawing/2014/main" id="{19746E7F-6D6A-4243-9FB0-CBABF816A4CB}"/>
+                <a16:creationId xmlns:a16="http://schemas.microsoft.com/office/drawing/2014/main" id="{199DBB46-06F7-4A8E-A5C3-CD3C35675A6A}"/>
               </a:ext>
             </a:extLst>
           </p:cNvPr>
@@ -20421,7 +20421,7 @@
           <p:cNvPr id="18" name="">
             <a:extLst xmlns:a="http://schemas.openxmlformats.org/drawingml/2006/main">
               <a:ext uri="{FF2B5EF4-FFF2-40B4-BE49-F238E27FC236}">
-                <a16:creationId xmlns:a16="http://schemas.microsoft.com/office/drawing/2014/main" id="{DABABA3A-1A25-4513-9AD4-8417956D8E9B}"/>
+                <a16:creationId xmlns:a16="http://schemas.microsoft.com/office/drawing/2014/main" id="{C791096F-2CCC-42F4-961E-B08950251E6F}"/>
               </a:ext>
             </a:extLst>
           </p:cNvPr>
@@ -20456,7 +20456,7 @@
           <p:cNvPr id="19" name="">
             <a:extLst xmlns:a="http://schemas.openxmlformats.org/drawingml/2006/main">
               <a:ext uri="{FF2B5EF4-FFF2-40B4-BE49-F238E27FC236}">
-                <a16:creationId xmlns:a16="http://schemas.microsoft.com/office/drawing/2014/main" id="{4A5C310A-357E-4A17-A432-BC09DFD771D3}"/>
+                <a16:creationId xmlns:a16="http://schemas.microsoft.com/office/drawing/2014/main" id="{8C94F97F-9460-4193-ADB5-860CB27C0A8A}"/>
               </a:ext>
             </a:extLst>
           </p:cNvPr>
@@ -20487,7 +20487,7 @@
           <p:cNvPr id="20" name="">
             <a:extLst xmlns:a="http://schemas.openxmlformats.org/drawingml/2006/main">
               <a:ext uri="{FF2B5EF4-FFF2-40B4-BE49-F238E27FC236}">
-                <a16:creationId xmlns:a16="http://schemas.microsoft.com/office/drawing/2014/main" id="{770B8B23-45D4-40B6-9610-F0445CD2BD46}"/>
+                <a16:creationId xmlns:a16="http://schemas.microsoft.com/office/drawing/2014/main" id="{3CAC68E0-D2A2-4676-A8C6-88FED6A22D9C}"/>
               </a:ext>
             </a:extLst>
           </p:cNvPr>
@@ -20549,7 +20549,7 @@
           <p:cNvPr id="21" name="">
             <a:extLst xmlns:a="http://schemas.openxmlformats.org/drawingml/2006/main">
               <a:ext uri="{FF2B5EF4-FFF2-40B4-BE49-F238E27FC236}">
-                <a16:creationId xmlns:a16="http://schemas.microsoft.com/office/drawing/2014/main" id="{28BEBC33-DADE-4C12-9DD0-04F2961DC91F}"/>
+                <a16:creationId xmlns:a16="http://schemas.microsoft.com/office/drawing/2014/main" id="{D923BD64-2845-42FF-B551-300C7B1091A9}"/>
               </a:ext>
             </a:extLst>
           </p:cNvPr>
@@ -20611,7 +20611,7 @@
           <p:cNvPr id="22" name="">
             <a:extLst xmlns:a="http://schemas.openxmlformats.org/drawingml/2006/main">
               <a:ext uri="{FF2B5EF4-FFF2-40B4-BE49-F238E27FC236}">
-                <a16:creationId xmlns:a16="http://schemas.microsoft.com/office/drawing/2014/main" id="{9B687A67-D21A-4755-BD08-9C554E78E374}"/>
+                <a16:creationId xmlns:a16="http://schemas.microsoft.com/office/drawing/2014/main" id="{9EAB816E-F32A-4850-BF55-86E37B55395D}"/>
               </a:ext>
             </a:extLst>
           </p:cNvPr>
@@ -20673,7 +20673,7 @@
           <p:cNvPr id="23" name="">
             <a:extLst xmlns:a="http://schemas.openxmlformats.org/drawingml/2006/main">
               <a:ext uri="{FF2B5EF4-FFF2-40B4-BE49-F238E27FC236}">
-                <a16:creationId xmlns:a16="http://schemas.microsoft.com/office/drawing/2014/main" id="{854E1930-93ED-43F3-9A3C-82F21C204B64}"/>
+                <a16:creationId xmlns:a16="http://schemas.microsoft.com/office/drawing/2014/main" id="{464FEBFA-A165-4BAD-AFAE-69A97207FF05}"/>
               </a:ext>
             </a:extLst>
           </p:cNvPr>
@@ -20733,7 +20733,7 @@
     </p:spTree>
     <p:extLst>
       <p:ext uri="{BB962C8B-B14F-4D97-AF65-F5344CB8AC3E}">
-        <p14:creationId xmlns:p14="http://schemas.microsoft.com/office/powerpoint/2010/main" val="1463010471"/>
+        <p14:creationId xmlns:p14="http://schemas.microsoft.com/office/powerpoint/2010/main" val="1695104659"/>
       </p:ext>
     </p:extLst>
   </p:cSld>
